--- a/docs/02-20_02_Article_Eater_24slides_V3.pptx
+++ b/docs/02-20_02_Article_Eater_24slides_V3.pptx
@@ -5,33 +5,34 @@
     <p:sldMasterId id="2147483648" r:id="rId1"/>
   </p:sldMasterIdLst>
   <p:notesMasterIdLst>
-    <p:notesMasterId r:id="rId26"/>
+    <p:notesMasterId r:id="rId27"/>
   </p:notesMasterIdLst>
   <p:sldIdLst>
     <p:sldId id="256" r:id="rId2"/>
-    <p:sldId id="257" r:id="rId3"/>
-    <p:sldId id="258" r:id="rId4"/>
-    <p:sldId id="259" r:id="rId5"/>
-    <p:sldId id="260" r:id="rId6"/>
-    <p:sldId id="261" r:id="rId7"/>
-    <p:sldId id="262" r:id="rId8"/>
-    <p:sldId id="263" r:id="rId9"/>
-    <p:sldId id="264" r:id="rId10"/>
-    <p:sldId id="265" r:id="rId11"/>
-    <p:sldId id="266" r:id="rId12"/>
-    <p:sldId id="267" r:id="rId13"/>
-    <p:sldId id="268" r:id="rId14"/>
-    <p:sldId id="269" r:id="rId15"/>
-    <p:sldId id="270" r:id="rId16"/>
-    <p:sldId id="271" r:id="rId17"/>
-    <p:sldId id="272" r:id="rId18"/>
-    <p:sldId id="273" r:id="rId19"/>
-    <p:sldId id="274" r:id="rId20"/>
-    <p:sldId id="275" r:id="rId21"/>
-    <p:sldId id="276" r:id="rId22"/>
-    <p:sldId id="277" r:id="rId23"/>
-    <p:sldId id="278" r:id="rId24"/>
-    <p:sldId id="279" r:id="rId25"/>
+    <p:sldId id="280" r:id="rId3"/>
+    <p:sldId id="257" r:id="rId4"/>
+    <p:sldId id="258" r:id="rId5"/>
+    <p:sldId id="259" r:id="rId6"/>
+    <p:sldId id="260" r:id="rId7"/>
+    <p:sldId id="261" r:id="rId8"/>
+    <p:sldId id="262" r:id="rId9"/>
+    <p:sldId id="263" r:id="rId10"/>
+    <p:sldId id="264" r:id="rId11"/>
+    <p:sldId id="265" r:id="rId12"/>
+    <p:sldId id="266" r:id="rId13"/>
+    <p:sldId id="267" r:id="rId14"/>
+    <p:sldId id="268" r:id="rId15"/>
+    <p:sldId id="269" r:id="rId16"/>
+    <p:sldId id="270" r:id="rId17"/>
+    <p:sldId id="271" r:id="rId18"/>
+    <p:sldId id="272" r:id="rId19"/>
+    <p:sldId id="273" r:id="rId20"/>
+    <p:sldId id="274" r:id="rId21"/>
+    <p:sldId id="275" r:id="rId22"/>
+    <p:sldId id="276" r:id="rId23"/>
+    <p:sldId id="277" r:id="rId24"/>
+    <p:sldId id="278" r:id="rId25"/>
+    <p:sldId id="279" r:id="rId26"/>
   </p:sldIdLst>
   <p:sldSz cx="9144000" cy="5143500" type="screen16x9"/>
   <p:notesSz cx="5143500" cy="9144000"/>
@@ -415,7 +416,7 @@
           <a:p>
             <a:fld id="{F7021451-1387-4CA6-816F-3879F97B5CBC}" type="slidenum">
               <a:rPr lang="en-US"/>
-              <a:t>10</a:t>
+              <a:t>11</a:t>
             </a:fld>
             <a:endParaRPr lang="en-US"/>
           </a:p>
@@ -502,7 +503,7 @@
           <a:p>
             <a:fld id="{F7021451-1387-4CA6-816F-3879F97B5CBC}" type="slidenum">
               <a:rPr lang="en-US"/>
-              <a:t>11</a:t>
+              <a:t>12</a:t>
             </a:fld>
             <a:endParaRPr lang="en-US"/>
           </a:p>
@@ -589,7 +590,7 @@
           <a:p>
             <a:fld id="{F7021451-1387-4CA6-816F-3879F97B5CBC}" type="slidenum">
               <a:rPr lang="en-US"/>
-              <a:t>12</a:t>
+              <a:t>13</a:t>
             </a:fld>
             <a:endParaRPr lang="en-US"/>
           </a:p>
@@ -676,7 +677,7 @@
           <a:p>
             <a:fld id="{F7021451-1387-4CA6-816F-3879F97B5CBC}" type="slidenum">
               <a:rPr lang="en-US"/>
-              <a:t>13</a:t>
+              <a:t>14</a:t>
             </a:fld>
             <a:endParaRPr lang="en-US"/>
           </a:p>
@@ -763,7 +764,7 @@
           <a:p>
             <a:fld id="{F7021451-1387-4CA6-816F-3879F97B5CBC}" type="slidenum">
               <a:rPr lang="en-US"/>
-              <a:t>14</a:t>
+              <a:t>15</a:t>
             </a:fld>
             <a:endParaRPr lang="en-US"/>
           </a:p>
@@ -850,7 +851,7 @@
           <a:p>
             <a:fld id="{F7021451-1387-4CA6-816F-3879F97B5CBC}" type="slidenum">
               <a:rPr lang="en-US"/>
-              <a:t>15</a:t>
+              <a:t>16</a:t>
             </a:fld>
             <a:endParaRPr lang="en-US"/>
           </a:p>
@@ -937,7 +938,7 @@
           <a:p>
             <a:fld id="{F7021451-1387-4CA6-816F-3879F97B5CBC}" type="slidenum">
               <a:rPr lang="en-US"/>
-              <a:t>16</a:t>
+              <a:t>17</a:t>
             </a:fld>
             <a:endParaRPr lang="en-US"/>
           </a:p>
@@ -1024,7 +1025,7 @@
           <a:p>
             <a:fld id="{F7021451-1387-4CA6-816F-3879F97B5CBC}" type="slidenum">
               <a:rPr lang="en-US"/>
-              <a:t>17</a:t>
+              <a:t>18</a:t>
             </a:fld>
             <a:endParaRPr lang="en-US"/>
           </a:p>
@@ -1111,7 +1112,7 @@
           <a:p>
             <a:fld id="{F7021451-1387-4CA6-816F-3879F97B5CBC}" type="slidenum">
               <a:rPr lang="en-US"/>
-              <a:t>18</a:t>
+              <a:t>19</a:t>
             </a:fld>
             <a:endParaRPr lang="en-US"/>
           </a:p>
@@ -1198,7 +1199,7 @@
           <a:p>
             <a:fld id="{F7021451-1387-4CA6-816F-3879F97B5CBC}" type="slidenum">
               <a:rPr lang="en-US"/>
-              <a:t>19</a:t>
+              <a:t>20</a:t>
             </a:fld>
             <a:endParaRPr lang="en-US"/>
           </a:p>
@@ -1285,7 +1286,7 @@
           <a:p>
             <a:fld id="{F7021451-1387-4CA6-816F-3879F97B5CBC}" type="slidenum">
               <a:rPr lang="en-US"/>
-              <a:t>2</a:t>
+              <a:t>3</a:t>
             </a:fld>
             <a:endParaRPr lang="en-US"/>
           </a:p>
@@ -1372,7 +1373,7 @@
           <a:p>
             <a:fld id="{F7021451-1387-4CA6-816F-3879F97B5CBC}" type="slidenum">
               <a:rPr lang="en-US"/>
-              <a:t>20</a:t>
+              <a:t>21</a:t>
             </a:fld>
             <a:endParaRPr lang="en-US"/>
           </a:p>
@@ -1459,7 +1460,7 @@
           <a:p>
             <a:fld id="{F7021451-1387-4CA6-816F-3879F97B5CBC}" type="slidenum">
               <a:rPr lang="en-US"/>
-              <a:t>21</a:t>
+              <a:t>22</a:t>
             </a:fld>
             <a:endParaRPr lang="en-US"/>
           </a:p>
@@ -1546,7 +1547,7 @@
           <a:p>
             <a:fld id="{F7021451-1387-4CA6-816F-3879F97B5CBC}" type="slidenum">
               <a:rPr lang="en-US"/>
-              <a:t>22</a:t>
+              <a:t>23</a:t>
             </a:fld>
             <a:endParaRPr lang="en-US"/>
           </a:p>
@@ -1633,7 +1634,7 @@
           <a:p>
             <a:fld id="{F7021451-1387-4CA6-816F-3879F97B5CBC}" type="slidenum">
               <a:rPr lang="en-US"/>
-              <a:t>23</a:t>
+              <a:t>24</a:t>
             </a:fld>
             <a:endParaRPr lang="en-US"/>
           </a:p>
@@ -1717,7 +1718,7 @@
           <a:p>
             <a:fld id="{F7021451-1387-4CA6-816F-3879F97B5CBC}" type="slidenum">
               <a:rPr lang="en-US"/>
-              <a:t>24</a:t>
+              <a:t>25</a:t>
             </a:fld>
             <a:endParaRPr lang="en-US"/>
           </a:p>
@@ -1804,7 +1805,7 @@
           <a:p>
             <a:fld id="{F7021451-1387-4CA6-816F-3879F97B5CBC}" type="slidenum">
               <a:rPr lang="en-US"/>
-              <a:t>3</a:t>
+              <a:t>4</a:t>
             </a:fld>
             <a:endParaRPr lang="en-US"/>
           </a:p>
@@ -1891,7 +1892,7 @@
           <a:p>
             <a:fld id="{F7021451-1387-4CA6-816F-3879F97B5CBC}" type="slidenum">
               <a:rPr lang="en-US"/>
-              <a:t>4</a:t>
+              <a:t>5</a:t>
             </a:fld>
             <a:endParaRPr lang="en-US"/>
           </a:p>
@@ -1978,7 +1979,7 @@
           <a:p>
             <a:fld id="{F7021451-1387-4CA6-816F-3879F97B5CBC}" type="slidenum">
               <a:rPr lang="en-US"/>
-              <a:t>5</a:t>
+              <a:t>6</a:t>
             </a:fld>
             <a:endParaRPr lang="en-US"/>
           </a:p>
@@ -2065,7 +2066,7 @@
           <a:p>
             <a:fld id="{F7021451-1387-4CA6-816F-3879F97B5CBC}" type="slidenum">
               <a:rPr lang="en-US"/>
-              <a:t>6</a:t>
+              <a:t>7</a:t>
             </a:fld>
             <a:endParaRPr lang="en-US"/>
           </a:p>
@@ -2152,7 +2153,7 @@
           <a:p>
             <a:fld id="{F7021451-1387-4CA6-816F-3879F97B5CBC}" type="slidenum">
               <a:rPr lang="en-US"/>
-              <a:t>7</a:t>
+              <a:t>8</a:t>
             </a:fld>
             <a:endParaRPr lang="en-US"/>
           </a:p>
@@ -2239,7 +2240,7 @@
           <a:p>
             <a:fld id="{F7021451-1387-4CA6-816F-3879F97B5CBC}" type="slidenum">
               <a:rPr lang="en-US"/>
-              <a:t>8</a:t>
+              <a:t>9</a:t>
             </a:fld>
             <a:endParaRPr lang="en-US"/>
           </a:p>
@@ -2326,7 +2327,7 @@
           <a:p>
             <a:fld id="{F7021451-1387-4CA6-816F-3879F97B5CBC}" type="slidenum">
               <a:rPr lang="en-US"/>
-              <a:t>9</a:t>
+              <a:t>10</a:t>
             </a:fld>
             <a:endParaRPr lang="en-US"/>
           </a:p>
@@ -2896,6 +2897,780 @@
 
 <file path=ppt/slides/slide10.xml><?xml version="1.0" encoding="utf-8"?>
 <p:sld xmlns:a="http://schemas.openxmlformats.org/drawingml/2006/main" xmlns:r="http://schemas.openxmlformats.org/officeDocument/2006/relationships" xmlns:p="http://schemas.openxmlformats.org/presentationml/2006/main">
+  <p:cSld name="Slide 9">
+    <p:bg>
+      <p:bgPr>
+        <a:solidFill>
+          <a:srgbClr val="FFFFFF"/>
+        </a:solidFill>
+        <a:effectLst/>
+      </p:bgPr>
+    </p:bg>
+    <p:spTree>
+      <p:nvGrpSpPr>
+        <p:cNvPr id="1" name=""/>
+        <p:cNvGrpSpPr/>
+        <p:nvPr/>
+      </p:nvGrpSpPr>
+      <p:grpSpPr>
+        <a:xfrm>
+          <a:off x="0" y="0"/>
+          <a:ext cx="0" cy="0"/>
+          <a:chOff x="0" y="0"/>
+          <a:chExt cx="0" cy="0"/>
+        </a:xfrm>
+      </p:grpSpPr>
+      <p:sp>
+        <p:nvSpPr>
+          <p:cNvPr id="2" name="Text 0"/>
+          <p:cNvSpPr/>
+          <p:nvPr/>
+        </p:nvSpPr>
+        <p:spPr>
+          <a:xfrm>
+            <a:off x="548640" y="228600"/>
+            <a:ext cx="3657600" cy="182880"/>
+          </a:xfrm>
+          <a:prstGeom prst="rect">
+            <a:avLst/>
+          </a:prstGeom>
+          <a:noFill/>
+          <a:ln/>
+        </p:spPr>
+        <p:txBody>
+          <a:bodyPr wrap="square" lIns="0" tIns="0" rIns="0" bIns="0" rtlCol="0" anchor="ctr"/>
+          <a:lstStyle/>
+          <a:p>
+            <a:pPr marL="0" indent="0">
+              <a:buNone/>
+            </a:pPr>
+            <a:r>
+              <a:rPr lang="en-US" sz="900" b="1" kern="0" spc="300" dirty="0">
+                <a:solidFill>
+                  <a:srgbClr val="2B5A8C"/>
+                </a:solidFill>
+                <a:latin typeface="Calibri" pitchFamily="34" charset="0"/>
+                <a:ea typeface="Calibri" pitchFamily="34" charset="-122"/>
+                <a:cs typeface="Calibri" pitchFamily="34" charset="-120"/>
+              </a:rPr>
+              <a:t>NEURO MEETS ENV PSYCH — EXAMPLE 1</a:t>
+            </a:r>
+            <a:endParaRPr lang="en-US" sz="900" dirty="0"/>
+          </a:p>
+        </p:txBody>
+      </p:sp>
+      <p:sp>
+        <p:nvSpPr>
+          <p:cNvPr id="3" name="Text 1"/>
+          <p:cNvSpPr/>
+          <p:nvPr/>
+        </p:nvSpPr>
+        <p:spPr>
+          <a:xfrm>
+            <a:off x="548640" y="438912"/>
+            <a:ext cx="8046720" cy="640080"/>
+          </a:xfrm>
+          <a:prstGeom prst="rect">
+            <a:avLst/>
+          </a:prstGeom>
+          <a:noFill/>
+          <a:ln/>
+        </p:spPr>
+        <p:txBody>
+          <a:bodyPr wrap="square" lIns="0" tIns="0" rIns="0" bIns="0" rtlCol="0" anchor="ctr"/>
+          <a:lstStyle/>
+          <a:p>
+            <a:pPr marL="0" indent="0">
+              <a:buNone/>
+            </a:pPr>
+            <a:r>
+              <a:rPr lang="en-US" sz="2600" b="1" dirty="0">
+                <a:solidFill>
+                  <a:srgbClr val="1E293B"/>
+                </a:solidFill>
+                <a:latin typeface="Georgia" pitchFamily="34" charset="0"/>
+                <a:ea typeface="Georgia" pitchFamily="34" charset="-122"/>
+                <a:cs typeface="Georgia" pitchFamily="34" charset="-120"/>
+              </a:rPr>
+              <a:t>Daylight: Two Pathways,</a:t>
+            </a:r>
+            <a:endParaRPr lang="en-US" sz="2600" dirty="0"/>
+          </a:p>
+          <a:p>
+            <a:pPr marL="0" indent="0">
+              <a:buNone/>
+            </a:pPr>
+            <a:r>
+              <a:rPr lang="en-US" sz="2600" b="1" dirty="0">
+                <a:solidFill>
+                  <a:srgbClr val="1E293B"/>
+                </a:solidFill>
+                <a:latin typeface="Georgia" pitchFamily="34" charset="0"/>
+                <a:ea typeface="Georgia" pitchFamily="34" charset="-122"/>
+                <a:cs typeface="Georgia" pitchFamily="34" charset="-120"/>
+              </a:rPr>
+              <a:t>Two Design Strategies</a:t>
+            </a:r>
+            <a:endParaRPr lang="en-US" sz="2600" dirty="0"/>
+          </a:p>
+        </p:txBody>
+      </p:sp>
+      <p:sp>
+        <p:nvSpPr>
+          <p:cNvPr id="4" name="Shape 2"/>
+          <p:cNvSpPr/>
+          <p:nvPr/>
+        </p:nvSpPr>
+        <p:spPr>
+          <a:xfrm>
+            <a:off x="548640" y="1280160"/>
+            <a:ext cx="3794760" cy="2011680"/>
+          </a:xfrm>
+          <a:prstGeom prst="rect">
+            <a:avLst/>
+          </a:prstGeom>
+          <a:solidFill>
+            <a:srgbClr val="F8FAFC"/>
+          </a:solidFill>
+          <a:ln w="6350">
+            <a:solidFill>
+              <a:srgbClr val="E2E8F0"/>
+            </a:solidFill>
+            <a:prstDash val="solid"/>
+          </a:ln>
+          <a:effectLst>
+            <a:outerShdw blurRad="50800" dist="12700" dir="8100000" algn="bl" rotWithShape="0">
+              <a:srgbClr val="000000">
+                <a:alpha val="6000"/>
+              </a:srgbClr>
+            </a:outerShdw>
+          </a:effectLst>
+        </p:spPr>
+        <p:txBody>
+          <a:bodyPr/>
+          <a:lstStyle/>
+          <a:p>
+            <a:endParaRPr lang="en-US"/>
+          </a:p>
+        </p:txBody>
+      </p:sp>
+      <p:sp>
+        <p:nvSpPr>
+          <p:cNvPr id="5" name="Shape 3"/>
+          <p:cNvSpPr/>
+          <p:nvPr/>
+        </p:nvSpPr>
+        <p:spPr>
+          <a:xfrm>
+            <a:off x="548640" y="1280160"/>
+            <a:ext cx="54864" cy="2011680"/>
+          </a:xfrm>
+          <a:prstGeom prst="rect">
+            <a:avLst/>
+          </a:prstGeom>
+          <a:solidFill>
+            <a:srgbClr val="2B5A8C"/>
+          </a:solidFill>
+          <a:ln/>
+        </p:spPr>
+        <p:txBody>
+          <a:bodyPr/>
+          <a:lstStyle/>
+          <a:p>
+            <a:endParaRPr lang="en-US"/>
+          </a:p>
+        </p:txBody>
+      </p:sp>
+      <p:sp>
+        <p:nvSpPr>
+          <p:cNvPr id="6" name="Text 4"/>
+          <p:cNvSpPr/>
+          <p:nvPr/>
+        </p:nvSpPr>
+        <p:spPr>
+          <a:xfrm>
+            <a:off x="777240" y="1353312"/>
+            <a:ext cx="3383280" cy="201168"/>
+          </a:xfrm>
+          <a:prstGeom prst="rect">
+            <a:avLst/>
+          </a:prstGeom>
+          <a:noFill/>
+          <a:ln/>
+        </p:spPr>
+        <p:txBody>
+          <a:bodyPr wrap="square" lIns="0" tIns="0" rIns="0" bIns="0" rtlCol="0" anchor="ctr"/>
+          <a:lstStyle/>
+          <a:p>
+            <a:pPr marL="0" indent="0">
+              <a:buNone/>
+            </a:pPr>
+            <a:r>
+              <a:rPr lang="en-US" sz="850" b="1" kern="0" spc="200" dirty="0">
+                <a:solidFill>
+                  <a:srgbClr val="2B5A8C"/>
+                </a:solidFill>
+                <a:latin typeface="Calibri" pitchFamily="34" charset="0"/>
+                <a:ea typeface="Calibri" pitchFamily="34" charset="-122"/>
+                <a:cs typeface="Calibri" pitchFamily="34" charset="-120"/>
+              </a:rPr>
+              <a:t>IMAGE-FORMING PATHWAY</a:t>
+            </a:r>
+            <a:endParaRPr lang="en-US" sz="850" dirty="0"/>
+          </a:p>
+        </p:txBody>
+      </p:sp>
+      <p:sp>
+        <p:nvSpPr>
+          <p:cNvPr id="7" name="Text 5"/>
+          <p:cNvSpPr/>
+          <p:nvPr/>
+        </p:nvSpPr>
+        <p:spPr>
+          <a:xfrm>
+            <a:off x="777240" y="1600200"/>
+            <a:ext cx="3383280" cy="1554480"/>
+          </a:xfrm>
+          <a:prstGeom prst="rect">
+            <a:avLst/>
+          </a:prstGeom>
+          <a:noFill/>
+          <a:ln/>
+        </p:spPr>
+        <p:txBody>
+          <a:bodyPr wrap="square" lIns="0" tIns="0" rIns="0" bIns="0" rtlCol="0" anchor="ctr"/>
+          <a:lstStyle/>
+          <a:p>
+            <a:pPr marL="0" indent="0">
+              <a:lnSpc>
+                <a:spcPct val="110000"/>
+              </a:lnSpc>
+              <a:buNone/>
+            </a:pPr>
+            <a:r>
+              <a:rPr lang="en-US" sz="1050" dirty="0">
+                <a:solidFill>
+                  <a:srgbClr val="1E293B"/>
+                </a:solidFill>
+                <a:latin typeface="Calibri" pitchFamily="34" charset="0"/>
+                <a:ea typeface="Calibri" pitchFamily="34" charset="-122"/>
+                <a:cs typeface="Calibri" pitchFamily="34" charset="-120"/>
+              </a:rPr>
+              <a:t>Rods/cones → V1 → ventral stream → scene perception
+</a:t>
+            </a:r>
+            <a:endParaRPr lang="en-US" sz="1050" dirty="0"/>
+          </a:p>
+          <a:p>
+            <a:pPr marL="0" indent="0">
+              <a:lnSpc>
+                <a:spcPct val="110000"/>
+              </a:lnSpc>
+              <a:buNone/>
+            </a:pPr>
+            <a:r>
+              <a:rPr lang="en-US" sz="1050" b="1" dirty="0">
+                <a:solidFill>
+                  <a:srgbClr val="1E293B"/>
+                </a:solidFill>
+                <a:latin typeface="Calibri" pitchFamily="34" charset="0"/>
+                <a:ea typeface="Calibri" pitchFamily="34" charset="-122"/>
+                <a:cs typeface="Calibri" pitchFamily="34" charset="-120"/>
+              </a:rPr>
+              <a:t>Provides: </a:t>
+            </a:r>
+            <a:r>
+              <a:rPr lang="en-US" sz="1050" dirty="0">
+                <a:solidFill>
+                  <a:srgbClr val="1E293B"/>
+                </a:solidFill>
+                <a:latin typeface="Calibri" pitchFamily="34" charset="0"/>
+                <a:ea typeface="Calibri" pitchFamily="34" charset="-122"/>
+                <a:cs typeface="Calibri" pitchFamily="34" charset="-120"/>
+              </a:rPr>
+              <a:t>visual complexity, fractal content, biophilic stimulation
+</a:t>
+            </a:r>
+            <a:endParaRPr lang="en-US" sz="1050" dirty="0"/>
+          </a:p>
+          <a:p>
+            <a:pPr marL="0" indent="0">
+              <a:lnSpc>
+                <a:spcPct val="110000"/>
+              </a:lnSpc>
+              <a:buNone/>
+            </a:pPr>
+            <a:r>
+              <a:rPr lang="en-US" sz="1050" b="1" dirty="0">
+                <a:solidFill>
+                  <a:srgbClr val="1E293B"/>
+                </a:solidFill>
+                <a:latin typeface="Calibri" pitchFamily="34" charset="0"/>
+                <a:ea typeface="Calibri" pitchFamily="34" charset="-122"/>
+                <a:cs typeface="Calibri" pitchFamily="34" charset="-120"/>
+              </a:rPr>
+              <a:t>Design: </a:t>
+            </a:r>
+            <a:r>
+              <a:rPr lang="en-US" sz="1050" dirty="0">
+                <a:solidFill>
+                  <a:srgbClr val="1E293B"/>
+                </a:solidFill>
+                <a:latin typeface="Calibri" pitchFamily="34" charset="0"/>
+                <a:ea typeface="Calibri" pitchFamily="34" charset="-122"/>
+                <a:cs typeface="Calibri" pitchFamily="34" charset="-120"/>
+              </a:rPr>
+              <a:t>Window SIZE, VIEW CONTENT (nature vs. parking lot)
+</a:t>
+            </a:r>
+            <a:endParaRPr lang="en-US" sz="1050" dirty="0"/>
+          </a:p>
+          <a:p>
+            <a:pPr marL="0" indent="0">
+              <a:lnSpc>
+                <a:spcPct val="110000"/>
+              </a:lnSpc>
+              <a:buNone/>
+            </a:pPr>
+            <a:r>
+              <a:rPr lang="en-US" sz="1050" i="1" dirty="0">
+                <a:solidFill>
+                  <a:srgbClr val="1E293B"/>
+                </a:solidFill>
+                <a:latin typeface="Calibri" pitchFamily="34" charset="0"/>
+                <a:ea typeface="Calibri" pitchFamily="34" charset="-122"/>
+                <a:cs typeface="Calibri" pitchFamily="34" charset="-120"/>
+              </a:rPr>
+              <a:t>The Ulrich effect operates here — it's the image that heals</a:t>
+            </a:r>
+            <a:endParaRPr lang="en-US" sz="1050" dirty="0"/>
+          </a:p>
+        </p:txBody>
+      </p:sp>
+      <p:sp>
+        <p:nvSpPr>
+          <p:cNvPr id="8" name="Shape 6"/>
+          <p:cNvSpPr/>
+          <p:nvPr/>
+        </p:nvSpPr>
+        <p:spPr>
+          <a:xfrm>
+            <a:off x="4800600" y="1280160"/>
+            <a:ext cx="3977640" cy="2011680"/>
+          </a:xfrm>
+          <a:prstGeom prst="rect">
+            <a:avLst/>
+          </a:prstGeom>
+          <a:solidFill>
+            <a:srgbClr val="F8FAFC"/>
+          </a:solidFill>
+          <a:ln w="6350">
+            <a:solidFill>
+              <a:srgbClr val="E2E8F0"/>
+            </a:solidFill>
+            <a:prstDash val="solid"/>
+          </a:ln>
+          <a:effectLst>
+            <a:outerShdw blurRad="50800" dist="12700" dir="8100000" algn="bl" rotWithShape="0">
+              <a:srgbClr val="000000">
+                <a:alpha val="6000"/>
+              </a:srgbClr>
+            </a:outerShdw>
+          </a:effectLst>
+        </p:spPr>
+        <p:txBody>
+          <a:bodyPr/>
+          <a:lstStyle/>
+          <a:p>
+            <a:endParaRPr lang="en-US"/>
+          </a:p>
+        </p:txBody>
+      </p:sp>
+      <p:sp>
+        <p:nvSpPr>
+          <p:cNvPr id="9" name="Shape 7"/>
+          <p:cNvSpPr/>
+          <p:nvPr/>
+        </p:nvSpPr>
+        <p:spPr>
+          <a:xfrm>
+            <a:off x="4800600" y="1280160"/>
+            <a:ext cx="54864" cy="2011680"/>
+          </a:xfrm>
+          <a:prstGeom prst="rect">
+            <a:avLst/>
+          </a:prstGeom>
+          <a:solidFill>
+            <a:srgbClr val="6B3B8C"/>
+          </a:solidFill>
+          <a:ln/>
+        </p:spPr>
+        <p:txBody>
+          <a:bodyPr/>
+          <a:lstStyle/>
+          <a:p>
+            <a:endParaRPr lang="en-US"/>
+          </a:p>
+        </p:txBody>
+      </p:sp>
+      <p:sp>
+        <p:nvSpPr>
+          <p:cNvPr id="10" name="Text 8"/>
+          <p:cNvSpPr/>
+          <p:nvPr/>
+        </p:nvSpPr>
+        <p:spPr>
+          <a:xfrm>
+            <a:off x="5029200" y="1353312"/>
+            <a:ext cx="3566160" cy="201168"/>
+          </a:xfrm>
+          <a:prstGeom prst="rect">
+            <a:avLst/>
+          </a:prstGeom>
+          <a:noFill/>
+          <a:ln/>
+        </p:spPr>
+        <p:txBody>
+          <a:bodyPr wrap="square" lIns="0" tIns="0" rIns="0" bIns="0" rtlCol="0" anchor="ctr"/>
+          <a:lstStyle/>
+          <a:p>
+            <a:pPr marL="0" indent="0">
+              <a:buNone/>
+            </a:pPr>
+            <a:r>
+              <a:rPr lang="en-US" sz="850" b="1" kern="0" spc="200" dirty="0">
+                <a:solidFill>
+                  <a:srgbClr val="6B3B8C"/>
+                </a:solidFill>
+                <a:latin typeface="Calibri" pitchFamily="34" charset="0"/>
+                <a:ea typeface="Calibri" pitchFamily="34" charset="-122"/>
+                <a:cs typeface="Calibri" pitchFamily="34" charset="-120"/>
+              </a:rPr>
+              <a:t>NON-IMAGE-FORMING PATHWAY</a:t>
+            </a:r>
+            <a:endParaRPr lang="en-US" sz="850" dirty="0"/>
+          </a:p>
+        </p:txBody>
+      </p:sp>
+      <p:sp>
+        <p:nvSpPr>
+          <p:cNvPr id="11" name="Text 9"/>
+          <p:cNvSpPr/>
+          <p:nvPr/>
+        </p:nvSpPr>
+        <p:spPr>
+          <a:xfrm>
+            <a:off x="5029200" y="1600200"/>
+            <a:ext cx="3566160" cy="1554480"/>
+          </a:xfrm>
+          <a:prstGeom prst="rect">
+            <a:avLst/>
+          </a:prstGeom>
+          <a:noFill/>
+          <a:ln/>
+        </p:spPr>
+        <p:txBody>
+          <a:bodyPr wrap="square" lIns="0" tIns="0" rIns="0" bIns="0" rtlCol="0" anchor="ctr"/>
+          <a:lstStyle/>
+          <a:p>
+            <a:pPr marL="0" indent="0">
+              <a:lnSpc>
+                <a:spcPct val="110000"/>
+              </a:lnSpc>
+              <a:buNone/>
+            </a:pPr>
+            <a:r>
+              <a:rPr lang="en-US" sz="1050" dirty="0">
+                <a:solidFill>
+                  <a:srgbClr val="1E293B"/>
+                </a:solidFill>
+                <a:latin typeface="Calibri" pitchFamily="34" charset="0"/>
+                <a:ea typeface="Calibri" pitchFamily="34" charset="-122"/>
+                <a:cs typeface="Calibri" pitchFamily="34" charset="-120"/>
+              </a:rPr>
+              <a:t>ipRGCs (melanopsin) → SCN → circadian regulation
+</a:t>
+            </a:r>
+            <a:endParaRPr lang="en-US" sz="1050" dirty="0"/>
+          </a:p>
+          <a:p>
+            <a:pPr marL="0" indent="0">
+              <a:lnSpc>
+                <a:spcPct val="110000"/>
+              </a:lnSpc>
+              <a:buNone/>
+            </a:pPr>
+            <a:r>
+              <a:rPr lang="en-US" sz="1050" b="1" dirty="0">
+                <a:solidFill>
+                  <a:srgbClr val="1E293B"/>
+                </a:solidFill>
+                <a:latin typeface="Calibri" pitchFamily="34" charset="0"/>
+                <a:ea typeface="Calibri" pitchFamily="34" charset="-122"/>
+                <a:cs typeface="Calibri" pitchFamily="34" charset="-120"/>
+              </a:rPr>
+              <a:t>Provides: </a:t>
+            </a:r>
+            <a:r>
+              <a:rPr lang="en-US" sz="1050" dirty="0">
+                <a:solidFill>
+                  <a:srgbClr val="1E293B"/>
+                </a:solidFill>
+                <a:latin typeface="Calibri" pitchFamily="34" charset="0"/>
+                <a:ea typeface="Calibri" pitchFamily="34" charset="-122"/>
+                <a:cs typeface="Calibri" pitchFamily="34" charset="-120"/>
+              </a:rPr>
+              <a:t>circadian entrainment, alertness, melatonin timing
+</a:t>
+            </a:r>
+            <a:endParaRPr lang="en-US" sz="1050" dirty="0"/>
+          </a:p>
+          <a:p>
+            <a:pPr marL="0" indent="0">
+              <a:lnSpc>
+                <a:spcPct val="110000"/>
+              </a:lnSpc>
+              <a:buNone/>
+            </a:pPr>
+            <a:r>
+              <a:rPr lang="en-US" sz="1050" b="1" dirty="0">
+                <a:solidFill>
+                  <a:srgbClr val="1E293B"/>
+                </a:solidFill>
+                <a:latin typeface="Calibri" pitchFamily="34" charset="0"/>
+                <a:ea typeface="Calibri" pitchFamily="34" charset="-122"/>
+                <a:cs typeface="Calibri" pitchFamily="34" charset="-120"/>
+              </a:rPr>
+              <a:t>Design: </a:t>
+            </a:r>
+            <a:r>
+              <a:rPr lang="en-US" sz="1050" dirty="0">
+                <a:solidFill>
+                  <a:srgbClr val="1E293B"/>
+                </a:solidFill>
+                <a:latin typeface="Calibri" pitchFamily="34" charset="0"/>
+                <a:ea typeface="Calibri" pitchFamily="34" charset="-122"/>
+                <a:cs typeface="Calibri" pitchFamily="34" charset="-120"/>
+              </a:rPr>
+              <a:t>LIGHT SPECTRUM, TIMING, INTENSITY
+</a:t>
+            </a:r>
+            <a:endParaRPr lang="en-US" sz="1050" dirty="0"/>
+          </a:p>
+          <a:p>
+            <a:pPr marL="0" indent="0">
+              <a:lnSpc>
+                <a:spcPct val="110000"/>
+              </a:lnSpc>
+              <a:buNone/>
+            </a:pPr>
+            <a:r>
+              <a:rPr lang="en-US" sz="1050" i="1" dirty="0">
+                <a:solidFill>
+                  <a:srgbClr val="1E293B"/>
+                </a:solidFill>
+                <a:latin typeface="Calibri" pitchFamily="34" charset="0"/>
+                <a:ea typeface="Calibri" pitchFamily="34" charset="-122"/>
+                <a:cs typeface="Calibri" pitchFamily="34" charset="-120"/>
+              </a:rPr>
+              <a:t>Heschong's learning effect includes this — blue light at 10am</a:t>
+            </a:r>
+            <a:endParaRPr lang="en-US" sz="1050" dirty="0"/>
+          </a:p>
+        </p:txBody>
+      </p:sp>
+      <p:sp>
+        <p:nvSpPr>
+          <p:cNvPr id="12" name="Shape 10"/>
+          <p:cNvSpPr/>
+          <p:nvPr/>
+        </p:nvSpPr>
+        <p:spPr>
+          <a:xfrm>
+            <a:off x="548640" y="3520440"/>
+            <a:ext cx="8046720" cy="1234440"/>
+          </a:xfrm>
+          <a:prstGeom prst="rect">
+            <a:avLst/>
+          </a:prstGeom>
+          <a:solidFill>
+            <a:srgbClr val="F8FAFC"/>
+          </a:solidFill>
+          <a:ln w="6350">
+            <a:solidFill>
+              <a:srgbClr val="E2E8F0"/>
+            </a:solidFill>
+            <a:prstDash val="solid"/>
+          </a:ln>
+          <a:effectLst>
+            <a:outerShdw blurRad="50800" dist="12700" dir="8100000" algn="bl" rotWithShape="0">
+              <a:srgbClr val="000000">
+                <a:alpha val="6000"/>
+              </a:srgbClr>
+            </a:outerShdw>
+          </a:effectLst>
+        </p:spPr>
+        <p:txBody>
+          <a:bodyPr/>
+          <a:lstStyle/>
+          <a:p>
+            <a:endParaRPr lang="en-US"/>
+          </a:p>
+        </p:txBody>
+      </p:sp>
+      <p:sp>
+        <p:nvSpPr>
+          <p:cNvPr id="13" name="Shape 11"/>
+          <p:cNvSpPr/>
+          <p:nvPr/>
+        </p:nvSpPr>
+        <p:spPr>
+          <a:xfrm>
+            <a:off x="548640" y="3520440"/>
+            <a:ext cx="54864" cy="1234440"/>
+          </a:xfrm>
+          <a:prstGeom prst="rect">
+            <a:avLst/>
+          </a:prstGeom>
+          <a:solidFill>
+            <a:srgbClr val="B85042"/>
+          </a:solidFill>
+          <a:ln/>
+        </p:spPr>
+        <p:txBody>
+          <a:bodyPr/>
+          <a:lstStyle/>
+          <a:p>
+            <a:endParaRPr lang="en-US"/>
+          </a:p>
+        </p:txBody>
+      </p:sp>
+      <p:sp>
+        <p:nvSpPr>
+          <p:cNvPr id="14" name="Text 12"/>
+          <p:cNvSpPr/>
+          <p:nvPr/>
+        </p:nvSpPr>
+        <p:spPr>
+          <a:xfrm>
+            <a:off x="777240" y="3584448"/>
+            <a:ext cx="7589520" cy="1051560"/>
+          </a:xfrm>
+          <a:prstGeom prst="rect">
+            <a:avLst/>
+          </a:prstGeom>
+          <a:noFill/>
+          <a:ln/>
+        </p:spPr>
+        <p:txBody>
+          <a:bodyPr wrap="square" lIns="0" tIns="0" rIns="0" bIns="0" rtlCol="0" anchor="ctr"/>
+          <a:lstStyle/>
+          <a:p>
+            <a:pPr marL="0" indent="0">
+              <a:lnSpc>
+                <a:spcPct val="125000"/>
+              </a:lnSpc>
+              <a:buNone/>
+            </a:pPr>
+            <a:r>
+              <a:rPr lang="en-US" sz="1100" b="1" dirty="0">
+                <a:solidFill>
+                  <a:srgbClr val="B85042"/>
+                </a:solidFill>
+                <a:latin typeface="Calibri" pitchFamily="34" charset="0"/>
+                <a:ea typeface="Calibri" pitchFamily="34" charset="-122"/>
+                <a:cs typeface="Calibri" pitchFamily="34" charset="-120"/>
+              </a:rPr>
+              <a:t>The insight: </a:t>
+            </a:r>
+            <a:r>
+              <a:rPr lang="en-US" sz="1100" dirty="0">
+                <a:solidFill>
+                  <a:srgbClr val="1E293B"/>
+                </a:solidFill>
+                <a:latin typeface="Calibri" pitchFamily="34" charset="0"/>
+                <a:ea typeface="Calibri" pitchFamily="34" charset="-122"/>
+                <a:cs typeface="Calibri" pitchFamily="34" charset="-120"/>
+              </a:rPr>
+              <a:t>Heschong's "daylight improves learning" conflates two independent mechanisms.
+</a:t>
+            </a:r>
+            <a:endParaRPr lang="en-US" sz="1100" dirty="0"/>
+          </a:p>
+          <a:p>
+            <a:pPr marL="0" indent="0">
+              <a:lnSpc>
+                <a:spcPct val="125000"/>
+              </a:lnSpc>
+              <a:buNone/>
+            </a:pPr>
+            <a:r>
+              <a:rPr lang="en-US" sz="1100" dirty="0">
+                <a:solidFill>
+                  <a:srgbClr val="1E293B"/>
+                </a:solidFill>
+                <a:latin typeface="Calibri" pitchFamily="34" charset="0"/>
+                <a:ea typeface="Calibri" pitchFamily="34" charset="-122"/>
+                <a:cs typeface="Calibri" pitchFamily="34" charset="-120"/>
+              </a:rPr>
+              <a:t>A windowless room with tunable LEDs can provide pathway 2 (circadian) without pathway 1 (view).
+</a:t>
+            </a:r>
+            <a:endParaRPr lang="en-US" sz="1100" dirty="0"/>
+          </a:p>
+          <a:p>
+            <a:pPr marL="0" indent="0">
+              <a:lnSpc>
+                <a:spcPct val="125000"/>
+              </a:lnSpc>
+              <a:buNone/>
+            </a:pPr>
+            <a:r>
+              <a:rPr lang="en-US" sz="1100" dirty="0">
+                <a:solidFill>
+                  <a:srgbClr val="1E293B"/>
+                </a:solidFill>
+                <a:latin typeface="Calibri" pitchFamily="34" charset="0"/>
+                <a:ea typeface="Calibri" pitchFamily="34" charset="-122"/>
+                <a:cs typeface="Calibri" pitchFamily="34" charset="-120"/>
+              </a:rPr>
+              <a:t>A small window provides a view but insufficient circadian signal.
+</a:t>
+            </a:r>
+            <a:endParaRPr lang="en-US" sz="1100" dirty="0"/>
+          </a:p>
+          <a:p>
+            <a:pPr marL="0" indent="0">
+              <a:lnSpc>
+                <a:spcPct val="125000"/>
+              </a:lnSpc>
+              <a:buNone/>
+            </a:pPr>
+            <a:r>
+              <a:rPr lang="en-US" sz="1100" b="1" dirty="0">
+                <a:solidFill>
+                  <a:srgbClr val="1E293B"/>
+                </a:solidFill>
+                <a:latin typeface="Calibri" pitchFamily="34" charset="0"/>
+                <a:ea typeface="Calibri" pitchFamily="34" charset="-122"/>
+                <a:cs typeface="Calibri" pitchFamily="34" charset="-120"/>
+              </a:rPr>
+              <a:t>The template decomposition generates different architectural specifications for each.</a:t>
+            </a:r>
+            <a:endParaRPr lang="en-US" sz="1100" dirty="0"/>
+          </a:p>
+        </p:txBody>
+      </p:sp>
+    </p:spTree>
+  </p:cSld>
+  <p:clrMapOvr>
+    <a:masterClrMapping/>
+  </p:clrMapOvr>
+</p:sld>
+</file>
+
+<file path=ppt/slides/slide11.xml><?xml version="1.0" encoding="utf-8"?>
+<p:sld xmlns:a="http://schemas.openxmlformats.org/drawingml/2006/main" xmlns:r="http://schemas.openxmlformats.org/officeDocument/2006/relationships" xmlns:p="http://schemas.openxmlformats.org/presentationml/2006/main">
   <p:cSld name="Slide 10">
     <p:bg>
       <p:bgPr>
@@ -3899,7 +4674,7 @@
 </p:sld>
 </file>
 
-<file path=ppt/slides/slide11.xml><?xml version="1.0" encoding="utf-8"?>
+<file path=ppt/slides/slide12.xml><?xml version="1.0" encoding="utf-8"?>
 <p:sld xmlns:a="http://schemas.openxmlformats.org/drawingml/2006/main" xmlns:r="http://schemas.openxmlformats.org/officeDocument/2006/relationships" xmlns:p="http://schemas.openxmlformats.org/presentationml/2006/main">
   <p:cSld name="Slide 11">
     <p:bg>
@@ -4902,7 +5677,7 @@
 </p:sld>
 </file>
 
-<file path=ppt/slides/slide12.xml><?xml version="1.0" encoding="utf-8"?>
+<file path=ppt/slides/slide13.xml><?xml version="1.0" encoding="utf-8"?>
 <p:sld xmlns:a="http://schemas.openxmlformats.org/drawingml/2006/main" xmlns:r="http://schemas.openxmlformats.org/officeDocument/2006/relationships" xmlns:p="http://schemas.openxmlformats.org/presentationml/2006/main">
   <p:cSld name="Slide 12">
     <p:bg>
@@ -6255,7 +7030,7 @@
 </p:sld>
 </file>
 
-<file path=ppt/slides/slide13.xml><?xml version="1.0" encoding="utf-8"?>
+<file path=ppt/slides/slide14.xml><?xml version="1.0" encoding="utf-8"?>
 <p:sld xmlns:a="http://schemas.openxmlformats.org/drawingml/2006/main" xmlns:r="http://schemas.openxmlformats.org/officeDocument/2006/relationships" xmlns:p="http://schemas.openxmlformats.org/presentationml/2006/main">
   <p:cSld name="Slide 13">
     <p:bg>
@@ -7087,7 +7862,7 @@
 </p:sld>
 </file>
 
-<file path=ppt/slides/slide14.xml><?xml version="1.0" encoding="utf-8"?>
+<file path=ppt/slides/slide15.xml><?xml version="1.0" encoding="utf-8"?>
 <p:sld xmlns:a="http://schemas.openxmlformats.org/drawingml/2006/main" xmlns:r="http://schemas.openxmlformats.org/officeDocument/2006/relationships" xmlns:p="http://schemas.openxmlformats.org/presentationml/2006/main">
   <p:cSld name="Slide 14">
     <p:bg>
@@ -8093,7 +8868,7 @@
 </p:sld>
 </file>
 
-<file path=ppt/slides/slide15.xml><?xml version="1.0" encoding="utf-8"?>
+<file path=ppt/slides/slide16.xml><?xml version="1.0" encoding="utf-8"?>
 <p:sld xmlns:a="http://schemas.openxmlformats.org/drawingml/2006/main" xmlns:r="http://schemas.openxmlformats.org/officeDocument/2006/relationships" xmlns:p="http://schemas.openxmlformats.org/presentationml/2006/main">
   <p:cSld name="Slide 15">
     <p:bg>
@@ -9897,7 +10672,7 @@
 </p:sld>
 </file>
 
-<file path=ppt/slides/slide16.xml><?xml version="1.0" encoding="utf-8"?>
+<file path=ppt/slides/slide17.xml><?xml version="1.0" encoding="utf-8"?>
 <p:sld xmlns:a="http://schemas.openxmlformats.org/drawingml/2006/main" xmlns:r="http://schemas.openxmlformats.org/officeDocument/2006/relationships" xmlns:p="http://schemas.openxmlformats.org/presentationml/2006/main">
   <p:cSld name="Slide 16">
     <p:bg>
@@ -10520,7 +11295,7 @@
 </p:sld>
 </file>
 
-<file path=ppt/slides/slide17.xml><?xml version="1.0" encoding="utf-8"?>
+<file path=ppt/slides/slide18.xml><?xml version="1.0" encoding="utf-8"?>
 <p:sld xmlns:a="http://schemas.openxmlformats.org/drawingml/2006/main" xmlns:r="http://schemas.openxmlformats.org/officeDocument/2006/relationships" xmlns:p="http://schemas.openxmlformats.org/presentationml/2006/main">
   <p:cSld name="Slide 17">
     <p:bg>
@@ -11407,7 +12182,7 @@
 </p:sld>
 </file>
 
-<file path=ppt/slides/slide18.xml><?xml version="1.0" encoding="utf-8"?>
+<file path=ppt/slides/slide19.xml><?xml version="1.0" encoding="utf-8"?>
 <p:sld xmlns:a="http://schemas.openxmlformats.org/drawingml/2006/main" xmlns:r="http://schemas.openxmlformats.org/officeDocument/2006/relationships" xmlns:p="http://schemas.openxmlformats.org/presentationml/2006/main">
   <p:cSld name="Slide 18">
     <p:bg>
@@ -12145,7 +12920,67 @@
 </p:sld>
 </file>
 
-<file path=ppt/slides/slide19.xml><?xml version="1.0" encoding="utf-8"?>
+<file path=ppt/slides/slide2.xml><?xml version="1.0" encoding="utf-8"?>
+<p:sld xmlns:a="http://schemas.openxmlformats.org/drawingml/2006/main" xmlns:r="http://schemas.openxmlformats.org/officeDocument/2006/relationships" xmlns:p="http://schemas.openxmlformats.org/presentationml/2006/main">
+  <p:cSld>
+    <p:spTree>
+      <p:nvGrpSpPr>
+        <p:cNvPr id="1" name=""/>
+        <p:cNvGrpSpPr/>
+        <p:nvPr/>
+      </p:nvGrpSpPr>
+      <p:grpSpPr>
+        <a:xfrm>
+          <a:off x="0" y="0"/>
+          <a:ext cx="0" cy="0"/>
+          <a:chOff x="0" y="0"/>
+          <a:chExt cx="0" cy="0"/>
+        </a:xfrm>
+      </p:grpSpPr>
+      <p:pic>
+        <p:nvPicPr>
+          <p:cNvPr id="3" name="Picture 2" descr="A diagram of a website&#10;&#10;AI-generated content may be incorrect.">
+            <a:extLst>
+              <a:ext uri="{FF2B5EF4-FFF2-40B4-BE49-F238E27FC236}">
+                <a16:creationId xmlns:a16="http://schemas.microsoft.com/office/drawing/2014/main" id="{30C5D8C7-A08E-7CC5-AD6C-5CDBAEDE7C5E}"/>
+              </a:ext>
+            </a:extLst>
+          </p:cNvPr>
+          <p:cNvPicPr>
+            <a:picLocks noChangeAspect="1"/>
+          </p:cNvPicPr>
+          <p:nvPr/>
+        </p:nvPicPr>
+        <p:blipFill>
+          <a:blip r:embed="rId2"/>
+          <a:stretch>
+            <a:fillRect/>
+          </a:stretch>
+        </p:blipFill>
+        <p:spPr>
+          <a:xfrm>
+            <a:off x="611960" y="0"/>
+            <a:ext cx="7772400" cy="5047592"/>
+          </a:xfrm>
+          <a:prstGeom prst="rect">
+            <a:avLst/>
+          </a:prstGeom>
+        </p:spPr>
+      </p:pic>
+    </p:spTree>
+    <p:extLst>
+      <p:ext uri="{BB962C8B-B14F-4D97-AF65-F5344CB8AC3E}">
+        <p14:creationId xmlns:p14="http://schemas.microsoft.com/office/powerpoint/2010/main" val="4096655189"/>
+      </p:ext>
+    </p:extLst>
+  </p:cSld>
+  <p:clrMapOvr>
+    <a:masterClrMapping/>
+  </p:clrMapOvr>
+</p:sld>
+</file>
+
+<file path=ppt/slides/slide20.xml><?xml version="1.0" encoding="utf-8"?>
 <p:sld xmlns:a="http://schemas.openxmlformats.org/drawingml/2006/main" xmlns:r="http://schemas.openxmlformats.org/officeDocument/2006/relationships" xmlns:p="http://schemas.openxmlformats.org/presentationml/2006/main">
   <p:cSld name="Slide 19">
     <p:bg>
@@ -12281,7 +13116,7 @@
         </p:nvGraphicFramePr>
         <p:xfrm>
           <a:off x="1371600" y="1280160"/>
-          <a:ext cx="6400800" cy="914400"/>
+          <a:ext cx="6400800" cy="3319272"/>
         </p:xfrm>
         <a:graphic>
           <a:graphicData uri="http://schemas.openxmlformats.org/drawingml/2006/table">
@@ -14682,7 +15517,2823 @@
 </p:sld>
 </file>
 
-<file path=ppt/slides/slide2.xml><?xml version="1.0" encoding="utf-8"?>
+<file path=ppt/slides/slide21.xml><?xml version="1.0" encoding="utf-8"?>
+<p:sld xmlns:a="http://schemas.openxmlformats.org/drawingml/2006/main" xmlns:r="http://schemas.openxmlformats.org/officeDocument/2006/relationships" xmlns:p="http://schemas.openxmlformats.org/presentationml/2006/main">
+  <p:cSld name="Slide 20">
+    <p:bg>
+      <p:bgPr>
+        <a:solidFill>
+          <a:srgbClr val="FFFFFF"/>
+        </a:solidFill>
+        <a:effectLst/>
+      </p:bgPr>
+    </p:bg>
+    <p:spTree>
+      <p:nvGrpSpPr>
+        <p:cNvPr id="1" name=""/>
+        <p:cNvGrpSpPr/>
+        <p:nvPr/>
+      </p:nvGrpSpPr>
+      <p:grpSpPr>
+        <a:xfrm>
+          <a:off x="0" y="0"/>
+          <a:ext cx="0" cy="0"/>
+          <a:chOff x="0" y="0"/>
+          <a:chExt cx="0" cy="0"/>
+        </a:xfrm>
+      </p:grpSpPr>
+      <p:sp>
+        <p:nvSpPr>
+          <p:cNvPr id="2" name="Text 0"/>
+          <p:cNvSpPr/>
+          <p:nvPr/>
+        </p:nvSpPr>
+        <p:spPr>
+          <a:xfrm>
+            <a:off x="548640" y="228600"/>
+            <a:ext cx="3657600" cy="182880"/>
+          </a:xfrm>
+          <a:prstGeom prst="rect">
+            <a:avLst/>
+          </a:prstGeom>
+          <a:noFill/>
+          <a:ln/>
+        </p:spPr>
+        <p:txBody>
+          <a:bodyPr wrap="square" lIns="0" tIns="0" rIns="0" bIns="0" rtlCol="0" anchor="ctr"/>
+          <a:lstStyle/>
+          <a:p>
+            <a:pPr marL="0" indent="0">
+              <a:buNone/>
+            </a:pPr>
+            <a:r>
+              <a:rPr lang="en-US" sz="900" b="1" kern="0" spc="300" dirty="0">
+                <a:solidFill>
+                  <a:srgbClr val="2B5A8C"/>
+                </a:solidFill>
+                <a:latin typeface="Calibri" pitchFamily="34" charset="0"/>
+                <a:ea typeface="Calibri" pitchFamily="34" charset="-122"/>
+                <a:cs typeface="Calibri" pitchFamily="34" charset="-120"/>
+              </a:rPr>
+              <a:t>CONTRIBUTION TO PHILOSOPHY OF SCIENCE</a:t>
+            </a:r>
+            <a:endParaRPr lang="en-US" sz="900" dirty="0"/>
+          </a:p>
+        </p:txBody>
+      </p:sp>
+      <p:sp>
+        <p:nvSpPr>
+          <p:cNvPr id="3" name="Text 1"/>
+          <p:cNvSpPr/>
+          <p:nvPr/>
+        </p:nvSpPr>
+        <p:spPr>
+          <a:xfrm>
+            <a:off x="548640" y="438912"/>
+            <a:ext cx="8046720" cy="640080"/>
+          </a:xfrm>
+          <a:prstGeom prst="rect">
+            <a:avLst/>
+          </a:prstGeom>
+          <a:noFill/>
+          <a:ln/>
+        </p:spPr>
+        <p:txBody>
+          <a:bodyPr wrap="square" lIns="0" tIns="0" rIns="0" bIns="0" rtlCol="0" anchor="ctr"/>
+          <a:lstStyle/>
+          <a:p>
+            <a:pPr marL="0" indent="0">
+              <a:buNone/>
+            </a:pPr>
+            <a:r>
+              <a:rPr lang="en-US" sz="2600" b="1" dirty="0">
+                <a:solidFill>
+                  <a:srgbClr val="1E293B"/>
+                </a:solidFill>
+                <a:latin typeface="Georgia" pitchFamily="34" charset="0"/>
+                <a:ea typeface="Georgia" pitchFamily="34" charset="-122"/>
+                <a:cs typeface="Georgia" pitchFamily="34" charset="-120"/>
+              </a:rPr>
+              <a:t>Theory-to-Template Reduction:</a:t>
+            </a:r>
+            <a:endParaRPr lang="en-US" sz="2600" dirty="0"/>
+          </a:p>
+          <a:p>
+            <a:pPr marL="0" indent="0">
+              <a:buNone/>
+            </a:pPr>
+            <a:r>
+              <a:rPr lang="en-US" sz="2600" b="1" dirty="0">
+                <a:solidFill>
+                  <a:srgbClr val="1E293B"/>
+                </a:solidFill>
+                <a:latin typeface="Georgia" pitchFamily="34" charset="0"/>
+                <a:ea typeface="Georgia" pitchFamily="34" charset="-122"/>
+                <a:cs typeface="Georgia" pitchFamily="34" charset="-120"/>
+              </a:rPr>
+              <a:t>A Novel Philosophical Move</a:t>
+            </a:r>
+            <a:endParaRPr lang="en-US" sz="2600" dirty="0"/>
+          </a:p>
+        </p:txBody>
+      </p:sp>
+      <p:sp>
+        <p:nvSpPr>
+          <p:cNvPr id="4" name="Text 2"/>
+          <p:cNvSpPr/>
+          <p:nvPr/>
+        </p:nvSpPr>
+        <p:spPr>
+          <a:xfrm>
+            <a:off x="548640" y="1188720"/>
+            <a:ext cx="8046720" cy="274320"/>
+          </a:xfrm>
+          <a:prstGeom prst="rect">
+            <a:avLst/>
+          </a:prstGeom>
+          <a:noFill/>
+          <a:ln/>
+        </p:spPr>
+        <p:txBody>
+          <a:bodyPr wrap="square" lIns="0" tIns="0" rIns="0" bIns="0" rtlCol="0" anchor="ctr"/>
+          <a:lstStyle/>
+          <a:p>
+            <a:pPr marL="0" indent="0">
+              <a:buNone/>
+            </a:pPr>
+            <a:r>
+              <a:rPr lang="en-US" sz="1200" i="1" dirty="0">
+                <a:solidFill>
+                  <a:srgbClr val="475569"/>
+                </a:solidFill>
+                <a:latin typeface="Calibri" pitchFamily="34" charset="0"/>
+                <a:ea typeface="Calibri" pitchFamily="34" charset="-122"/>
+                <a:cs typeface="Calibri" pitchFamily="34" charset="-120"/>
+              </a:rPr>
+              <a:t>What we're doing is a kind of theory reduction that doesn't have a standard name:</a:t>
+            </a:r>
+            <a:endParaRPr lang="en-US" sz="1200" dirty="0"/>
+          </a:p>
+        </p:txBody>
+      </p:sp>
+      <p:sp>
+        <p:nvSpPr>
+          <p:cNvPr id="5" name="Shape 3"/>
+          <p:cNvSpPr/>
+          <p:nvPr/>
+        </p:nvSpPr>
+        <p:spPr>
+          <a:xfrm>
+            <a:off x="548640" y="1600200"/>
+            <a:ext cx="8046720" cy="594360"/>
+          </a:xfrm>
+          <a:prstGeom prst="rect">
+            <a:avLst/>
+          </a:prstGeom>
+          <a:solidFill>
+            <a:srgbClr val="F8FAFC"/>
+          </a:solidFill>
+          <a:ln w="6350">
+            <a:solidFill>
+              <a:srgbClr val="E2E8F0"/>
+            </a:solidFill>
+            <a:prstDash val="solid"/>
+          </a:ln>
+          <a:effectLst>
+            <a:outerShdw blurRad="50800" dist="12700" dir="8100000" algn="bl" rotWithShape="0">
+              <a:srgbClr val="000000">
+                <a:alpha val="6000"/>
+              </a:srgbClr>
+            </a:outerShdw>
+          </a:effectLst>
+        </p:spPr>
+        <p:txBody>
+          <a:bodyPr/>
+          <a:lstStyle/>
+          <a:p>
+            <a:endParaRPr lang="en-US"/>
+          </a:p>
+        </p:txBody>
+      </p:sp>
+      <p:sp>
+        <p:nvSpPr>
+          <p:cNvPr id="6" name="Shape 4"/>
+          <p:cNvSpPr/>
+          <p:nvPr/>
+        </p:nvSpPr>
+        <p:spPr>
+          <a:xfrm>
+            <a:off x="548640" y="1600200"/>
+            <a:ext cx="54864" cy="594360"/>
+          </a:xfrm>
+          <a:prstGeom prst="rect">
+            <a:avLst/>
+          </a:prstGeom>
+          <a:solidFill>
+            <a:srgbClr val="6B3B8C"/>
+          </a:solidFill>
+          <a:ln/>
+        </p:spPr>
+        <p:txBody>
+          <a:bodyPr/>
+          <a:lstStyle/>
+          <a:p>
+            <a:endParaRPr lang="en-US"/>
+          </a:p>
+        </p:txBody>
+      </p:sp>
+      <p:sp>
+        <p:nvSpPr>
+          <p:cNvPr id="7" name="Text 5"/>
+          <p:cNvSpPr/>
+          <p:nvPr/>
+        </p:nvSpPr>
+        <p:spPr>
+          <a:xfrm>
+            <a:off x="777240" y="1664208"/>
+            <a:ext cx="7589520" cy="457200"/>
+          </a:xfrm>
+          <a:prstGeom prst="rect">
+            <a:avLst/>
+          </a:prstGeom>
+          <a:noFill/>
+          <a:ln/>
+        </p:spPr>
+        <p:txBody>
+          <a:bodyPr wrap="square" lIns="0" tIns="0" rIns="0" bIns="0" rtlCol="0" anchor="ctr"/>
+          <a:lstStyle/>
+          <a:p>
+            <a:pPr marL="0" indent="0">
+              <a:buNone/>
+            </a:pPr>
+            <a:r>
+              <a:rPr lang="en-US" sz="1800" b="1" dirty="0">
+                <a:solidFill>
+                  <a:srgbClr val="6B3B8C"/>
+                </a:solidFill>
+                <a:latin typeface="Georgia" pitchFamily="34" charset="0"/>
+                <a:ea typeface="Georgia" pitchFamily="34" charset="-122"/>
+                <a:cs typeface="Georgia" pitchFamily="34" charset="-120"/>
+              </a:rPr>
+              <a:t>Broad theory  →  domain-specific mechanistic templates  →  testable predictions</a:t>
+            </a:r>
+            <a:endParaRPr lang="en-US" sz="1800" dirty="0"/>
+          </a:p>
+        </p:txBody>
+      </p:sp>
+      <p:sp>
+        <p:nvSpPr>
+          <p:cNvPr id="8" name="Text 6"/>
+          <p:cNvSpPr/>
+          <p:nvPr/>
+        </p:nvSpPr>
+        <p:spPr>
+          <a:xfrm>
+            <a:off x="548640" y="2423160"/>
+            <a:ext cx="8046720" cy="2286000"/>
+          </a:xfrm>
+          <a:prstGeom prst="rect">
+            <a:avLst/>
+          </a:prstGeom>
+          <a:noFill/>
+          <a:ln/>
+        </p:spPr>
+        <p:txBody>
+          <a:bodyPr wrap="square" lIns="0" tIns="0" rIns="0" bIns="0" rtlCol="0" anchor="ctr"/>
+          <a:lstStyle/>
+          <a:p>
+            <a:pPr marL="0" indent="0">
+              <a:lnSpc>
+                <a:spcPct val="130000"/>
+              </a:lnSpc>
+              <a:buNone/>
+            </a:pPr>
+            <a:r>
+              <a:rPr lang="en-US" sz="1300" b="1" dirty="0">
+                <a:solidFill>
+                  <a:srgbClr val="1E293B"/>
+                </a:solidFill>
+                <a:latin typeface="Calibri" pitchFamily="34" charset="0"/>
+                <a:ea typeface="Calibri" pitchFamily="34" charset="-122"/>
+                <a:cs typeface="Calibri" pitchFamily="34" charset="-120"/>
+              </a:rPr>
+              <a:t>Predictive Processing is a theory of everything. </a:t>
+            </a:r>
+            <a:r>
+              <a:rPr lang="en-US" sz="1300" dirty="0">
+                <a:solidFill>
+                  <a:srgbClr val="1E293B"/>
+                </a:solidFill>
+                <a:latin typeface="Calibri" pitchFamily="34" charset="0"/>
+                <a:ea typeface="Calibri" pitchFamily="34" charset="-122"/>
+                <a:cs typeface="Calibri" pitchFamily="34" charset="-120"/>
+              </a:rPr>
+              <a:t>That's its strength and weakness. It explains perception, action, emotion, learning — but it doesn't directly predict that ceiling height should be 2.7m for focus work and 4m+ for creative work.
+</a:t>
+            </a:r>
+            <a:endParaRPr lang="en-US" sz="1300" dirty="0"/>
+          </a:p>
+          <a:p>
+            <a:pPr marL="0" indent="0">
+              <a:lnSpc>
+                <a:spcPct val="130000"/>
+              </a:lnSpc>
+              <a:buNone/>
+            </a:pPr>
+            <a:r>
+              <a:rPr lang="en-US" sz="1300" b="1" dirty="0">
+                <a:solidFill>
+                  <a:srgbClr val="1E293B"/>
+                </a:solidFill>
+                <a:latin typeface="Calibri" pitchFamily="34" charset="0"/>
+                <a:ea typeface="Calibri" pitchFamily="34" charset="-122"/>
+                <a:cs typeface="Calibri" pitchFamily="34" charset="-120"/>
+              </a:rPr>
+              <a:t>The template reduction takes the general theory and derives specific, falsifiable, actionable claims.
+</a:t>
+            </a:r>
+            <a:endParaRPr lang="en-US" sz="1300" dirty="0"/>
+          </a:p>
+          <a:p>
+            <a:pPr marL="0" indent="0">
+              <a:lnSpc>
+                <a:spcPct val="130000"/>
+              </a:lnSpc>
+              <a:buNone/>
+            </a:pPr>
+            <a:r>
+              <a:rPr lang="en-US" sz="1300" dirty="0">
+                <a:solidFill>
+                  <a:srgbClr val="1E293B"/>
+                </a:solidFill>
+                <a:latin typeface="Calibri" pitchFamily="34" charset="0"/>
+                <a:ea typeface="Calibri" pitchFamily="34" charset="-122"/>
+                <a:cs typeface="Calibri" pitchFamily="34" charset="-120"/>
+              </a:rPr>
+              <a:t>This is where theory meets design — and it's where most cognitive science stops and we keep going.
+</a:t>
+            </a:r>
+            <a:endParaRPr lang="en-US" sz="1300" dirty="0"/>
+          </a:p>
+          <a:p>
+            <a:pPr marL="0" indent="0">
+              <a:lnSpc>
+                <a:spcPct val="130000"/>
+              </a:lnSpc>
+              <a:buNone/>
+            </a:pPr>
+            <a:r>
+              <a:rPr lang="en-US" sz="1300" i="1" dirty="0">
+                <a:solidFill>
+                  <a:srgbClr val="1E293B"/>
+                </a:solidFill>
+                <a:latin typeface="Calibri" pitchFamily="34" charset="0"/>
+                <a:ea typeface="Calibri" pitchFamily="34" charset="-122"/>
+                <a:cs typeface="Calibri" pitchFamily="34" charset="-120"/>
+              </a:rPr>
+              <a:t>Compare: In physics, the reduction from quantum field theory to materials science to engineering specifications. We're building the materials science of the mind-environment interface.</a:t>
+            </a:r>
+            <a:endParaRPr lang="en-US" sz="1300" dirty="0"/>
+          </a:p>
+        </p:txBody>
+      </p:sp>
+    </p:spTree>
+  </p:cSld>
+  <p:clrMapOvr>
+    <a:masterClrMapping/>
+  </p:clrMapOvr>
+</p:sld>
+</file>
+
+<file path=ppt/slides/slide22.xml><?xml version="1.0" encoding="utf-8"?>
+<p:sld xmlns:a="http://schemas.openxmlformats.org/drawingml/2006/main" xmlns:r="http://schemas.openxmlformats.org/officeDocument/2006/relationships" xmlns:p="http://schemas.openxmlformats.org/presentationml/2006/main">
+  <p:cSld name="Slide 21">
+    <p:bg>
+      <p:bgPr>
+        <a:solidFill>
+          <a:srgbClr val="FFFFFF"/>
+        </a:solidFill>
+        <a:effectLst/>
+      </p:bgPr>
+    </p:bg>
+    <p:spTree>
+      <p:nvGrpSpPr>
+        <p:cNvPr id="1" name=""/>
+        <p:cNvGrpSpPr/>
+        <p:nvPr/>
+      </p:nvGrpSpPr>
+      <p:grpSpPr>
+        <a:xfrm>
+          <a:off x="0" y="0"/>
+          <a:ext cx="0" cy="0"/>
+          <a:chOff x="0" y="0"/>
+          <a:chExt cx="0" cy="0"/>
+        </a:xfrm>
+      </p:grpSpPr>
+      <p:sp>
+        <p:nvSpPr>
+          <p:cNvPr id="2" name="Text 0"/>
+          <p:cNvSpPr/>
+          <p:nvPr/>
+        </p:nvSpPr>
+        <p:spPr>
+          <a:xfrm>
+            <a:off x="548640" y="228600"/>
+            <a:ext cx="3657600" cy="182880"/>
+          </a:xfrm>
+          <a:prstGeom prst="rect">
+            <a:avLst/>
+          </a:prstGeom>
+          <a:noFill/>
+          <a:ln/>
+        </p:spPr>
+        <p:txBody>
+          <a:bodyPr wrap="square" lIns="0" tIns="0" rIns="0" bIns="0" rtlCol="0" anchor="ctr"/>
+          <a:lstStyle/>
+          <a:p>
+            <a:pPr marL="0" indent="0">
+              <a:buNone/>
+            </a:pPr>
+            <a:r>
+              <a:rPr lang="en-US" sz="900" b="1" kern="0" spc="300" dirty="0">
+                <a:solidFill>
+                  <a:srgbClr val="2B5A8C"/>
+                </a:solidFill>
+                <a:latin typeface="Calibri" pitchFamily="34" charset="0"/>
+                <a:ea typeface="Calibri" pitchFamily="34" charset="-122"/>
+                <a:cs typeface="Calibri" pitchFamily="34" charset="-120"/>
+              </a:rPr>
+              <a:t>APPLICATION</a:t>
+            </a:r>
+            <a:endParaRPr lang="en-US" sz="900" dirty="0"/>
+          </a:p>
+        </p:txBody>
+      </p:sp>
+      <p:sp>
+        <p:nvSpPr>
+          <p:cNvPr id="3" name="Text 1"/>
+          <p:cNvSpPr/>
+          <p:nvPr/>
+        </p:nvSpPr>
+        <p:spPr>
+          <a:xfrm>
+            <a:off x="548640" y="438912"/>
+            <a:ext cx="8046720" cy="640080"/>
+          </a:xfrm>
+          <a:prstGeom prst="rect">
+            <a:avLst/>
+          </a:prstGeom>
+          <a:noFill/>
+          <a:ln/>
+        </p:spPr>
+        <p:txBody>
+          <a:bodyPr wrap="square" lIns="0" tIns="0" rIns="0" bIns="0" rtlCol="0" anchor="ctr"/>
+          <a:lstStyle/>
+          <a:p>
+            <a:pPr marL="0" indent="0">
+              <a:buNone/>
+            </a:pPr>
+            <a:r>
+              <a:rPr lang="en-US" sz="2600" b="1" dirty="0">
+                <a:solidFill>
+                  <a:srgbClr val="1E293B"/>
+                </a:solidFill>
+                <a:latin typeface="Georgia" pitchFamily="34" charset="0"/>
+                <a:ea typeface="Georgia" pitchFamily="34" charset="-122"/>
+                <a:cs typeface="Georgia" pitchFamily="34" charset="-120"/>
+              </a:rPr>
+              <a:t>Evaluating Real Buildings:</a:t>
+            </a:r>
+            <a:endParaRPr lang="en-US" sz="2600" dirty="0"/>
+          </a:p>
+          <a:p>
+            <a:pPr marL="0" indent="0">
+              <a:buNone/>
+            </a:pPr>
+            <a:r>
+              <a:rPr lang="en-US" sz="2600" b="1" dirty="0">
+                <a:solidFill>
+                  <a:srgbClr val="1E293B"/>
+                </a:solidFill>
+                <a:latin typeface="Georgia" pitchFamily="34" charset="0"/>
+                <a:ea typeface="Georgia" pitchFamily="34" charset="-122"/>
+                <a:cs typeface="Georgia" pitchFamily="34" charset="-120"/>
+              </a:rPr>
+              <a:t>From Templates to Scores</a:t>
+            </a:r>
+            <a:endParaRPr lang="en-US" sz="2600" dirty="0"/>
+          </a:p>
+        </p:txBody>
+      </p:sp>
+      <p:sp>
+        <p:nvSpPr>
+          <p:cNvPr id="4" name="Shape 2"/>
+          <p:cNvSpPr/>
+          <p:nvPr/>
+        </p:nvSpPr>
+        <p:spPr>
+          <a:xfrm>
+            <a:off x="548640" y="1280160"/>
+            <a:ext cx="8046720" cy="914400"/>
+          </a:xfrm>
+          <a:prstGeom prst="rect">
+            <a:avLst/>
+          </a:prstGeom>
+          <a:solidFill>
+            <a:srgbClr val="F8FAFC"/>
+          </a:solidFill>
+          <a:ln w="6350">
+            <a:solidFill>
+              <a:srgbClr val="E2E8F0"/>
+            </a:solidFill>
+            <a:prstDash val="solid"/>
+          </a:ln>
+          <a:effectLst>
+            <a:outerShdw blurRad="50800" dist="12700" dir="8100000" algn="bl" rotWithShape="0">
+              <a:srgbClr val="000000">
+                <a:alpha val="6000"/>
+              </a:srgbClr>
+            </a:outerShdw>
+          </a:effectLst>
+        </p:spPr>
+        <p:txBody>
+          <a:bodyPr/>
+          <a:lstStyle/>
+          <a:p>
+            <a:endParaRPr lang="en-US"/>
+          </a:p>
+        </p:txBody>
+      </p:sp>
+      <p:sp>
+        <p:nvSpPr>
+          <p:cNvPr id="5" name="Shape 3"/>
+          <p:cNvSpPr/>
+          <p:nvPr/>
+        </p:nvSpPr>
+        <p:spPr>
+          <a:xfrm>
+            <a:off x="548640" y="1280160"/>
+            <a:ext cx="54864" cy="914400"/>
+          </a:xfrm>
+          <a:prstGeom prst="rect">
+            <a:avLst/>
+          </a:prstGeom>
+          <a:solidFill>
+            <a:srgbClr val="2B5A8C"/>
+          </a:solidFill>
+          <a:ln/>
+        </p:spPr>
+        <p:txBody>
+          <a:bodyPr/>
+          <a:lstStyle/>
+          <a:p>
+            <a:endParaRPr lang="en-US"/>
+          </a:p>
+        </p:txBody>
+      </p:sp>
+      <p:sp>
+        <p:nvSpPr>
+          <p:cNvPr id="6" name="Text 4"/>
+          <p:cNvSpPr/>
+          <p:nvPr/>
+        </p:nvSpPr>
+        <p:spPr>
+          <a:xfrm>
+            <a:off x="777240" y="1353312"/>
+            <a:ext cx="1097280" cy="274320"/>
+          </a:xfrm>
+          <a:prstGeom prst="rect">
+            <a:avLst/>
+          </a:prstGeom>
+          <a:noFill/>
+          <a:ln/>
+        </p:spPr>
+        <p:txBody>
+          <a:bodyPr wrap="square" lIns="0" tIns="0" rIns="0" bIns="0" rtlCol="0" anchor="ctr"/>
+          <a:lstStyle/>
+          <a:p>
+            <a:pPr marL="0" indent="0">
+              <a:buNone/>
+            </a:pPr>
+            <a:r>
+              <a:rPr lang="en-US" sz="1400" b="1" dirty="0">
+                <a:solidFill>
+                  <a:srgbClr val="2B5A8C"/>
+                </a:solidFill>
+                <a:latin typeface="Georgia" pitchFamily="34" charset="0"/>
+                <a:ea typeface="Georgia" pitchFamily="34" charset="-122"/>
+                <a:cs typeface="Georgia" pitchFamily="34" charset="-120"/>
+              </a:rPr>
+              <a:t>Input</a:t>
+            </a:r>
+            <a:endParaRPr lang="en-US" sz="1400" dirty="0"/>
+          </a:p>
+        </p:txBody>
+      </p:sp>
+      <p:sp>
+        <p:nvSpPr>
+          <p:cNvPr id="7" name="Text 5"/>
+          <p:cNvSpPr/>
+          <p:nvPr/>
+        </p:nvSpPr>
+        <p:spPr>
+          <a:xfrm>
+            <a:off x="1920240" y="1353312"/>
+            <a:ext cx="6492240" cy="731520"/>
+          </a:xfrm>
+          <a:prstGeom prst="rect">
+            <a:avLst/>
+          </a:prstGeom>
+          <a:noFill/>
+          <a:ln/>
+        </p:spPr>
+        <p:txBody>
+          <a:bodyPr wrap="square" lIns="0" tIns="0" rIns="0" bIns="0" rtlCol="0" anchor="ctr"/>
+          <a:lstStyle/>
+          <a:p>
+            <a:pPr marL="0" indent="0">
+              <a:buNone/>
+            </a:pPr>
+            <a:r>
+              <a:rPr lang="en-US" sz="1150" dirty="0">
+                <a:solidFill>
+                  <a:srgbClr val="475569"/>
+                </a:solidFill>
+                <a:latin typeface="Calibri" pitchFamily="34" charset="0"/>
+                <a:ea typeface="Calibri" pitchFamily="34" charset="-122"/>
+                <a:cs typeface="Calibri" pitchFamily="34" charset="-120"/>
+              </a:rPr>
+              <a:t>Building description, floor plans, photos, post-occupancy survey data</a:t>
+            </a:r>
+            <a:endParaRPr lang="en-US" sz="1150" dirty="0"/>
+          </a:p>
+        </p:txBody>
+      </p:sp>
+      <p:sp>
+        <p:nvSpPr>
+          <p:cNvPr id="8" name="Shape 6"/>
+          <p:cNvSpPr/>
+          <p:nvPr/>
+        </p:nvSpPr>
+        <p:spPr>
+          <a:xfrm>
+            <a:off x="548640" y="2331720"/>
+            <a:ext cx="8046720" cy="914400"/>
+          </a:xfrm>
+          <a:prstGeom prst="rect">
+            <a:avLst/>
+          </a:prstGeom>
+          <a:solidFill>
+            <a:srgbClr val="F8FAFC"/>
+          </a:solidFill>
+          <a:ln w="6350">
+            <a:solidFill>
+              <a:srgbClr val="E2E8F0"/>
+            </a:solidFill>
+            <a:prstDash val="solid"/>
+          </a:ln>
+          <a:effectLst>
+            <a:outerShdw blurRad="50800" dist="12700" dir="8100000" algn="bl" rotWithShape="0">
+              <a:srgbClr val="000000">
+                <a:alpha val="6000"/>
+              </a:srgbClr>
+            </a:outerShdw>
+          </a:effectLst>
+        </p:spPr>
+        <p:txBody>
+          <a:bodyPr/>
+          <a:lstStyle/>
+          <a:p>
+            <a:endParaRPr lang="en-US"/>
+          </a:p>
+        </p:txBody>
+      </p:sp>
+      <p:sp>
+        <p:nvSpPr>
+          <p:cNvPr id="9" name="Shape 7"/>
+          <p:cNvSpPr/>
+          <p:nvPr/>
+        </p:nvSpPr>
+        <p:spPr>
+          <a:xfrm>
+            <a:off x="548640" y="2331720"/>
+            <a:ext cx="54864" cy="914400"/>
+          </a:xfrm>
+          <a:prstGeom prst="rect">
+            <a:avLst/>
+          </a:prstGeom>
+          <a:solidFill>
+            <a:srgbClr val="6B3B8C"/>
+          </a:solidFill>
+          <a:ln/>
+        </p:spPr>
+        <p:txBody>
+          <a:bodyPr/>
+          <a:lstStyle/>
+          <a:p>
+            <a:endParaRPr lang="en-US"/>
+          </a:p>
+        </p:txBody>
+      </p:sp>
+      <p:sp>
+        <p:nvSpPr>
+          <p:cNvPr id="10" name="Text 8"/>
+          <p:cNvSpPr/>
+          <p:nvPr/>
+        </p:nvSpPr>
+        <p:spPr>
+          <a:xfrm>
+            <a:off x="777240" y="2404872"/>
+            <a:ext cx="1097280" cy="274320"/>
+          </a:xfrm>
+          <a:prstGeom prst="rect">
+            <a:avLst/>
+          </a:prstGeom>
+          <a:noFill/>
+          <a:ln/>
+        </p:spPr>
+        <p:txBody>
+          <a:bodyPr wrap="square" lIns="0" tIns="0" rIns="0" bIns="0" rtlCol="0" anchor="ctr"/>
+          <a:lstStyle/>
+          <a:p>
+            <a:pPr marL="0" indent="0">
+              <a:buNone/>
+            </a:pPr>
+            <a:r>
+              <a:rPr lang="en-US" sz="1400" b="1" dirty="0">
+                <a:solidFill>
+                  <a:srgbClr val="6B3B8C"/>
+                </a:solidFill>
+                <a:latin typeface="Georgia" pitchFamily="34" charset="0"/>
+                <a:ea typeface="Georgia" pitchFamily="34" charset="-122"/>
+                <a:cs typeface="Georgia" pitchFamily="34" charset="-120"/>
+              </a:rPr>
+              <a:t>Process</a:t>
+            </a:r>
+            <a:endParaRPr lang="en-US" sz="1400" dirty="0"/>
+          </a:p>
+        </p:txBody>
+      </p:sp>
+      <p:sp>
+        <p:nvSpPr>
+          <p:cNvPr id="11" name="Text 9"/>
+          <p:cNvSpPr/>
+          <p:nvPr/>
+        </p:nvSpPr>
+        <p:spPr>
+          <a:xfrm>
+            <a:off x="1920240" y="2404872"/>
+            <a:ext cx="6492240" cy="731520"/>
+          </a:xfrm>
+          <a:prstGeom prst="rect">
+            <a:avLst/>
+          </a:prstGeom>
+          <a:noFill/>
+          <a:ln/>
+        </p:spPr>
+        <p:txBody>
+          <a:bodyPr wrap="square" lIns="0" tIns="0" rIns="0" bIns="0" rtlCol="0" anchor="ctr"/>
+          <a:lstStyle/>
+          <a:p>
+            <a:pPr marL="0" indent="0">
+              <a:buNone/>
+            </a:pPr>
+            <a:r>
+              <a:rPr lang="en-US" sz="1150" dirty="0">
+                <a:solidFill>
+                  <a:srgbClr val="475569"/>
+                </a:solidFill>
+                <a:latin typeface="Calibri" pitchFamily="34" charset="0"/>
+                <a:ea typeface="Calibri" pitchFamily="34" charset="-122"/>
+                <a:cs typeface="Calibri" pitchFamily="34" charset="-120"/>
+              </a:rPr>
+              <a:t>Each template evaluated against the building's features. Does this hospital provide prospect-refuge in patient rooms? Is the acoustic environment below the speech intelligibility threshold?</a:t>
+            </a:r>
+            <a:endParaRPr lang="en-US" sz="1150" dirty="0"/>
+          </a:p>
+        </p:txBody>
+      </p:sp>
+      <p:sp>
+        <p:nvSpPr>
+          <p:cNvPr id="12" name="Shape 10"/>
+          <p:cNvSpPr/>
+          <p:nvPr/>
+        </p:nvSpPr>
+        <p:spPr>
+          <a:xfrm>
+            <a:off x="548640" y="3383280"/>
+            <a:ext cx="8046720" cy="914400"/>
+          </a:xfrm>
+          <a:prstGeom prst="rect">
+            <a:avLst/>
+          </a:prstGeom>
+          <a:solidFill>
+            <a:srgbClr val="F8FAFC"/>
+          </a:solidFill>
+          <a:ln w="6350">
+            <a:solidFill>
+              <a:srgbClr val="E2E8F0"/>
+            </a:solidFill>
+            <a:prstDash val="solid"/>
+          </a:ln>
+          <a:effectLst>
+            <a:outerShdw blurRad="50800" dist="12700" dir="8100000" algn="bl" rotWithShape="0">
+              <a:srgbClr val="000000">
+                <a:alpha val="6000"/>
+              </a:srgbClr>
+            </a:outerShdw>
+          </a:effectLst>
+        </p:spPr>
+        <p:txBody>
+          <a:bodyPr/>
+          <a:lstStyle/>
+          <a:p>
+            <a:endParaRPr lang="en-US"/>
+          </a:p>
+        </p:txBody>
+      </p:sp>
+      <p:sp>
+        <p:nvSpPr>
+          <p:cNvPr id="13" name="Shape 11"/>
+          <p:cNvSpPr/>
+          <p:nvPr/>
+        </p:nvSpPr>
+        <p:spPr>
+          <a:xfrm>
+            <a:off x="548640" y="3383280"/>
+            <a:ext cx="54864" cy="914400"/>
+          </a:xfrm>
+          <a:prstGeom prst="rect">
+            <a:avLst/>
+          </a:prstGeom>
+          <a:solidFill>
+            <a:srgbClr val="3B7A4C"/>
+          </a:solidFill>
+          <a:ln/>
+        </p:spPr>
+        <p:txBody>
+          <a:bodyPr/>
+          <a:lstStyle/>
+          <a:p>
+            <a:endParaRPr lang="en-US"/>
+          </a:p>
+        </p:txBody>
+      </p:sp>
+      <p:sp>
+        <p:nvSpPr>
+          <p:cNvPr id="14" name="Text 12"/>
+          <p:cNvSpPr/>
+          <p:nvPr/>
+        </p:nvSpPr>
+        <p:spPr>
+          <a:xfrm>
+            <a:off x="777240" y="3456432"/>
+            <a:ext cx="1097280" cy="274320"/>
+          </a:xfrm>
+          <a:prstGeom prst="rect">
+            <a:avLst/>
+          </a:prstGeom>
+          <a:noFill/>
+          <a:ln/>
+        </p:spPr>
+        <p:txBody>
+          <a:bodyPr wrap="square" lIns="0" tIns="0" rIns="0" bIns="0" rtlCol="0" anchor="ctr"/>
+          <a:lstStyle/>
+          <a:p>
+            <a:pPr marL="0" indent="0">
+              <a:buNone/>
+            </a:pPr>
+            <a:r>
+              <a:rPr lang="en-US" sz="1400" b="1" dirty="0">
+                <a:solidFill>
+                  <a:srgbClr val="3B7A4C"/>
+                </a:solidFill>
+                <a:latin typeface="Georgia" pitchFamily="34" charset="0"/>
+                <a:ea typeface="Georgia" pitchFamily="34" charset="-122"/>
+                <a:cs typeface="Georgia" pitchFamily="34" charset="-120"/>
+              </a:rPr>
+              <a:t>Output</a:t>
+            </a:r>
+            <a:endParaRPr lang="en-US" sz="1400" dirty="0"/>
+          </a:p>
+        </p:txBody>
+      </p:sp>
+      <p:sp>
+        <p:nvSpPr>
+          <p:cNvPr id="15" name="Text 13"/>
+          <p:cNvSpPr/>
+          <p:nvPr/>
+        </p:nvSpPr>
+        <p:spPr>
+          <a:xfrm>
+            <a:off x="1920240" y="3456432"/>
+            <a:ext cx="6492240" cy="731520"/>
+          </a:xfrm>
+          <a:prstGeom prst="rect">
+            <a:avLst/>
+          </a:prstGeom>
+          <a:noFill/>
+          <a:ln/>
+        </p:spPr>
+        <p:txBody>
+          <a:bodyPr wrap="square" lIns="0" tIns="0" rIns="0" bIns="0" rtlCol="0" anchor="ctr"/>
+          <a:lstStyle/>
+          <a:p>
+            <a:pPr marL="0" indent="0">
+              <a:buNone/>
+            </a:pPr>
+            <a:r>
+              <a:rPr lang="en-US" sz="1150" dirty="0">
+                <a:solidFill>
+                  <a:srgbClr val="475569"/>
+                </a:solidFill>
+                <a:latin typeface="Calibri" pitchFamily="34" charset="0"/>
+                <a:ea typeface="Calibri" pitchFamily="34" charset="-122"/>
+                <a:cs typeface="Calibri" pitchFamily="34" charset="-120"/>
+              </a:rPr>
+              <a:t>Domain-by-domain assessment with specific recommendations and mechanistic justifications. Not 'improve acoustics' but 'reduce speech intelligibility index below 0.20 in focus zones to prevent obligatory semantic processing.'</a:t>
+            </a:r>
+            <a:endParaRPr lang="en-US" sz="1150" dirty="0"/>
+          </a:p>
+        </p:txBody>
+      </p:sp>
+      <p:sp>
+        <p:nvSpPr>
+          <p:cNvPr id="16" name="Text 14"/>
+          <p:cNvSpPr/>
+          <p:nvPr/>
+        </p:nvSpPr>
+        <p:spPr>
+          <a:xfrm>
+            <a:off x="548640" y="4526280"/>
+            <a:ext cx="8046720" cy="365760"/>
+          </a:xfrm>
+          <a:prstGeom prst="rect">
+            <a:avLst/>
+          </a:prstGeom>
+          <a:noFill/>
+          <a:ln/>
+        </p:spPr>
+        <p:txBody>
+          <a:bodyPr wrap="square" lIns="0" tIns="0" rIns="0" bIns="0" rtlCol="0" anchor="ctr"/>
+          <a:lstStyle/>
+          <a:p>
+            <a:pPr marL="0" indent="0">
+              <a:buNone/>
+            </a:pPr>
+            <a:r>
+              <a:rPr lang="en-US" sz="1300" i="1" dirty="0">
+                <a:solidFill>
+                  <a:srgbClr val="2B5A8C"/>
+                </a:solidFill>
+                <a:latin typeface="Georgia" pitchFamily="34" charset="0"/>
+                <a:ea typeface="Georgia" pitchFamily="34" charset="-122"/>
+                <a:cs typeface="Georgia" pitchFamily="34" charset="-120"/>
+              </a:rPr>
+              <a:t>The recommendation comes with a citation trail back through the web to its theoretical foundations.</a:t>
+            </a:r>
+            <a:endParaRPr lang="en-US" sz="1300" dirty="0"/>
+          </a:p>
+        </p:txBody>
+      </p:sp>
+    </p:spTree>
+  </p:cSld>
+  <p:clrMapOvr>
+    <a:masterClrMapping/>
+  </p:clrMapOvr>
+</p:sld>
+</file>
+
+<file path=ppt/slides/slide23.xml><?xml version="1.0" encoding="utf-8"?>
+<p:sld xmlns:a="http://schemas.openxmlformats.org/drawingml/2006/main" xmlns:r="http://schemas.openxmlformats.org/officeDocument/2006/relationships" xmlns:p="http://schemas.openxmlformats.org/presentationml/2006/main">
+  <p:cSld name="Slide 22">
+    <p:bg>
+      <p:bgPr>
+        <a:solidFill>
+          <a:srgbClr val="FFFFFF"/>
+        </a:solidFill>
+        <a:effectLst/>
+      </p:bgPr>
+    </p:bg>
+    <p:spTree>
+      <p:nvGrpSpPr>
+        <p:cNvPr id="1" name=""/>
+        <p:cNvGrpSpPr/>
+        <p:nvPr/>
+      </p:nvGrpSpPr>
+      <p:grpSpPr>
+        <a:xfrm>
+          <a:off x="0" y="0"/>
+          <a:ext cx="0" cy="0"/>
+          <a:chOff x="0" y="0"/>
+          <a:chExt cx="0" cy="0"/>
+        </a:xfrm>
+      </p:grpSpPr>
+      <p:sp>
+        <p:nvSpPr>
+          <p:cNvPr id="2" name="Text 0"/>
+          <p:cNvSpPr/>
+          <p:nvPr/>
+        </p:nvSpPr>
+        <p:spPr>
+          <a:xfrm>
+            <a:off x="548640" y="228600"/>
+            <a:ext cx="3657600" cy="182880"/>
+          </a:xfrm>
+          <a:prstGeom prst="rect">
+            <a:avLst/>
+          </a:prstGeom>
+          <a:noFill/>
+          <a:ln/>
+        </p:spPr>
+        <p:txBody>
+          <a:bodyPr wrap="square" lIns="0" tIns="0" rIns="0" bIns="0" rtlCol="0" anchor="ctr"/>
+          <a:lstStyle/>
+          <a:p>
+            <a:pPr marL="0" indent="0">
+              <a:buNone/>
+            </a:pPr>
+            <a:r>
+              <a:rPr lang="en-US" sz="900" b="1" kern="0" spc="300" dirty="0">
+                <a:solidFill>
+                  <a:srgbClr val="2B5A8C"/>
+                </a:solidFill>
+                <a:latin typeface="Calibri" pitchFamily="34" charset="0"/>
+                <a:ea typeface="Calibri" pitchFamily="34" charset="-122"/>
+                <a:cs typeface="Calibri" pitchFamily="34" charset="-120"/>
+              </a:rPr>
+              <a:t>FUTURE DIRECTIONS</a:t>
+            </a:r>
+            <a:endParaRPr lang="en-US" sz="900" dirty="0"/>
+          </a:p>
+        </p:txBody>
+      </p:sp>
+      <p:sp>
+        <p:nvSpPr>
+          <p:cNvPr id="3" name="Text 1"/>
+          <p:cNvSpPr/>
+          <p:nvPr/>
+        </p:nvSpPr>
+        <p:spPr>
+          <a:xfrm>
+            <a:off x="548640" y="438912"/>
+            <a:ext cx="8046720" cy="640080"/>
+          </a:xfrm>
+          <a:prstGeom prst="rect">
+            <a:avLst/>
+          </a:prstGeom>
+          <a:noFill/>
+          <a:ln/>
+        </p:spPr>
+        <p:txBody>
+          <a:bodyPr wrap="square" lIns="0" tIns="0" rIns="0" bIns="0" rtlCol="0" anchor="ctr"/>
+          <a:lstStyle/>
+          <a:p>
+            <a:pPr marL="0" indent="0">
+              <a:buNone/>
+            </a:pPr>
+            <a:r>
+              <a:rPr lang="en-US" sz="2800" b="1" dirty="0">
+                <a:solidFill>
+                  <a:srgbClr val="1E293B"/>
+                </a:solidFill>
+                <a:latin typeface="Georgia" pitchFamily="34" charset="0"/>
+                <a:ea typeface="Georgia" pitchFamily="34" charset="-122"/>
+                <a:cs typeface="Georgia" pitchFamily="34" charset="-120"/>
+              </a:rPr>
+              <a:t>What's Next for Article Eater</a:t>
+            </a:r>
+            <a:endParaRPr lang="en-US" sz="2800" dirty="0"/>
+          </a:p>
+        </p:txBody>
+      </p:sp>
+      <p:sp>
+        <p:nvSpPr>
+          <p:cNvPr id="4" name="Shape 2"/>
+          <p:cNvSpPr/>
+          <p:nvPr/>
+        </p:nvSpPr>
+        <p:spPr>
+          <a:xfrm>
+            <a:off x="548640" y="1234440"/>
+            <a:ext cx="8046720" cy="621792"/>
+          </a:xfrm>
+          <a:prstGeom prst="rect">
+            <a:avLst/>
+          </a:prstGeom>
+          <a:solidFill>
+            <a:srgbClr val="F8FAFC"/>
+          </a:solidFill>
+          <a:ln w="6350">
+            <a:solidFill>
+              <a:srgbClr val="E2E8F0"/>
+            </a:solidFill>
+            <a:prstDash val="solid"/>
+          </a:ln>
+          <a:effectLst>
+            <a:outerShdw blurRad="50800" dist="12700" dir="8100000" algn="bl" rotWithShape="0">
+              <a:srgbClr val="000000">
+                <a:alpha val="6000"/>
+              </a:srgbClr>
+            </a:outerShdw>
+          </a:effectLst>
+        </p:spPr>
+        <p:txBody>
+          <a:bodyPr/>
+          <a:lstStyle/>
+          <a:p>
+            <a:endParaRPr lang="en-US"/>
+          </a:p>
+        </p:txBody>
+      </p:sp>
+      <p:sp>
+        <p:nvSpPr>
+          <p:cNvPr id="5" name="Shape 3"/>
+          <p:cNvSpPr/>
+          <p:nvPr/>
+        </p:nvSpPr>
+        <p:spPr>
+          <a:xfrm>
+            <a:off x="548640" y="1234440"/>
+            <a:ext cx="54864" cy="621792"/>
+          </a:xfrm>
+          <a:prstGeom prst="rect">
+            <a:avLst/>
+          </a:prstGeom>
+          <a:solidFill>
+            <a:srgbClr val="2B5A8C"/>
+          </a:solidFill>
+          <a:ln/>
+        </p:spPr>
+        <p:txBody>
+          <a:bodyPr/>
+          <a:lstStyle/>
+          <a:p>
+            <a:endParaRPr lang="en-US"/>
+          </a:p>
+        </p:txBody>
+      </p:sp>
+      <p:sp>
+        <p:nvSpPr>
+          <p:cNvPr id="6" name="Text 4"/>
+          <p:cNvSpPr/>
+          <p:nvPr/>
+        </p:nvSpPr>
+        <p:spPr>
+          <a:xfrm>
+            <a:off x="777240" y="1289304"/>
+            <a:ext cx="1828800" cy="228600"/>
+          </a:xfrm>
+          <a:prstGeom prst="rect">
+            <a:avLst/>
+          </a:prstGeom>
+          <a:noFill/>
+          <a:ln/>
+        </p:spPr>
+        <p:txBody>
+          <a:bodyPr wrap="square" lIns="0" tIns="0" rIns="0" bIns="0" rtlCol="0" anchor="ctr"/>
+          <a:lstStyle/>
+          <a:p>
+            <a:pPr marL="0" indent="0">
+              <a:buNone/>
+            </a:pPr>
+            <a:r>
+              <a:rPr lang="en-US" sz="1200" b="1" dirty="0">
+                <a:solidFill>
+                  <a:srgbClr val="2B5A8C"/>
+                </a:solidFill>
+                <a:latin typeface="Calibri" pitchFamily="34" charset="0"/>
+                <a:ea typeface="Calibri" pitchFamily="34" charset="-122"/>
+                <a:cs typeface="Calibri" pitchFamily="34" charset="-120"/>
+              </a:rPr>
+              <a:t>VR Validation</a:t>
+            </a:r>
+            <a:endParaRPr lang="en-US" sz="1200" dirty="0"/>
+          </a:p>
+        </p:txBody>
+      </p:sp>
+      <p:sp>
+        <p:nvSpPr>
+          <p:cNvPr id="7" name="Text 5"/>
+          <p:cNvSpPr/>
+          <p:nvPr/>
+        </p:nvSpPr>
+        <p:spPr>
+          <a:xfrm>
+            <a:off x="2651760" y="1289304"/>
+            <a:ext cx="5760720" cy="475488"/>
+          </a:xfrm>
+          <a:prstGeom prst="rect">
+            <a:avLst/>
+          </a:prstGeom>
+          <a:noFill/>
+          <a:ln/>
+        </p:spPr>
+        <p:txBody>
+          <a:bodyPr wrap="square" lIns="0" tIns="0" rIns="0" bIns="0" rtlCol="0" anchor="ctr"/>
+          <a:lstStyle/>
+          <a:p>
+            <a:pPr marL="0" indent="0">
+              <a:buNone/>
+            </a:pPr>
+            <a:r>
+              <a:rPr lang="en-US" sz="1050" dirty="0">
+                <a:solidFill>
+                  <a:srgbClr val="475569"/>
+                </a:solidFill>
+                <a:latin typeface="Calibri" pitchFamily="34" charset="0"/>
+                <a:ea typeface="Calibri" pitchFamily="34" charset="-122"/>
+                <a:cs typeface="Calibri" pitchFamily="34" charset="-120"/>
+              </a:rPr>
+              <a:t>Partner with VR labs to test template predictions. Isolate single mechanisms — impossible in real buildings, trivial in VR.</a:t>
+            </a:r>
+            <a:endParaRPr lang="en-US" sz="1050" dirty="0"/>
+          </a:p>
+        </p:txBody>
+      </p:sp>
+      <p:sp>
+        <p:nvSpPr>
+          <p:cNvPr id="8" name="Shape 6"/>
+          <p:cNvSpPr/>
+          <p:nvPr/>
+        </p:nvSpPr>
+        <p:spPr>
+          <a:xfrm>
+            <a:off x="548640" y="1947672"/>
+            <a:ext cx="8046720" cy="621792"/>
+          </a:xfrm>
+          <a:prstGeom prst="rect">
+            <a:avLst/>
+          </a:prstGeom>
+          <a:solidFill>
+            <a:srgbClr val="F8FAFC"/>
+          </a:solidFill>
+          <a:ln w="6350">
+            <a:solidFill>
+              <a:srgbClr val="E2E8F0"/>
+            </a:solidFill>
+            <a:prstDash val="solid"/>
+          </a:ln>
+          <a:effectLst>
+            <a:outerShdw blurRad="50800" dist="12700" dir="8100000" algn="bl" rotWithShape="0">
+              <a:srgbClr val="000000">
+                <a:alpha val="6000"/>
+              </a:srgbClr>
+            </a:outerShdw>
+          </a:effectLst>
+        </p:spPr>
+        <p:txBody>
+          <a:bodyPr/>
+          <a:lstStyle/>
+          <a:p>
+            <a:endParaRPr lang="en-US"/>
+          </a:p>
+        </p:txBody>
+      </p:sp>
+      <p:sp>
+        <p:nvSpPr>
+          <p:cNvPr id="9" name="Shape 7"/>
+          <p:cNvSpPr/>
+          <p:nvPr/>
+        </p:nvSpPr>
+        <p:spPr>
+          <a:xfrm>
+            <a:off x="548640" y="1947672"/>
+            <a:ext cx="54864" cy="621792"/>
+          </a:xfrm>
+          <a:prstGeom prst="rect">
+            <a:avLst/>
+          </a:prstGeom>
+          <a:solidFill>
+            <a:srgbClr val="3B7A4C"/>
+          </a:solidFill>
+          <a:ln/>
+        </p:spPr>
+        <p:txBody>
+          <a:bodyPr/>
+          <a:lstStyle/>
+          <a:p>
+            <a:endParaRPr lang="en-US"/>
+          </a:p>
+        </p:txBody>
+      </p:sp>
+      <p:sp>
+        <p:nvSpPr>
+          <p:cNvPr id="10" name="Text 8"/>
+          <p:cNvSpPr/>
+          <p:nvPr/>
+        </p:nvSpPr>
+        <p:spPr>
+          <a:xfrm>
+            <a:off x="777240" y="2002536"/>
+            <a:ext cx="1828800" cy="228600"/>
+          </a:xfrm>
+          <a:prstGeom prst="rect">
+            <a:avLst/>
+          </a:prstGeom>
+          <a:noFill/>
+          <a:ln/>
+        </p:spPr>
+        <p:txBody>
+          <a:bodyPr wrap="square" lIns="0" tIns="0" rIns="0" bIns="0" rtlCol="0" anchor="ctr"/>
+          <a:lstStyle/>
+          <a:p>
+            <a:pPr marL="0" indent="0">
+              <a:buNone/>
+            </a:pPr>
+            <a:r>
+              <a:rPr lang="en-US" sz="1200" b="1" dirty="0">
+                <a:solidFill>
+                  <a:srgbClr val="3B7A4C"/>
+                </a:solidFill>
+                <a:latin typeface="Calibri" pitchFamily="34" charset="0"/>
+                <a:ea typeface="Calibri" pitchFamily="34" charset="-122"/>
+                <a:cs typeface="Calibri" pitchFamily="34" charset="-120"/>
+              </a:rPr>
+              <a:t>Goldilocks Integration</a:t>
+            </a:r>
+            <a:endParaRPr lang="en-US" sz="1200" dirty="0"/>
+          </a:p>
+        </p:txBody>
+      </p:sp>
+      <p:sp>
+        <p:nvSpPr>
+          <p:cNvPr id="11" name="Text 9"/>
+          <p:cNvSpPr/>
+          <p:nvPr/>
+        </p:nvSpPr>
+        <p:spPr>
+          <a:xfrm>
+            <a:off x="2651760" y="2002536"/>
+            <a:ext cx="5760720" cy="475488"/>
+          </a:xfrm>
+          <a:prstGeom prst="rect">
+            <a:avLst/>
+          </a:prstGeom>
+          <a:noFill/>
+          <a:ln/>
+        </p:spPr>
+        <p:txBody>
+          <a:bodyPr wrap="square" lIns="0" tIns="0" rIns="0" bIns="0" rtlCol="0" anchor="ctr"/>
+          <a:lstStyle/>
+          <a:p>
+            <a:pPr marL="0" indent="0">
+              <a:buNone/>
+            </a:pPr>
+            <a:r>
+              <a:rPr lang="en-US" sz="1050" dirty="0">
+                <a:solidFill>
+                  <a:srgbClr val="475569"/>
+                </a:solidFill>
+                <a:latin typeface="Calibri" pitchFamily="34" charset="0"/>
+                <a:ea typeface="Calibri" pitchFamily="34" charset="-122"/>
+                <a:cs typeface="Calibri" pitchFamily="34" charset="-120"/>
+              </a:rPr>
+              <a:t>The Goldilocks Principle (next talk) as a meta-template domain. Cross-modal compensation and cultural parameterization.</a:t>
+            </a:r>
+            <a:endParaRPr lang="en-US" sz="1050" dirty="0"/>
+          </a:p>
+        </p:txBody>
+      </p:sp>
+      <p:sp>
+        <p:nvSpPr>
+          <p:cNvPr id="12" name="Shape 10"/>
+          <p:cNvSpPr/>
+          <p:nvPr/>
+        </p:nvSpPr>
+        <p:spPr>
+          <a:xfrm>
+            <a:off x="548640" y="2660904"/>
+            <a:ext cx="8046720" cy="621792"/>
+          </a:xfrm>
+          <a:prstGeom prst="rect">
+            <a:avLst/>
+          </a:prstGeom>
+          <a:solidFill>
+            <a:srgbClr val="F8FAFC"/>
+          </a:solidFill>
+          <a:ln w="6350">
+            <a:solidFill>
+              <a:srgbClr val="E2E8F0"/>
+            </a:solidFill>
+            <a:prstDash val="solid"/>
+          </a:ln>
+          <a:effectLst>
+            <a:outerShdw blurRad="50800" dist="12700" dir="8100000" algn="bl" rotWithShape="0">
+              <a:srgbClr val="000000">
+                <a:alpha val="6000"/>
+              </a:srgbClr>
+            </a:outerShdw>
+          </a:effectLst>
+        </p:spPr>
+        <p:txBody>
+          <a:bodyPr/>
+          <a:lstStyle/>
+          <a:p>
+            <a:endParaRPr lang="en-US"/>
+          </a:p>
+        </p:txBody>
+      </p:sp>
+      <p:sp>
+        <p:nvSpPr>
+          <p:cNvPr id="13" name="Shape 11"/>
+          <p:cNvSpPr/>
+          <p:nvPr/>
+        </p:nvSpPr>
+        <p:spPr>
+          <a:xfrm>
+            <a:off x="548640" y="2660904"/>
+            <a:ext cx="54864" cy="621792"/>
+          </a:xfrm>
+          <a:prstGeom prst="rect">
+            <a:avLst/>
+          </a:prstGeom>
+          <a:solidFill>
+            <a:srgbClr val="6B3B8C"/>
+          </a:solidFill>
+          <a:ln/>
+        </p:spPr>
+        <p:txBody>
+          <a:bodyPr/>
+          <a:lstStyle/>
+          <a:p>
+            <a:endParaRPr lang="en-US"/>
+          </a:p>
+        </p:txBody>
+      </p:sp>
+      <p:sp>
+        <p:nvSpPr>
+          <p:cNvPr id="14" name="Text 12"/>
+          <p:cNvSpPr/>
+          <p:nvPr/>
+        </p:nvSpPr>
+        <p:spPr>
+          <a:xfrm>
+            <a:off x="777240" y="2715768"/>
+            <a:ext cx="1828800" cy="228600"/>
+          </a:xfrm>
+          <a:prstGeom prst="rect">
+            <a:avLst/>
+          </a:prstGeom>
+          <a:noFill/>
+          <a:ln/>
+        </p:spPr>
+        <p:txBody>
+          <a:bodyPr wrap="square" lIns="0" tIns="0" rIns="0" bIns="0" rtlCol="0" anchor="ctr"/>
+          <a:lstStyle/>
+          <a:p>
+            <a:pPr marL="0" indent="0">
+              <a:buNone/>
+            </a:pPr>
+            <a:r>
+              <a:rPr lang="en-US" sz="1200" b="1" dirty="0">
+                <a:solidFill>
+                  <a:srgbClr val="6B3B8C"/>
+                </a:solidFill>
+                <a:latin typeface="Calibri" pitchFamily="34" charset="0"/>
+                <a:ea typeface="Calibri" pitchFamily="34" charset="-122"/>
+                <a:cs typeface="Calibri" pitchFamily="34" charset="-120"/>
+              </a:rPr>
+              <a:t>Explicit Cognition</a:t>
+            </a:r>
+            <a:endParaRPr lang="en-US" sz="1200" dirty="0"/>
+          </a:p>
+        </p:txBody>
+      </p:sp>
+      <p:sp>
+        <p:nvSpPr>
+          <p:cNvPr id="15" name="Text 13"/>
+          <p:cNvSpPr/>
+          <p:nvPr/>
+        </p:nvSpPr>
+        <p:spPr>
+          <a:xfrm>
+            <a:off x="2651760" y="2715768"/>
+            <a:ext cx="5760720" cy="475488"/>
+          </a:xfrm>
+          <a:prstGeom prst="rect">
+            <a:avLst/>
+          </a:prstGeom>
+          <a:noFill/>
+          <a:ln/>
+        </p:spPr>
+        <p:txBody>
+          <a:bodyPr wrap="square" lIns="0" tIns="0" rIns="0" bIns="0" rtlCol="0" anchor="ctr"/>
+          <a:lstStyle/>
+          <a:p>
+            <a:pPr marL="0" indent="0">
+              <a:buNone/>
+            </a:pPr>
+            <a:r>
+              <a:rPr lang="en-US" sz="1050" dirty="0">
+                <a:solidFill>
+                  <a:srgbClr val="475569"/>
+                </a:solidFill>
+                <a:latin typeface="Calibri" pitchFamily="34" charset="0"/>
+                <a:ea typeface="Calibri" pitchFamily="34" charset="-122"/>
+                <a:cs typeface="Calibri" pitchFamily="34" charset="-120"/>
+              </a:rPr>
+              <a:t>New template domain for implicit/explicit processing distinction (third talk). Architecture as precision management.</a:t>
+            </a:r>
+            <a:endParaRPr lang="en-US" sz="1050" dirty="0"/>
+          </a:p>
+        </p:txBody>
+      </p:sp>
+      <p:sp>
+        <p:nvSpPr>
+          <p:cNvPr id="16" name="Shape 14"/>
+          <p:cNvSpPr/>
+          <p:nvPr/>
+        </p:nvSpPr>
+        <p:spPr>
+          <a:xfrm>
+            <a:off x="548640" y="3374136"/>
+            <a:ext cx="8046720" cy="621792"/>
+          </a:xfrm>
+          <a:prstGeom prst="rect">
+            <a:avLst/>
+          </a:prstGeom>
+          <a:solidFill>
+            <a:srgbClr val="F8FAFC"/>
+          </a:solidFill>
+          <a:ln w="6350">
+            <a:solidFill>
+              <a:srgbClr val="E2E8F0"/>
+            </a:solidFill>
+            <a:prstDash val="solid"/>
+          </a:ln>
+          <a:effectLst>
+            <a:outerShdw blurRad="50800" dist="12700" dir="8100000" algn="bl" rotWithShape="0">
+              <a:srgbClr val="000000">
+                <a:alpha val="6000"/>
+              </a:srgbClr>
+            </a:outerShdw>
+          </a:effectLst>
+        </p:spPr>
+        <p:txBody>
+          <a:bodyPr/>
+          <a:lstStyle/>
+          <a:p>
+            <a:endParaRPr lang="en-US"/>
+          </a:p>
+        </p:txBody>
+      </p:sp>
+      <p:sp>
+        <p:nvSpPr>
+          <p:cNvPr id="17" name="Shape 15"/>
+          <p:cNvSpPr/>
+          <p:nvPr/>
+        </p:nvSpPr>
+        <p:spPr>
+          <a:xfrm>
+            <a:off x="548640" y="3374136"/>
+            <a:ext cx="54864" cy="621792"/>
+          </a:xfrm>
+          <a:prstGeom prst="rect">
+            <a:avLst/>
+          </a:prstGeom>
+          <a:solidFill>
+            <a:srgbClr val="8C4B2B"/>
+          </a:solidFill>
+          <a:ln/>
+        </p:spPr>
+        <p:txBody>
+          <a:bodyPr/>
+          <a:lstStyle/>
+          <a:p>
+            <a:endParaRPr lang="en-US"/>
+          </a:p>
+        </p:txBody>
+      </p:sp>
+      <p:sp>
+        <p:nvSpPr>
+          <p:cNvPr id="18" name="Text 16"/>
+          <p:cNvSpPr/>
+          <p:nvPr/>
+        </p:nvSpPr>
+        <p:spPr>
+          <a:xfrm>
+            <a:off x="777240" y="3429000"/>
+            <a:ext cx="1828800" cy="228600"/>
+          </a:xfrm>
+          <a:prstGeom prst="rect">
+            <a:avLst/>
+          </a:prstGeom>
+          <a:noFill/>
+          <a:ln/>
+        </p:spPr>
+        <p:txBody>
+          <a:bodyPr wrap="square" lIns="0" tIns="0" rIns="0" bIns="0" rtlCol="0" anchor="ctr"/>
+          <a:lstStyle/>
+          <a:p>
+            <a:pPr marL="0" indent="0">
+              <a:buNone/>
+            </a:pPr>
+            <a:r>
+              <a:rPr lang="en-US" sz="1200" b="1" dirty="0">
+                <a:solidFill>
+                  <a:srgbClr val="8C4B2B"/>
+                </a:solidFill>
+                <a:latin typeface="Calibri" pitchFamily="34" charset="0"/>
+                <a:ea typeface="Calibri" pitchFamily="34" charset="-122"/>
+                <a:cs typeface="Calibri" pitchFamily="34" charset="-120"/>
+              </a:rPr>
+              <a:t>India Fieldwork</a:t>
+            </a:r>
+            <a:endParaRPr lang="en-US" sz="1200" dirty="0"/>
+          </a:p>
+        </p:txBody>
+      </p:sp>
+      <p:sp>
+        <p:nvSpPr>
+          <p:cNvPr id="19" name="Text 17"/>
+          <p:cNvSpPr/>
+          <p:nvPr/>
+        </p:nvSpPr>
+        <p:spPr>
+          <a:xfrm>
+            <a:off x="2651760" y="3429000"/>
+            <a:ext cx="5760720" cy="475488"/>
+          </a:xfrm>
+          <a:prstGeom prst="rect">
+            <a:avLst/>
+          </a:prstGeom>
+          <a:noFill/>
+          <a:ln/>
+        </p:spPr>
+        <p:txBody>
+          <a:bodyPr wrap="square" lIns="0" tIns="0" rIns="0" bIns="0" rtlCol="0" anchor="ctr"/>
+          <a:lstStyle/>
+          <a:p>
+            <a:pPr marL="0" indent="0">
+              <a:buNone/>
+            </a:pPr>
+            <a:r>
+              <a:rPr lang="en-US" sz="1050" dirty="0">
+                <a:solidFill>
+                  <a:srgbClr val="475569"/>
+                </a:solidFill>
+                <a:latin typeface="Calibri" pitchFamily="34" charset="0"/>
+                <a:ea typeface="Calibri" pitchFamily="34" charset="-122"/>
+                <a:cs typeface="Calibri" pitchFamily="34" charset="-120"/>
+              </a:rPr>
+              <a:t>Varanasi and Ahmedabad data: cultural set-point variation across all sensory modalities. Tests the single-parameter hypothesis.</a:t>
+            </a:r>
+            <a:endParaRPr lang="en-US" sz="1050" dirty="0"/>
+          </a:p>
+        </p:txBody>
+      </p:sp>
+      <p:sp>
+        <p:nvSpPr>
+          <p:cNvPr id="20" name="Shape 18"/>
+          <p:cNvSpPr/>
+          <p:nvPr/>
+        </p:nvSpPr>
+        <p:spPr>
+          <a:xfrm>
+            <a:off x="548640" y="4087368"/>
+            <a:ext cx="8046720" cy="621792"/>
+          </a:xfrm>
+          <a:prstGeom prst="rect">
+            <a:avLst/>
+          </a:prstGeom>
+          <a:solidFill>
+            <a:srgbClr val="F8FAFC"/>
+          </a:solidFill>
+          <a:ln w="6350">
+            <a:solidFill>
+              <a:srgbClr val="E2E8F0"/>
+            </a:solidFill>
+            <a:prstDash val="solid"/>
+          </a:ln>
+          <a:effectLst>
+            <a:outerShdw blurRad="50800" dist="12700" dir="8100000" algn="bl" rotWithShape="0">
+              <a:srgbClr val="000000">
+                <a:alpha val="6000"/>
+              </a:srgbClr>
+            </a:outerShdw>
+          </a:effectLst>
+        </p:spPr>
+        <p:txBody>
+          <a:bodyPr/>
+          <a:lstStyle/>
+          <a:p>
+            <a:endParaRPr lang="en-US"/>
+          </a:p>
+        </p:txBody>
+      </p:sp>
+      <p:sp>
+        <p:nvSpPr>
+          <p:cNvPr id="21" name="Shape 19"/>
+          <p:cNvSpPr/>
+          <p:nvPr/>
+        </p:nvSpPr>
+        <p:spPr>
+          <a:xfrm>
+            <a:off x="548640" y="4087368"/>
+            <a:ext cx="54864" cy="621792"/>
+          </a:xfrm>
+          <a:prstGeom prst="rect">
+            <a:avLst/>
+          </a:prstGeom>
+          <a:solidFill>
+            <a:srgbClr val="8C2B5A"/>
+          </a:solidFill>
+          <a:ln/>
+        </p:spPr>
+        <p:txBody>
+          <a:bodyPr/>
+          <a:lstStyle/>
+          <a:p>
+            <a:endParaRPr lang="en-US"/>
+          </a:p>
+        </p:txBody>
+      </p:sp>
+      <p:sp>
+        <p:nvSpPr>
+          <p:cNvPr id="22" name="Text 20"/>
+          <p:cNvSpPr/>
+          <p:nvPr/>
+        </p:nvSpPr>
+        <p:spPr>
+          <a:xfrm>
+            <a:off x="777240" y="4142232"/>
+            <a:ext cx="1828800" cy="228600"/>
+          </a:xfrm>
+          <a:prstGeom prst="rect">
+            <a:avLst/>
+          </a:prstGeom>
+          <a:noFill/>
+          <a:ln/>
+        </p:spPr>
+        <p:txBody>
+          <a:bodyPr wrap="square" lIns="0" tIns="0" rIns="0" bIns="0" rtlCol="0" anchor="ctr"/>
+          <a:lstStyle/>
+          <a:p>
+            <a:pPr marL="0" indent="0">
+              <a:buNone/>
+            </a:pPr>
+            <a:r>
+              <a:rPr lang="en-US" sz="1200" b="1" dirty="0">
+                <a:solidFill>
+                  <a:srgbClr val="8C2B5A"/>
+                </a:solidFill>
+                <a:latin typeface="Calibri" pitchFamily="34" charset="0"/>
+                <a:ea typeface="Calibri" pitchFamily="34" charset="-122"/>
+                <a:cs typeface="Calibri" pitchFamily="34" charset="-120"/>
+              </a:rPr>
+              <a:t>Open Science</a:t>
+            </a:r>
+            <a:endParaRPr lang="en-US" sz="1200" dirty="0"/>
+          </a:p>
+        </p:txBody>
+      </p:sp>
+      <p:sp>
+        <p:nvSpPr>
+          <p:cNvPr id="23" name="Text 21"/>
+          <p:cNvSpPr/>
+          <p:nvPr/>
+        </p:nvSpPr>
+        <p:spPr>
+          <a:xfrm>
+            <a:off x="2651760" y="4142232"/>
+            <a:ext cx="5760720" cy="475488"/>
+          </a:xfrm>
+          <a:prstGeom prst="rect">
+            <a:avLst/>
+          </a:prstGeom>
+          <a:noFill/>
+          <a:ln/>
+        </p:spPr>
+        <p:txBody>
+          <a:bodyPr wrap="square" lIns="0" tIns="0" rIns="0" bIns="0" rtlCol="0" anchor="ctr"/>
+          <a:lstStyle/>
+          <a:p>
+            <a:pPr marL="0" indent="0">
+              <a:buNone/>
+            </a:pPr>
+            <a:r>
+              <a:rPr lang="en-US" sz="1050" dirty="0">
+                <a:solidFill>
+                  <a:srgbClr val="475569"/>
+                </a:solidFill>
+                <a:latin typeface="Calibri" pitchFamily="34" charset="0"/>
+                <a:ea typeface="Calibri" pitchFamily="34" charset="-122"/>
+                <a:cs typeface="Calibri" pitchFamily="34" charset="-120"/>
+              </a:rPr>
+              <a:t>Release the web as a queryable resource for architects, designers, and researchers. A living document that updates with new findings.</a:t>
+            </a:r>
+            <a:endParaRPr lang="en-US" sz="1050" dirty="0"/>
+          </a:p>
+        </p:txBody>
+      </p:sp>
+    </p:spTree>
+  </p:cSld>
+  <p:clrMapOvr>
+    <a:masterClrMapping/>
+  </p:clrMapOvr>
+</p:sld>
+</file>
+
+<file path=ppt/slides/slide24.xml><?xml version="1.0" encoding="utf-8"?>
+<p:sld xmlns:a="http://schemas.openxmlformats.org/drawingml/2006/main" xmlns:r="http://schemas.openxmlformats.org/officeDocument/2006/relationships" xmlns:p="http://schemas.openxmlformats.org/presentationml/2006/main">
+  <p:cSld name="Slide 23">
+    <p:bg>
+      <p:bgPr>
+        <a:solidFill>
+          <a:srgbClr val="FFFFFF"/>
+        </a:solidFill>
+        <a:effectLst/>
+      </p:bgPr>
+    </p:bg>
+    <p:spTree>
+      <p:nvGrpSpPr>
+        <p:cNvPr id="1" name=""/>
+        <p:cNvGrpSpPr/>
+        <p:nvPr/>
+      </p:nvGrpSpPr>
+      <p:grpSpPr>
+        <a:xfrm>
+          <a:off x="0" y="0"/>
+          <a:ext cx="0" cy="0"/>
+          <a:chOff x="0" y="0"/>
+          <a:chExt cx="0" cy="0"/>
+        </a:xfrm>
+      </p:grpSpPr>
+      <p:sp>
+        <p:nvSpPr>
+          <p:cNvPr id="2" name="Text 0"/>
+          <p:cNvSpPr/>
+          <p:nvPr/>
+        </p:nvSpPr>
+        <p:spPr>
+          <a:xfrm>
+            <a:off x="548640" y="228600"/>
+            <a:ext cx="3657600" cy="182880"/>
+          </a:xfrm>
+          <a:prstGeom prst="rect">
+            <a:avLst/>
+          </a:prstGeom>
+          <a:noFill/>
+          <a:ln/>
+        </p:spPr>
+        <p:txBody>
+          <a:bodyPr wrap="square" lIns="0" tIns="0" rIns="0" bIns="0" rtlCol="0" anchor="ctr"/>
+          <a:lstStyle/>
+          <a:p>
+            <a:pPr marL="0" indent="0">
+              <a:buNone/>
+            </a:pPr>
+            <a:r>
+              <a:rPr lang="en-US" sz="900" b="1" kern="0" spc="300" dirty="0">
+                <a:solidFill>
+                  <a:srgbClr val="2B5A8C"/>
+                </a:solidFill>
+                <a:latin typeface="Calibri" pitchFamily="34" charset="0"/>
+                <a:ea typeface="Calibri" pitchFamily="34" charset="-122"/>
+                <a:cs typeface="Calibri" pitchFamily="34" charset="-120"/>
+              </a:rPr>
+              <a:t>FOR THIS LAB</a:t>
+            </a:r>
+            <a:endParaRPr lang="en-US" sz="900" dirty="0"/>
+          </a:p>
+        </p:txBody>
+      </p:sp>
+      <p:sp>
+        <p:nvSpPr>
+          <p:cNvPr id="3" name="Text 1"/>
+          <p:cNvSpPr/>
+          <p:nvPr/>
+        </p:nvSpPr>
+        <p:spPr>
+          <a:xfrm>
+            <a:off x="548640" y="438912"/>
+            <a:ext cx="8046720" cy="640080"/>
+          </a:xfrm>
+          <a:prstGeom prst="rect">
+            <a:avLst/>
+          </a:prstGeom>
+          <a:noFill/>
+          <a:ln/>
+        </p:spPr>
+        <p:txBody>
+          <a:bodyPr wrap="square" lIns="0" tIns="0" rIns="0" bIns="0" rtlCol="0" anchor="ctr"/>
+          <a:lstStyle/>
+          <a:p>
+            <a:pPr marL="0" indent="0">
+              <a:buNone/>
+            </a:pPr>
+            <a:r>
+              <a:rPr lang="en-US" sz="2600" b="1" dirty="0">
+                <a:solidFill>
+                  <a:srgbClr val="1E293B"/>
+                </a:solidFill>
+                <a:latin typeface="Georgia" pitchFamily="34" charset="0"/>
+                <a:ea typeface="Georgia" pitchFamily="34" charset="-122"/>
+                <a:cs typeface="Georgia" pitchFamily="34" charset="-120"/>
+              </a:rPr>
+              <a:t>Connections to Work in</a:t>
+            </a:r>
+            <a:endParaRPr lang="en-US" sz="2600" dirty="0"/>
+          </a:p>
+          <a:p>
+            <a:pPr marL="0" indent="0">
+              <a:buNone/>
+            </a:pPr>
+            <a:r>
+              <a:rPr lang="en-US" sz="2600" b="1" dirty="0">
+                <a:solidFill>
+                  <a:srgbClr val="1E293B"/>
+                </a:solidFill>
+                <a:latin typeface="Georgia" pitchFamily="34" charset="0"/>
+                <a:ea typeface="Georgia" pitchFamily="34" charset="-122"/>
+                <a:cs typeface="Georgia" pitchFamily="34" charset="-120"/>
+              </a:rPr>
+              <a:t>Andy's Lab</a:t>
+            </a:r>
+            <a:endParaRPr lang="en-US" sz="2600" dirty="0"/>
+          </a:p>
+        </p:txBody>
+      </p:sp>
+      <p:sp>
+        <p:nvSpPr>
+          <p:cNvPr id="4" name="Shape 2"/>
+          <p:cNvSpPr/>
+          <p:nvPr/>
+        </p:nvSpPr>
+        <p:spPr>
+          <a:xfrm>
+            <a:off x="548640" y="1234440"/>
+            <a:ext cx="8046720" cy="777240"/>
+          </a:xfrm>
+          <a:prstGeom prst="rect">
+            <a:avLst/>
+          </a:prstGeom>
+          <a:solidFill>
+            <a:srgbClr val="F8FAFC"/>
+          </a:solidFill>
+          <a:ln w="6350">
+            <a:solidFill>
+              <a:srgbClr val="E2E8F0"/>
+            </a:solidFill>
+            <a:prstDash val="solid"/>
+          </a:ln>
+          <a:effectLst>
+            <a:outerShdw blurRad="50800" dist="12700" dir="8100000" algn="bl" rotWithShape="0">
+              <a:srgbClr val="000000">
+                <a:alpha val="6000"/>
+              </a:srgbClr>
+            </a:outerShdw>
+          </a:effectLst>
+        </p:spPr>
+        <p:txBody>
+          <a:bodyPr/>
+          <a:lstStyle/>
+          <a:p>
+            <a:endParaRPr lang="en-US"/>
+          </a:p>
+        </p:txBody>
+      </p:sp>
+      <p:sp>
+        <p:nvSpPr>
+          <p:cNvPr id="5" name="Shape 3"/>
+          <p:cNvSpPr/>
+          <p:nvPr/>
+        </p:nvSpPr>
+        <p:spPr>
+          <a:xfrm>
+            <a:off x="548640" y="1234440"/>
+            <a:ext cx="54864" cy="777240"/>
+          </a:xfrm>
+          <a:prstGeom prst="rect">
+            <a:avLst/>
+          </a:prstGeom>
+          <a:solidFill>
+            <a:srgbClr val="2B5A8C"/>
+          </a:solidFill>
+          <a:ln/>
+        </p:spPr>
+        <p:txBody>
+          <a:bodyPr/>
+          <a:lstStyle/>
+          <a:p>
+            <a:endParaRPr lang="en-US"/>
+          </a:p>
+        </p:txBody>
+      </p:sp>
+      <p:sp>
+        <p:nvSpPr>
+          <p:cNvPr id="6" name="Text 4"/>
+          <p:cNvSpPr/>
+          <p:nvPr/>
+        </p:nvSpPr>
+        <p:spPr>
+          <a:xfrm>
+            <a:off x="777240" y="1289304"/>
+            <a:ext cx="7589520" cy="201168"/>
+          </a:xfrm>
+          <a:prstGeom prst="rect">
+            <a:avLst/>
+          </a:prstGeom>
+          <a:noFill/>
+          <a:ln/>
+        </p:spPr>
+        <p:txBody>
+          <a:bodyPr wrap="square" lIns="0" tIns="0" rIns="0" bIns="0" rtlCol="0" anchor="ctr"/>
+          <a:lstStyle/>
+          <a:p>
+            <a:pPr marL="0" indent="0">
+              <a:buNone/>
+            </a:pPr>
+            <a:r>
+              <a:rPr lang="en-US" sz="1150" b="1" dirty="0">
+                <a:solidFill>
+                  <a:srgbClr val="2B5A8C"/>
+                </a:solidFill>
+                <a:latin typeface="Calibri" pitchFamily="34" charset="0"/>
+                <a:ea typeface="Calibri" pitchFamily="34" charset="-122"/>
+                <a:cs typeface="Calibri" pitchFamily="34" charset="-120"/>
+              </a:rPr>
+              <a:t>Extended mind thesis (Clark &amp; Chalmers, 1998)</a:t>
+            </a:r>
+            <a:endParaRPr lang="en-US" sz="1150" dirty="0"/>
+          </a:p>
+        </p:txBody>
+      </p:sp>
+      <p:sp>
+        <p:nvSpPr>
+          <p:cNvPr id="7" name="Text 5"/>
+          <p:cNvSpPr/>
+          <p:nvPr/>
+        </p:nvSpPr>
+        <p:spPr>
+          <a:xfrm>
+            <a:off x="777240" y="1527048"/>
+            <a:ext cx="7589520" cy="411480"/>
+          </a:xfrm>
+          <a:prstGeom prst="rect">
+            <a:avLst/>
+          </a:prstGeom>
+          <a:noFill/>
+          <a:ln/>
+        </p:spPr>
+        <p:txBody>
+          <a:bodyPr wrap="square" lIns="0" tIns="0" rIns="0" bIns="0" rtlCol="0" anchor="ctr"/>
+          <a:lstStyle/>
+          <a:p>
+            <a:pPr marL="0" indent="0">
+              <a:buNone/>
+            </a:pPr>
+            <a:r>
+              <a:rPr lang="en-US" sz="1050" dirty="0">
+                <a:solidFill>
+                  <a:srgbClr val="475569"/>
+                </a:solidFill>
+                <a:latin typeface="Calibri" pitchFamily="34" charset="0"/>
+                <a:ea typeface="Calibri" pitchFamily="34" charset="-122"/>
+                <a:cs typeface="Calibri" pitchFamily="34" charset="-120"/>
+              </a:rPr>
+              <a:t>If the environment is part of the cognitive system, then architecture is cognitive infrastructure. Article Eater operationalizes this claim — here are the specific mechanisms.</a:t>
+            </a:r>
+            <a:endParaRPr lang="en-US" sz="1050" dirty="0"/>
+          </a:p>
+        </p:txBody>
+      </p:sp>
+      <p:sp>
+        <p:nvSpPr>
+          <p:cNvPr id="8" name="Shape 6"/>
+          <p:cNvSpPr/>
+          <p:nvPr/>
+        </p:nvSpPr>
+        <p:spPr>
+          <a:xfrm>
+            <a:off x="548640" y="2103120"/>
+            <a:ext cx="8046720" cy="777240"/>
+          </a:xfrm>
+          <a:prstGeom prst="rect">
+            <a:avLst/>
+          </a:prstGeom>
+          <a:solidFill>
+            <a:srgbClr val="F8FAFC"/>
+          </a:solidFill>
+          <a:ln w="6350">
+            <a:solidFill>
+              <a:srgbClr val="E2E8F0"/>
+            </a:solidFill>
+            <a:prstDash val="solid"/>
+          </a:ln>
+          <a:effectLst>
+            <a:outerShdw blurRad="50800" dist="12700" dir="8100000" algn="bl" rotWithShape="0">
+              <a:srgbClr val="000000">
+                <a:alpha val="6000"/>
+              </a:srgbClr>
+            </a:outerShdw>
+          </a:effectLst>
+        </p:spPr>
+        <p:txBody>
+          <a:bodyPr/>
+          <a:lstStyle/>
+          <a:p>
+            <a:endParaRPr lang="en-US"/>
+          </a:p>
+        </p:txBody>
+      </p:sp>
+      <p:sp>
+        <p:nvSpPr>
+          <p:cNvPr id="9" name="Shape 7"/>
+          <p:cNvSpPr/>
+          <p:nvPr/>
+        </p:nvSpPr>
+        <p:spPr>
+          <a:xfrm>
+            <a:off x="548640" y="2103120"/>
+            <a:ext cx="54864" cy="777240"/>
+          </a:xfrm>
+          <a:prstGeom prst="rect">
+            <a:avLst/>
+          </a:prstGeom>
+          <a:solidFill>
+            <a:srgbClr val="6B3B8C"/>
+          </a:solidFill>
+          <a:ln/>
+        </p:spPr>
+        <p:txBody>
+          <a:bodyPr/>
+          <a:lstStyle/>
+          <a:p>
+            <a:endParaRPr lang="en-US"/>
+          </a:p>
+        </p:txBody>
+      </p:sp>
+      <p:sp>
+        <p:nvSpPr>
+          <p:cNvPr id="10" name="Text 8"/>
+          <p:cNvSpPr/>
+          <p:nvPr/>
+        </p:nvSpPr>
+        <p:spPr>
+          <a:xfrm>
+            <a:off x="777240" y="2157984"/>
+            <a:ext cx="7589520" cy="201168"/>
+          </a:xfrm>
+          <a:prstGeom prst="rect">
+            <a:avLst/>
+          </a:prstGeom>
+          <a:noFill/>
+          <a:ln/>
+        </p:spPr>
+        <p:txBody>
+          <a:bodyPr wrap="square" lIns="0" tIns="0" rIns="0" bIns="0" rtlCol="0" anchor="ctr"/>
+          <a:lstStyle/>
+          <a:p>
+            <a:pPr marL="0" indent="0">
+              <a:buNone/>
+            </a:pPr>
+            <a:r>
+              <a:rPr lang="en-US" sz="1150" b="1" dirty="0">
+                <a:solidFill>
+                  <a:srgbClr val="6B3B8C"/>
+                </a:solidFill>
+                <a:latin typeface="Calibri" pitchFamily="34" charset="0"/>
+                <a:ea typeface="Calibri" pitchFamily="34" charset="-122"/>
+                <a:cs typeface="Calibri" pitchFamily="34" charset="-120"/>
+              </a:rPr>
+              <a:t>Radical Predictive Processing (Clark, 2013; 2016)</a:t>
+            </a:r>
+            <a:endParaRPr lang="en-US" sz="1150" dirty="0"/>
+          </a:p>
+        </p:txBody>
+      </p:sp>
+      <p:sp>
+        <p:nvSpPr>
+          <p:cNvPr id="11" name="Text 9"/>
+          <p:cNvSpPr/>
+          <p:nvPr/>
+        </p:nvSpPr>
+        <p:spPr>
+          <a:xfrm>
+            <a:off x="777240" y="2395728"/>
+            <a:ext cx="7589520" cy="411480"/>
+          </a:xfrm>
+          <a:prstGeom prst="rect">
+            <a:avLst/>
+          </a:prstGeom>
+          <a:noFill/>
+          <a:ln/>
+        </p:spPr>
+        <p:txBody>
+          <a:bodyPr wrap="square" lIns="0" tIns="0" rIns="0" bIns="0" rtlCol="0" anchor="ctr"/>
+          <a:lstStyle/>
+          <a:p>
+            <a:pPr marL="0" indent="0">
+              <a:buNone/>
+            </a:pPr>
+            <a:r>
+              <a:rPr lang="en-US" sz="1050" dirty="0">
+                <a:solidFill>
+                  <a:srgbClr val="475569"/>
+                </a:solidFill>
+                <a:latin typeface="Calibri" pitchFamily="34" charset="0"/>
+                <a:ea typeface="Calibri" pitchFamily="34" charset="-122"/>
+                <a:cs typeface="Calibri" pitchFamily="34" charset="-120"/>
+              </a:rPr>
+              <a:t>PP provides the unifying framework. But we push it: PP explains the implicit regime well. What about explicit cognition? (See third talk.)</a:t>
+            </a:r>
+            <a:endParaRPr lang="en-US" sz="1050" dirty="0"/>
+          </a:p>
+        </p:txBody>
+      </p:sp>
+      <p:sp>
+        <p:nvSpPr>
+          <p:cNvPr id="12" name="Shape 10"/>
+          <p:cNvSpPr/>
+          <p:nvPr/>
+        </p:nvSpPr>
+        <p:spPr>
+          <a:xfrm>
+            <a:off x="548640" y="2971800"/>
+            <a:ext cx="8046720" cy="777240"/>
+          </a:xfrm>
+          <a:prstGeom prst="rect">
+            <a:avLst/>
+          </a:prstGeom>
+          <a:solidFill>
+            <a:srgbClr val="F8FAFC"/>
+          </a:solidFill>
+          <a:ln w="6350">
+            <a:solidFill>
+              <a:srgbClr val="E2E8F0"/>
+            </a:solidFill>
+            <a:prstDash val="solid"/>
+          </a:ln>
+          <a:effectLst>
+            <a:outerShdw blurRad="50800" dist="12700" dir="8100000" algn="bl" rotWithShape="0">
+              <a:srgbClr val="000000">
+                <a:alpha val="6000"/>
+              </a:srgbClr>
+            </a:outerShdw>
+          </a:effectLst>
+        </p:spPr>
+        <p:txBody>
+          <a:bodyPr/>
+          <a:lstStyle/>
+          <a:p>
+            <a:endParaRPr lang="en-US"/>
+          </a:p>
+        </p:txBody>
+      </p:sp>
+      <p:sp>
+        <p:nvSpPr>
+          <p:cNvPr id="13" name="Shape 11"/>
+          <p:cNvSpPr/>
+          <p:nvPr/>
+        </p:nvSpPr>
+        <p:spPr>
+          <a:xfrm>
+            <a:off x="548640" y="2971800"/>
+            <a:ext cx="54864" cy="777240"/>
+          </a:xfrm>
+          <a:prstGeom prst="rect">
+            <a:avLst/>
+          </a:prstGeom>
+          <a:solidFill>
+            <a:srgbClr val="3B7A4C"/>
+          </a:solidFill>
+          <a:ln/>
+        </p:spPr>
+        <p:txBody>
+          <a:bodyPr/>
+          <a:lstStyle/>
+          <a:p>
+            <a:endParaRPr lang="en-US"/>
+          </a:p>
+        </p:txBody>
+      </p:sp>
+      <p:sp>
+        <p:nvSpPr>
+          <p:cNvPr id="14" name="Text 12"/>
+          <p:cNvSpPr/>
+          <p:nvPr/>
+        </p:nvSpPr>
+        <p:spPr>
+          <a:xfrm>
+            <a:off x="777240" y="3026664"/>
+            <a:ext cx="7589520" cy="201168"/>
+          </a:xfrm>
+          <a:prstGeom prst="rect">
+            <a:avLst/>
+          </a:prstGeom>
+          <a:noFill/>
+          <a:ln/>
+        </p:spPr>
+        <p:txBody>
+          <a:bodyPr wrap="square" lIns="0" tIns="0" rIns="0" bIns="0" rtlCol="0" anchor="ctr"/>
+          <a:lstStyle/>
+          <a:p>
+            <a:pPr marL="0" indent="0">
+              <a:buNone/>
+            </a:pPr>
+            <a:r>
+              <a:rPr lang="en-US" sz="1150" b="1" dirty="0">
+                <a:solidFill>
+                  <a:srgbClr val="3B7A4C"/>
+                </a:solidFill>
+                <a:latin typeface="Calibri" pitchFamily="34" charset="0"/>
+                <a:ea typeface="Calibri" pitchFamily="34" charset="-122"/>
+                <a:cs typeface="Calibri" pitchFamily="34" charset="-120"/>
+              </a:rPr>
+              <a:t>Happily Entangled (Miller &amp; Clark, 2018)</a:t>
+            </a:r>
+            <a:endParaRPr lang="en-US" sz="1150" dirty="0"/>
+          </a:p>
+        </p:txBody>
+      </p:sp>
+      <p:sp>
+        <p:nvSpPr>
+          <p:cNvPr id="15" name="Text 13"/>
+          <p:cNvSpPr/>
+          <p:nvPr/>
+        </p:nvSpPr>
+        <p:spPr>
+          <a:xfrm>
+            <a:off x="777240" y="3264408"/>
+            <a:ext cx="7589520" cy="411480"/>
+          </a:xfrm>
+          <a:prstGeom prst="rect">
+            <a:avLst/>
+          </a:prstGeom>
+          <a:noFill/>
+          <a:ln/>
+        </p:spPr>
+        <p:txBody>
+          <a:bodyPr wrap="square" lIns="0" tIns="0" rIns="0" bIns="0" rtlCol="0" anchor="ctr"/>
+          <a:lstStyle/>
+          <a:p>
+            <a:pPr marL="0" indent="0">
+              <a:buNone/>
+            </a:pPr>
+            <a:r>
+              <a:rPr lang="en-US" sz="1050" dirty="0">
+                <a:solidFill>
+                  <a:srgbClr val="475569"/>
+                </a:solidFill>
+                <a:latin typeface="Calibri" pitchFamily="34" charset="0"/>
+                <a:ea typeface="Calibri" pitchFamily="34" charset="-122"/>
+                <a:cs typeface="Calibri" pitchFamily="34" charset="-120"/>
+              </a:rPr>
+              <a:t>Emotion as constitutively entangled with prediction — not a separate module. Our hedonic tagging templates formalize this for environmental design.</a:t>
+            </a:r>
+            <a:endParaRPr lang="en-US" sz="1050" dirty="0"/>
+          </a:p>
+        </p:txBody>
+      </p:sp>
+      <p:sp>
+        <p:nvSpPr>
+          <p:cNvPr id="16" name="Shape 14"/>
+          <p:cNvSpPr/>
+          <p:nvPr/>
+        </p:nvSpPr>
+        <p:spPr>
+          <a:xfrm>
+            <a:off x="548640" y="3840480"/>
+            <a:ext cx="8046720" cy="777240"/>
+          </a:xfrm>
+          <a:prstGeom prst="rect">
+            <a:avLst/>
+          </a:prstGeom>
+          <a:solidFill>
+            <a:srgbClr val="F8FAFC"/>
+          </a:solidFill>
+          <a:ln w="6350">
+            <a:solidFill>
+              <a:srgbClr val="E2E8F0"/>
+            </a:solidFill>
+            <a:prstDash val="solid"/>
+          </a:ln>
+          <a:effectLst>
+            <a:outerShdw blurRad="50800" dist="12700" dir="8100000" algn="bl" rotWithShape="0">
+              <a:srgbClr val="000000">
+                <a:alpha val="6000"/>
+              </a:srgbClr>
+            </a:outerShdw>
+          </a:effectLst>
+        </p:spPr>
+        <p:txBody>
+          <a:bodyPr/>
+          <a:lstStyle/>
+          <a:p>
+            <a:endParaRPr lang="en-US"/>
+          </a:p>
+        </p:txBody>
+      </p:sp>
+      <p:sp>
+        <p:nvSpPr>
+          <p:cNvPr id="17" name="Shape 15"/>
+          <p:cNvSpPr/>
+          <p:nvPr/>
+        </p:nvSpPr>
+        <p:spPr>
+          <a:xfrm>
+            <a:off x="548640" y="3840480"/>
+            <a:ext cx="54864" cy="777240"/>
+          </a:xfrm>
+          <a:prstGeom prst="rect">
+            <a:avLst/>
+          </a:prstGeom>
+          <a:solidFill>
+            <a:srgbClr val="8C4B2B"/>
+          </a:solidFill>
+          <a:ln/>
+        </p:spPr>
+        <p:txBody>
+          <a:bodyPr/>
+          <a:lstStyle/>
+          <a:p>
+            <a:endParaRPr lang="en-US"/>
+          </a:p>
+        </p:txBody>
+      </p:sp>
+      <p:sp>
+        <p:nvSpPr>
+          <p:cNvPr id="18" name="Text 16"/>
+          <p:cNvSpPr/>
+          <p:nvPr/>
+        </p:nvSpPr>
+        <p:spPr>
+          <a:xfrm>
+            <a:off x="777240" y="3895344"/>
+            <a:ext cx="7589520" cy="201168"/>
+          </a:xfrm>
+          <a:prstGeom prst="rect">
+            <a:avLst/>
+          </a:prstGeom>
+          <a:noFill/>
+          <a:ln/>
+        </p:spPr>
+        <p:txBody>
+          <a:bodyPr wrap="square" lIns="0" tIns="0" rIns="0" bIns="0" rtlCol="0" anchor="ctr"/>
+          <a:lstStyle/>
+          <a:p>
+            <a:pPr marL="0" indent="0">
+              <a:buNone/>
+            </a:pPr>
+            <a:r>
+              <a:rPr lang="en-US" sz="1150" b="1" dirty="0">
+                <a:solidFill>
+                  <a:srgbClr val="8C4B2B"/>
+                </a:solidFill>
+                <a:latin typeface="Calibri" pitchFamily="34" charset="0"/>
+                <a:ea typeface="Calibri" pitchFamily="34" charset="-122"/>
+                <a:cs typeface="Calibri" pitchFamily="34" charset="-120"/>
+              </a:rPr>
+              <a:t>Cultural niche construction</a:t>
+            </a:r>
+            <a:endParaRPr lang="en-US" sz="1150" dirty="0"/>
+          </a:p>
+        </p:txBody>
+      </p:sp>
+      <p:sp>
+        <p:nvSpPr>
+          <p:cNvPr id="19" name="Text 17"/>
+          <p:cNvSpPr/>
+          <p:nvPr/>
+        </p:nvSpPr>
+        <p:spPr>
+          <a:xfrm>
+            <a:off x="777240" y="4133088"/>
+            <a:ext cx="7589520" cy="411480"/>
+          </a:xfrm>
+          <a:prstGeom prst="rect">
+            <a:avLst/>
+          </a:prstGeom>
+          <a:noFill/>
+          <a:ln/>
+        </p:spPr>
+        <p:txBody>
+          <a:bodyPr wrap="square" lIns="0" tIns="0" rIns="0" bIns="0" rtlCol="0" anchor="ctr"/>
+          <a:lstStyle/>
+          <a:p>
+            <a:pPr marL="0" indent="0">
+              <a:buNone/>
+            </a:pPr>
+            <a:r>
+              <a:rPr lang="en-US" sz="1050" dirty="0">
+                <a:solidFill>
+                  <a:srgbClr val="475569"/>
+                </a:solidFill>
+                <a:latin typeface="Calibri" pitchFamily="34" charset="0"/>
+                <a:ea typeface="Calibri" pitchFamily="34" charset="-122"/>
+                <a:cs typeface="Calibri" pitchFamily="34" charset="-120"/>
+              </a:rPr>
+              <a:t>The India fieldwork directly tests how cultural niches shape the precision landscape. Varanasi vs. Stockholm: same mechanisms, different parameters.</a:t>
+            </a:r>
+            <a:endParaRPr lang="en-US" sz="1050" dirty="0"/>
+          </a:p>
+        </p:txBody>
+      </p:sp>
+    </p:spTree>
+  </p:cSld>
+  <p:clrMapOvr>
+    <a:masterClrMapping/>
+  </p:clrMapOvr>
+</p:sld>
+</file>
+
+<file path=ppt/slides/slide25.xml><?xml version="1.0" encoding="utf-8"?>
+<p:sld xmlns:a="http://schemas.openxmlformats.org/drawingml/2006/main" xmlns:r="http://schemas.openxmlformats.org/officeDocument/2006/relationships" xmlns:p="http://schemas.openxmlformats.org/presentationml/2006/main">
+  <p:cSld name="Slide 24">
+    <p:bg>
+      <p:bgPr>
+        <a:solidFill>
+          <a:srgbClr val="1A1F36"/>
+        </a:solidFill>
+        <a:effectLst/>
+      </p:bgPr>
+    </p:bg>
+    <p:spTree>
+      <p:nvGrpSpPr>
+        <p:cNvPr id="1" name=""/>
+        <p:cNvGrpSpPr/>
+        <p:nvPr/>
+      </p:nvGrpSpPr>
+      <p:grpSpPr>
+        <a:xfrm>
+          <a:off x="0" y="0"/>
+          <a:ext cx="0" cy="0"/>
+          <a:chOff x="0" y="0"/>
+          <a:chExt cx="0" cy="0"/>
+        </a:xfrm>
+      </p:grpSpPr>
+      <p:sp>
+        <p:nvSpPr>
+          <p:cNvPr id="2" name="Text 0"/>
+          <p:cNvSpPr/>
+          <p:nvPr/>
+        </p:nvSpPr>
+        <p:spPr>
+          <a:xfrm>
+            <a:off x="731520" y="914400"/>
+            <a:ext cx="7680960" cy="731520"/>
+          </a:xfrm>
+          <a:prstGeom prst="rect">
+            <a:avLst/>
+          </a:prstGeom>
+          <a:noFill/>
+          <a:ln/>
+        </p:spPr>
+        <p:txBody>
+          <a:bodyPr wrap="square" lIns="0" tIns="0" rIns="0" bIns="0" rtlCol="0" anchor="ctr"/>
+          <a:lstStyle/>
+          <a:p>
+            <a:pPr marL="0" indent="0">
+              <a:buNone/>
+            </a:pPr>
+            <a:r>
+              <a:rPr lang="en-US" sz="4000" b="1" dirty="0">
+                <a:solidFill>
+                  <a:srgbClr val="FFFFFF"/>
+                </a:solidFill>
+                <a:latin typeface="Georgia" pitchFamily="34" charset="0"/>
+                <a:ea typeface="Georgia" pitchFamily="34" charset="-122"/>
+                <a:cs typeface="Georgia" pitchFamily="34" charset="-120"/>
+              </a:rPr>
+              <a:t>Article Eater</a:t>
+            </a:r>
+            <a:endParaRPr lang="en-US" sz="4000" dirty="0"/>
+          </a:p>
+        </p:txBody>
+      </p:sp>
+      <p:sp>
+        <p:nvSpPr>
+          <p:cNvPr id="3" name="Text 1"/>
+          <p:cNvSpPr/>
+          <p:nvPr/>
+        </p:nvSpPr>
+        <p:spPr>
+          <a:xfrm>
+            <a:off x="731520" y="1828800"/>
+            <a:ext cx="7680960" cy="365760"/>
+          </a:xfrm>
+          <a:prstGeom prst="rect">
+            <a:avLst/>
+          </a:prstGeom>
+          <a:noFill/>
+          <a:ln/>
+        </p:spPr>
+        <p:txBody>
+          <a:bodyPr wrap="square" lIns="0" tIns="0" rIns="0" bIns="0" rtlCol="0" anchor="ctr"/>
+          <a:lstStyle/>
+          <a:p>
+            <a:pPr marL="0" indent="0">
+              <a:buNone/>
+            </a:pPr>
+            <a:r>
+              <a:rPr lang="en-US" sz="1500" dirty="0">
+                <a:solidFill>
+                  <a:srgbClr val="CADCFC"/>
+                </a:solidFill>
+                <a:latin typeface="Calibri" pitchFamily="34" charset="0"/>
+                <a:ea typeface="Calibri" pitchFamily="34" charset="-122"/>
+                <a:cs typeface="Calibri" pitchFamily="34" charset="-120"/>
+              </a:rPr>
+              <a:t>Surface findings → mechanistic templates → testable predictions</a:t>
+            </a:r>
+            <a:endParaRPr lang="en-US" sz="1500" dirty="0"/>
+          </a:p>
+        </p:txBody>
+      </p:sp>
+      <p:sp>
+        <p:nvSpPr>
+          <p:cNvPr id="4" name="Text 2"/>
+          <p:cNvSpPr/>
+          <p:nvPr/>
+        </p:nvSpPr>
+        <p:spPr>
+          <a:xfrm>
+            <a:off x="731520" y="2240280"/>
+            <a:ext cx="7680960" cy="365760"/>
+          </a:xfrm>
+          <a:prstGeom prst="rect">
+            <a:avLst/>
+          </a:prstGeom>
+          <a:noFill/>
+          <a:ln/>
+        </p:spPr>
+        <p:txBody>
+          <a:bodyPr wrap="square" lIns="0" tIns="0" rIns="0" bIns="0" rtlCol="0" anchor="ctr"/>
+          <a:lstStyle/>
+          <a:p>
+            <a:pPr marL="0" indent="0">
+              <a:buNone/>
+            </a:pPr>
+            <a:r>
+              <a:rPr lang="en-US" sz="1500" dirty="0">
+                <a:solidFill>
+                  <a:srgbClr val="CADCFC"/>
+                </a:solidFill>
+                <a:latin typeface="Calibri" pitchFamily="34" charset="0"/>
+                <a:ea typeface="Calibri" pitchFamily="34" charset="-122"/>
+                <a:cs typeface="Calibri" pitchFamily="34" charset="-120"/>
+              </a:rPr>
+              <a:t>Argumentation structure captures what experts know and dispute</a:t>
+            </a:r>
+            <a:endParaRPr lang="en-US" sz="1500" dirty="0"/>
+          </a:p>
+        </p:txBody>
+      </p:sp>
+      <p:sp>
+        <p:nvSpPr>
+          <p:cNvPr id="5" name="Text 3"/>
+          <p:cNvSpPr/>
+          <p:nvPr/>
+        </p:nvSpPr>
+        <p:spPr>
+          <a:xfrm>
+            <a:off x="731520" y="2651760"/>
+            <a:ext cx="7680960" cy="365760"/>
+          </a:xfrm>
+          <a:prstGeom prst="rect">
+            <a:avLst/>
+          </a:prstGeom>
+          <a:noFill/>
+          <a:ln/>
+        </p:spPr>
+        <p:txBody>
+          <a:bodyPr wrap="square" lIns="0" tIns="0" rIns="0" bIns="0" rtlCol="0" anchor="ctr"/>
+          <a:lstStyle/>
+          <a:p>
+            <a:pPr marL="0" indent="0">
+              <a:buNone/>
+            </a:pPr>
+            <a:r>
+              <a:rPr lang="en-US" sz="1500" dirty="0">
+                <a:solidFill>
+                  <a:srgbClr val="CADCFC"/>
+                </a:solidFill>
+                <a:latin typeface="Calibri" pitchFamily="34" charset="0"/>
+                <a:ea typeface="Calibri" pitchFamily="34" charset="-122"/>
+                <a:cs typeface="Calibri" pitchFamily="34" charset="-120"/>
+              </a:rPr>
+              <a:t>Neuroscience + environmental psychology = new architectural science</a:t>
+            </a:r>
+            <a:endParaRPr lang="en-US" sz="1500" dirty="0"/>
+          </a:p>
+        </p:txBody>
+      </p:sp>
+      <p:sp>
+        <p:nvSpPr>
+          <p:cNvPr id="6" name="Shape 4"/>
+          <p:cNvSpPr/>
+          <p:nvPr/>
+        </p:nvSpPr>
+        <p:spPr>
+          <a:xfrm>
+            <a:off x="731520" y="3383280"/>
+            <a:ext cx="2286000" cy="27432"/>
+          </a:xfrm>
+          <a:prstGeom prst="rect">
+            <a:avLst/>
+          </a:prstGeom>
+          <a:solidFill>
+            <a:srgbClr val="CADCFC"/>
+          </a:solidFill>
+          <a:ln/>
+        </p:spPr>
+        <p:txBody>
+          <a:bodyPr/>
+          <a:lstStyle/>
+          <a:p>
+            <a:endParaRPr lang="en-US"/>
+          </a:p>
+        </p:txBody>
+      </p:sp>
+      <p:sp>
+        <p:nvSpPr>
+          <p:cNvPr id="7" name="Text 5"/>
+          <p:cNvSpPr/>
+          <p:nvPr/>
+        </p:nvSpPr>
+        <p:spPr>
+          <a:xfrm>
+            <a:off x="731520" y="3611880"/>
+            <a:ext cx="4572000" cy="365760"/>
+          </a:xfrm>
+          <a:prstGeom prst="rect">
+            <a:avLst/>
+          </a:prstGeom>
+          <a:noFill/>
+          <a:ln/>
+        </p:spPr>
+        <p:txBody>
+          <a:bodyPr wrap="square" lIns="0" tIns="0" rIns="0" bIns="0" rtlCol="0" anchor="ctr"/>
+          <a:lstStyle/>
+          <a:p>
+            <a:pPr marL="0" indent="0">
+              <a:buNone/>
+            </a:pPr>
+            <a:r>
+              <a:rPr lang="en-US" sz="1600" i="1" dirty="0">
+                <a:solidFill>
+                  <a:srgbClr val="8899BB"/>
+                </a:solidFill>
+                <a:latin typeface="Georgia" pitchFamily="34" charset="0"/>
+                <a:ea typeface="Georgia" pitchFamily="34" charset="-122"/>
+                <a:cs typeface="Georgia" pitchFamily="34" charset="-120"/>
+              </a:rPr>
+              <a:t>Next: The Goldilocks Principle →</a:t>
+            </a:r>
+            <a:endParaRPr lang="en-US" sz="1600" dirty="0"/>
+          </a:p>
+        </p:txBody>
+      </p:sp>
+      <p:sp>
+        <p:nvSpPr>
+          <p:cNvPr id="8" name="Text 6"/>
+          <p:cNvSpPr/>
+          <p:nvPr/>
+        </p:nvSpPr>
+        <p:spPr>
+          <a:xfrm>
+            <a:off x="731520" y="4114800"/>
+            <a:ext cx="4572000" cy="320040"/>
+          </a:xfrm>
+          <a:prstGeom prst="rect">
+            <a:avLst/>
+          </a:prstGeom>
+          <a:noFill/>
+          <a:ln/>
+        </p:spPr>
+        <p:txBody>
+          <a:bodyPr wrap="square" lIns="0" tIns="0" rIns="0" bIns="0" rtlCol="0" anchor="ctr"/>
+          <a:lstStyle/>
+          <a:p>
+            <a:pPr marL="0" indent="0">
+              <a:buNone/>
+            </a:pPr>
+            <a:r>
+              <a:rPr lang="en-US" sz="1300" dirty="0">
+                <a:solidFill>
+                  <a:srgbClr val="667799"/>
+                </a:solidFill>
+                <a:latin typeface="Calibri" pitchFamily="34" charset="0"/>
+                <a:ea typeface="Calibri" pitchFamily="34" charset="-122"/>
+                <a:cs typeface="Calibri" pitchFamily="34" charset="-120"/>
+              </a:rPr>
+              <a:t>david@cogsci.ucsd.edu</a:t>
+            </a:r>
+            <a:endParaRPr lang="en-US" sz="1300" dirty="0"/>
+          </a:p>
+        </p:txBody>
+      </p:sp>
+    </p:spTree>
+  </p:cSld>
+  <p:clrMapOvr>
+    <a:masterClrMapping/>
+  </p:clrMapOvr>
+</p:sld>
+</file>
+
+<file path=ppt/slides/slide3.xml><?xml version="1.0" encoding="utf-8"?>
 <p:sld xmlns:a="http://schemas.openxmlformats.org/drawingml/2006/main" xmlns:r="http://schemas.openxmlformats.org/officeDocument/2006/relationships" xmlns:p="http://schemas.openxmlformats.org/presentationml/2006/main">
   <p:cSld name="Slide 2">
     <p:bg>
@@ -15460,2823 +19111,7 @@
 </p:sld>
 </file>
 
-<file path=ppt/slides/slide20.xml><?xml version="1.0" encoding="utf-8"?>
-<p:sld xmlns:a="http://schemas.openxmlformats.org/drawingml/2006/main" xmlns:r="http://schemas.openxmlformats.org/officeDocument/2006/relationships" xmlns:p="http://schemas.openxmlformats.org/presentationml/2006/main">
-  <p:cSld name="Slide 20">
-    <p:bg>
-      <p:bgPr>
-        <a:solidFill>
-          <a:srgbClr val="FFFFFF"/>
-        </a:solidFill>
-        <a:effectLst/>
-      </p:bgPr>
-    </p:bg>
-    <p:spTree>
-      <p:nvGrpSpPr>
-        <p:cNvPr id="1" name=""/>
-        <p:cNvGrpSpPr/>
-        <p:nvPr/>
-      </p:nvGrpSpPr>
-      <p:grpSpPr>
-        <a:xfrm>
-          <a:off x="0" y="0"/>
-          <a:ext cx="0" cy="0"/>
-          <a:chOff x="0" y="0"/>
-          <a:chExt cx="0" cy="0"/>
-        </a:xfrm>
-      </p:grpSpPr>
-      <p:sp>
-        <p:nvSpPr>
-          <p:cNvPr id="2" name="Text 0"/>
-          <p:cNvSpPr/>
-          <p:nvPr/>
-        </p:nvSpPr>
-        <p:spPr>
-          <a:xfrm>
-            <a:off x="548640" y="228600"/>
-            <a:ext cx="3657600" cy="182880"/>
-          </a:xfrm>
-          <a:prstGeom prst="rect">
-            <a:avLst/>
-          </a:prstGeom>
-          <a:noFill/>
-          <a:ln/>
-        </p:spPr>
-        <p:txBody>
-          <a:bodyPr wrap="square" lIns="0" tIns="0" rIns="0" bIns="0" rtlCol="0" anchor="ctr"/>
-          <a:lstStyle/>
-          <a:p>
-            <a:pPr marL="0" indent="0">
-              <a:buNone/>
-            </a:pPr>
-            <a:r>
-              <a:rPr lang="en-US" sz="900" b="1" kern="0" spc="300" dirty="0">
-                <a:solidFill>
-                  <a:srgbClr val="2B5A8C"/>
-                </a:solidFill>
-                <a:latin typeface="Calibri" pitchFamily="34" charset="0"/>
-                <a:ea typeface="Calibri" pitchFamily="34" charset="-122"/>
-                <a:cs typeface="Calibri" pitchFamily="34" charset="-120"/>
-              </a:rPr>
-              <a:t>CONTRIBUTION TO PHILOSOPHY OF SCIENCE</a:t>
-            </a:r>
-            <a:endParaRPr lang="en-US" sz="900" dirty="0"/>
-          </a:p>
-        </p:txBody>
-      </p:sp>
-      <p:sp>
-        <p:nvSpPr>
-          <p:cNvPr id="3" name="Text 1"/>
-          <p:cNvSpPr/>
-          <p:nvPr/>
-        </p:nvSpPr>
-        <p:spPr>
-          <a:xfrm>
-            <a:off x="548640" y="438912"/>
-            <a:ext cx="8046720" cy="640080"/>
-          </a:xfrm>
-          <a:prstGeom prst="rect">
-            <a:avLst/>
-          </a:prstGeom>
-          <a:noFill/>
-          <a:ln/>
-        </p:spPr>
-        <p:txBody>
-          <a:bodyPr wrap="square" lIns="0" tIns="0" rIns="0" bIns="0" rtlCol="0" anchor="ctr"/>
-          <a:lstStyle/>
-          <a:p>
-            <a:pPr marL="0" indent="0">
-              <a:buNone/>
-            </a:pPr>
-            <a:r>
-              <a:rPr lang="en-US" sz="2600" b="1" dirty="0">
-                <a:solidFill>
-                  <a:srgbClr val="1E293B"/>
-                </a:solidFill>
-                <a:latin typeface="Georgia" pitchFamily="34" charset="0"/>
-                <a:ea typeface="Georgia" pitchFamily="34" charset="-122"/>
-                <a:cs typeface="Georgia" pitchFamily="34" charset="-120"/>
-              </a:rPr>
-              <a:t>Theory-to-Template Reduction:</a:t>
-            </a:r>
-            <a:endParaRPr lang="en-US" sz="2600" dirty="0"/>
-          </a:p>
-          <a:p>
-            <a:pPr marL="0" indent="0">
-              <a:buNone/>
-            </a:pPr>
-            <a:r>
-              <a:rPr lang="en-US" sz="2600" b="1" dirty="0">
-                <a:solidFill>
-                  <a:srgbClr val="1E293B"/>
-                </a:solidFill>
-                <a:latin typeface="Georgia" pitchFamily="34" charset="0"/>
-                <a:ea typeface="Georgia" pitchFamily="34" charset="-122"/>
-                <a:cs typeface="Georgia" pitchFamily="34" charset="-120"/>
-              </a:rPr>
-              <a:t>A Novel Philosophical Move</a:t>
-            </a:r>
-            <a:endParaRPr lang="en-US" sz="2600" dirty="0"/>
-          </a:p>
-        </p:txBody>
-      </p:sp>
-      <p:sp>
-        <p:nvSpPr>
-          <p:cNvPr id="4" name="Text 2"/>
-          <p:cNvSpPr/>
-          <p:nvPr/>
-        </p:nvSpPr>
-        <p:spPr>
-          <a:xfrm>
-            <a:off x="548640" y="1188720"/>
-            <a:ext cx="8046720" cy="274320"/>
-          </a:xfrm>
-          <a:prstGeom prst="rect">
-            <a:avLst/>
-          </a:prstGeom>
-          <a:noFill/>
-          <a:ln/>
-        </p:spPr>
-        <p:txBody>
-          <a:bodyPr wrap="square" lIns="0" tIns="0" rIns="0" bIns="0" rtlCol="0" anchor="ctr"/>
-          <a:lstStyle/>
-          <a:p>
-            <a:pPr marL="0" indent="0">
-              <a:buNone/>
-            </a:pPr>
-            <a:r>
-              <a:rPr lang="en-US" sz="1200" i="1" dirty="0">
-                <a:solidFill>
-                  <a:srgbClr val="475569"/>
-                </a:solidFill>
-                <a:latin typeface="Calibri" pitchFamily="34" charset="0"/>
-                <a:ea typeface="Calibri" pitchFamily="34" charset="-122"/>
-                <a:cs typeface="Calibri" pitchFamily="34" charset="-120"/>
-              </a:rPr>
-              <a:t>What we're doing is a kind of theory reduction that doesn't have a standard name:</a:t>
-            </a:r>
-            <a:endParaRPr lang="en-US" sz="1200" dirty="0"/>
-          </a:p>
-        </p:txBody>
-      </p:sp>
-      <p:sp>
-        <p:nvSpPr>
-          <p:cNvPr id="5" name="Shape 3"/>
-          <p:cNvSpPr/>
-          <p:nvPr/>
-        </p:nvSpPr>
-        <p:spPr>
-          <a:xfrm>
-            <a:off x="548640" y="1600200"/>
-            <a:ext cx="8046720" cy="594360"/>
-          </a:xfrm>
-          <a:prstGeom prst="rect">
-            <a:avLst/>
-          </a:prstGeom>
-          <a:solidFill>
-            <a:srgbClr val="F8FAFC"/>
-          </a:solidFill>
-          <a:ln w="6350">
-            <a:solidFill>
-              <a:srgbClr val="E2E8F0"/>
-            </a:solidFill>
-            <a:prstDash val="solid"/>
-          </a:ln>
-          <a:effectLst>
-            <a:outerShdw blurRad="50800" dist="12700" dir="8100000" algn="bl" rotWithShape="0">
-              <a:srgbClr val="000000">
-                <a:alpha val="6000"/>
-              </a:srgbClr>
-            </a:outerShdw>
-          </a:effectLst>
-        </p:spPr>
-        <p:txBody>
-          <a:bodyPr/>
-          <a:lstStyle/>
-          <a:p>
-            <a:endParaRPr lang="en-US"/>
-          </a:p>
-        </p:txBody>
-      </p:sp>
-      <p:sp>
-        <p:nvSpPr>
-          <p:cNvPr id="6" name="Shape 4"/>
-          <p:cNvSpPr/>
-          <p:nvPr/>
-        </p:nvSpPr>
-        <p:spPr>
-          <a:xfrm>
-            <a:off x="548640" y="1600200"/>
-            <a:ext cx="54864" cy="594360"/>
-          </a:xfrm>
-          <a:prstGeom prst="rect">
-            <a:avLst/>
-          </a:prstGeom>
-          <a:solidFill>
-            <a:srgbClr val="6B3B8C"/>
-          </a:solidFill>
-          <a:ln/>
-        </p:spPr>
-        <p:txBody>
-          <a:bodyPr/>
-          <a:lstStyle/>
-          <a:p>
-            <a:endParaRPr lang="en-US"/>
-          </a:p>
-        </p:txBody>
-      </p:sp>
-      <p:sp>
-        <p:nvSpPr>
-          <p:cNvPr id="7" name="Text 5"/>
-          <p:cNvSpPr/>
-          <p:nvPr/>
-        </p:nvSpPr>
-        <p:spPr>
-          <a:xfrm>
-            <a:off x="777240" y="1664208"/>
-            <a:ext cx="7589520" cy="457200"/>
-          </a:xfrm>
-          <a:prstGeom prst="rect">
-            <a:avLst/>
-          </a:prstGeom>
-          <a:noFill/>
-          <a:ln/>
-        </p:spPr>
-        <p:txBody>
-          <a:bodyPr wrap="square" lIns="0" tIns="0" rIns="0" bIns="0" rtlCol="0" anchor="ctr"/>
-          <a:lstStyle/>
-          <a:p>
-            <a:pPr marL="0" indent="0">
-              <a:buNone/>
-            </a:pPr>
-            <a:r>
-              <a:rPr lang="en-US" sz="1800" b="1" dirty="0">
-                <a:solidFill>
-                  <a:srgbClr val="6B3B8C"/>
-                </a:solidFill>
-                <a:latin typeface="Georgia" pitchFamily="34" charset="0"/>
-                <a:ea typeface="Georgia" pitchFamily="34" charset="-122"/>
-                <a:cs typeface="Georgia" pitchFamily="34" charset="-120"/>
-              </a:rPr>
-              <a:t>Broad theory  →  domain-specific mechanistic templates  →  testable predictions</a:t>
-            </a:r>
-            <a:endParaRPr lang="en-US" sz="1800" dirty="0"/>
-          </a:p>
-        </p:txBody>
-      </p:sp>
-      <p:sp>
-        <p:nvSpPr>
-          <p:cNvPr id="8" name="Text 6"/>
-          <p:cNvSpPr/>
-          <p:nvPr/>
-        </p:nvSpPr>
-        <p:spPr>
-          <a:xfrm>
-            <a:off x="548640" y="2423160"/>
-            <a:ext cx="8046720" cy="2286000"/>
-          </a:xfrm>
-          <a:prstGeom prst="rect">
-            <a:avLst/>
-          </a:prstGeom>
-          <a:noFill/>
-          <a:ln/>
-        </p:spPr>
-        <p:txBody>
-          <a:bodyPr wrap="square" lIns="0" tIns="0" rIns="0" bIns="0" rtlCol="0" anchor="ctr"/>
-          <a:lstStyle/>
-          <a:p>
-            <a:pPr marL="0" indent="0">
-              <a:lnSpc>
-                <a:spcPct val="130000"/>
-              </a:lnSpc>
-              <a:buNone/>
-            </a:pPr>
-            <a:r>
-              <a:rPr lang="en-US" sz="1300" b="1" dirty="0">
-                <a:solidFill>
-                  <a:srgbClr val="1E293B"/>
-                </a:solidFill>
-                <a:latin typeface="Calibri" pitchFamily="34" charset="0"/>
-                <a:ea typeface="Calibri" pitchFamily="34" charset="-122"/>
-                <a:cs typeface="Calibri" pitchFamily="34" charset="-120"/>
-              </a:rPr>
-              <a:t>Predictive Processing is a theory of everything. </a:t>
-            </a:r>
-            <a:r>
-              <a:rPr lang="en-US" sz="1300" dirty="0">
-                <a:solidFill>
-                  <a:srgbClr val="1E293B"/>
-                </a:solidFill>
-                <a:latin typeface="Calibri" pitchFamily="34" charset="0"/>
-                <a:ea typeface="Calibri" pitchFamily="34" charset="-122"/>
-                <a:cs typeface="Calibri" pitchFamily="34" charset="-120"/>
-              </a:rPr>
-              <a:t>That's its strength and weakness. It explains perception, action, emotion, learning — but it doesn't directly predict that ceiling height should be 2.7m for focus work and 4m+ for creative work.
-</a:t>
-            </a:r>
-            <a:endParaRPr lang="en-US" sz="1300" dirty="0"/>
-          </a:p>
-          <a:p>
-            <a:pPr marL="0" indent="0">
-              <a:lnSpc>
-                <a:spcPct val="130000"/>
-              </a:lnSpc>
-              <a:buNone/>
-            </a:pPr>
-            <a:r>
-              <a:rPr lang="en-US" sz="1300" b="1" dirty="0">
-                <a:solidFill>
-                  <a:srgbClr val="1E293B"/>
-                </a:solidFill>
-                <a:latin typeface="Calibri" pitchFamily="34" charset="0"/>
-                <a:ea typeface="Calibri" pitchFamily="34" charset="-122"/>
-                <a:cs typeface="Calibri" pitchFamily="34" charset="-120"/>
-              </a:rPr>
-              <a:t>The template reduction takes the general theory and derives specific, falsifiable, actionable claims.
-</a:t>
-            </a:r>
-            <a:endParaRPr lang="en-US" sz="1300" dirty="0"/>
-          </a:p>
-          <a:p>
-            <a:pPr marL="0" indent="0">
-              <a:lnSpc>
-                <a:spcPct val="130000"/>
-              </a:lnSpc>
-              <a:buNone/>
-            </a:pPr>
-            <a:r>
-              <a:rPr lang="en-US" sz="1300" dirty="0">
-                <a:solidFill>
-                  <a:srgbClr val="1E293B"/>
-                </a:solidFill>
-                <a:latin typeface="Calibri" pitchFamily="34" charset="0"/>
-                <a:ea typeface="Calibri" pitchFamily="34" charset="-122"/>
-                <a:cs typeface="Calibri" pitchFamily="34" charset="-120"/>
-              </a:rPr>
-              <a:t>This is where theory meets design — and it's where most cognitive science stops and we keep going.
-</a:t>
-            </a:r>
-            <a:endParaRPr lang="en-US" sz="1300" dirty="0"/>
-          </a:p>
-          <a:p>
-            <a:pPr marL="0" indent="0">
-              <a:lnSpc>
-                <a:spcPct val="130000"/>
-              </a:lnSpc>
-              <a:buNone/>
-            </a:pPr>
-            <a:r>
-              <a:rPr lang="en-US" sz="1300" i="1" dirty="0">
-                <a:solidFill>
-                  <a:srgbClr val="1E293B"/>
-                </a:solidFill>
-                <a:latin typeface="Calibri" pitchFamily="34" charset="0"/>
-                <a:ea typeface="Calibri" pitchFamily="34" charset="-122"/>
-                <a:cs typeface="Calibri" pitchFamily="34" charset="-120"/>
-              </a:rPr>
-              <a:t>Compare: In physics, the reduction from quantum field theory to materials science to engineering specifications. We're building the materials science of the mind-environment interface.</a:t>
-            </a:r>
-            <a:endParaRPr lang="en-US" sz="1300" dirty="0"/>
-          </a:p>
-        </p:txBody>
-      </p:sp>
-    </p:spTree>
-  </p:cSld>
-  <p:clrMapOvr>
-    <a:masterClrMapping/>
-  </p:clrMapOvr>
-</p:sld>
-</file>
-
-<file path=ppt/slides/slide21.xml><?xml version="1.0" encoding="utf-8"?>
-<p:sld xmlns:a="http://schemas.openxmlformats.org/drawingml/2006/main" xmlns:r="http://schemas.openxmlformats.org/officeDocument/2006/relationships" xmlns:p="http://schemas.openxmlformats.org/presentationml/2006/main">
-  <p:cSld name="Slide 21">
-    <p:bg>
-      <p:bgPr>
-        <a:solidFill>
-          <a:srgbClr val="FFFFFF"/>
-        </a:solidFill>
-        <a:effectLst/>
-      </p:bgPr>
-    </p:bg>
-    <p:spTree>
-      <p:nvGrpSpPr>
-        <p:cNvPr id="1" name=""/>
-        <p:cNvGrpSpPr/>
-        <p:nvPr/>
-      </p:nvGrpSpPr>
-      <p:grpSpPr>
-        <a:xfrm>
-          <a:off x="0" y="0"/>
-          <a:ext cx="0" cy="0"/>
-          <a:chOff x="0" y="0"/>
-          <a:chExt cx="0" cy="0"/>
-        </a:xfrm>
-      </p:grpSpPr>
-      <p:sp>
-        <p:nvSpPr>
-          <p:cNvPr id="2" name="Text 0"/>
-          <p:cNvSpPr/>
-          <p:nvPr/>
-        </p:nvSpPr>
-        <p:spPr>
-          <a:xfrm>
-            <a:off x="548640" y="228600"/>
-            <a:ext cx="3657600" cy="182880"/>
-          </a:xfrm>
-          <a:prstGeom prst="rect">
-            <a:avLst/>
-          </a:prstGeom>
-          <a:noFill/>
-          <a:ln/>
-        </p:spPr>
-        <p:txBody>
-          <a:bodyPr wrap="square" lIns="0" tIns="0" rIns="0" bIns="0" rtlCol="0" anchor="ctr"/>
-          <a:lstStyle/>
-          <a:p>
-            <a:pPr marL="0" indent="0">
-              <a:buNone/>
-            </a:pPr>
-            <a:r>
-              <a:rPr lang="en-US" sz="900" b="1" kern="0" spc="300" dirty="0">
-                <a:solidFill>
-                  <a:srgbClr val="2B5A8C"/>
-                </a:solidFill>
-                <a:latin typeface="Calibri" pitchFamily="34" charset="0"/>
-                <a:ea typeface="Calibri" pitchFamily="34" charset="-122"/>
-                <a:cs typeface="Calibri" pitchFamily="34" charset="-120"/>
-              </a:rPr>
-              <a:t>APPLICATION</a:t>
-            </a:r>
-            <a:endParaRPr lang="en-US" sz="900" dirty="0"/>
-          </a:p>
-        </p:txBody>
-      </p:sp>
-      <p:sp>
-        <p:nvSpPr>
-          <p:cNvPr id="3" name="Text 1"/>
-          <p:cNvSpPr/>
-          <p:nvPr/>
-        </p:nvSpPr>
-        <p:spPr>
-          <a:xfrm>
-            <a:off x="548640" y="438912"/>
-            <a:ext cx="8046720" cy="640080"/>
-          </a:xfrm>
-          <a:prstGeom prst="rect">
-            <a:avLst/>
-          </a:prstGeom>
-          <a:noFill/>
-          <a:ln/>
-        </p:spPr>
-        <p:txBody>
-          <a:bodyPr wrap="square" lIns="0" tIns="0" rIns="0" bIns="0" rtlCol="0" anchor="ctr"/>
-          <a:lstStyle/>
-          <a:p>
-            <a:pPr marL="0" indent="0">
-              <a:buNone/>
-            </a:pPr>
-            <a:r>
-              <a:rPr lang="en-US" sz="2600" b="1" dirty="0">
-                <a:solidFill>
-                  <a:srgbClr val="1E293B"/>
-                </a:solidFill>
-                <a:latin typeface="Georgia" pitchFamily="34" charset="0"/>
-                <a:ea typeface="Georgia" pitchFamily="34" charset="-122"/>
-                <a:cs typeface="Georgia" pitchFamily="34" charset="-120"/>
-              </a:rPr>
-              <a:t>Evaluating Real Buildings:</a:t>
-            </a:r>
-            <a:endParaRPr lang="en-US" sz="2600" dirty="0"/>
-          </a:p>
-          <a:p>
-            <a:pPr marL="0" indent="0">
-              <a:buNone/>
-            </a:pPr>
-            <a:r>
-              <a:rPr lang="en-US" sz="2600" b="1" dirty="0">
-                <a:solidFill>
-                  <a:srgbClr val="1E293B"/>
-                </a:solidFill>
-                <a:latin typeface="Georgia" pitchFamily="34" charset="0"/>
-                <a:ea typeface="Georgia" pitchFamily="34" charset="-122"/>
-                <a:cs typeface="Georgia" pitchFamily="34" charset="-120"/>
-              </a:rPr>
-              <a:t>From Templates to Scores</a:t>
-            </a:r>
-            <a:endParaRPr lang="en-US" sz="2600" dirty="0"/>
-          </a:p>
-        </p:txBody>
-      </p:sp>
-      <p:sp>
-        <p:nvSpPr>
-          <p:cNvPr id="4" name="Shape 2"/>
-          <p:cNvSpPr/>
-          <p:nvPr/>
-        </p:nvSpPr>
-        <p:spPr>
-          <a:xfrm>
-            <a:off x="548640" y="1280160"/>
-            <a:ext cx="8046720" cy="914400"/>
-          </a:xfrm>
-          <a:prstGeom prst="rect">
-            <a:avLst/>
-          </a:prstGeom>
-          <a:solidFill>
-            <a:srgbClr val="F8FAFC"/>
-          </a:solidFill>
-          <a:ln w="6350">
-            <a:solidFill>
-              <a:srgbClr val="E2E8F0"/>
-            </a:solidFill>
-            <a:prstDash val="solid"/>
-          </a:ln>
-          <a:effectLst>
-            <a:outerShdw blurRad="50800" dist="12700" dir="8100000" algn="bl" rotWithShape="0">
-              <a:srgbClr val="000000">
-                <a:alpha val="6000"/>
-              </a:srgbClr>
-            </a:outerShdw>
-          </a:effectLst>
-        </p:spPr>
-        <p:txBody>
-          <a:bodyPr/>
-          <a:lstStyle/>
-          <a:p>
-            <a:endParaRPr lang="en-US"/>
-          </a:p>
-        </p:txBody>
-      </p:sp>
-      <p:sp>
-        <p:nvSpPr>
-          <p:cNvPr id="5" name="Shape 3"/>
-          <p:cNvSpPr/>
-          <p:nvPr/>
-        </p:nvSpPr>
-        <p:spPr>
-          <a:xfrm>
-            <a:off x="548640" y="1280160"/>
-            <a:ext cx="54864" cy="914400"/>
-          </a:xfrm>
-          <a:prstGeom prst="rect">
-            <a:avLst/>
-          </a:prstGeom>
-          <a:solidFill>
-            <a:srgbClr val="2B5A8C"/>
-          </a:solidFill>
-          <a:ln/>
-        </p:spPr>
-        <p:txBody>
-          <a:bodyPr/>
-          <a:lstStyle/>
-          <a:p>
-            <a:endParaRPr lang="en-US"/>
-          </a:p>
-        </p:txBody>
-      </p:sp>
-      <p:sp>
-        <p:nvSpPr>
-          <p:cNvPr id="6" name="Text 4"/>
-          <p:cNvSpPr/>
-          <p:nvPr/>
-        </p:nvSpPr>
-        <p:spPr>
-          <a:xfrm>
-            <a:off x="777240" y="1353312"/>
-            <a:ext cx="1097280" cy="274320"/>
-          </a:xfrm>
-          <a:prstGeom prst="rect">
-            <a:avLst/>
-          </a:prstGeom>
-          <a:noFill/>
-          <a:ln/>
-        </p:spPr>
-        <p:txBody>
-          <a:bodyPr wrap="square" lIns="0" tIns="0" rIns="0" bIns="0" rtlCol="0" anchor="ctr"/>
-          <a:lstStyle/>
-          <a:p>
-            <a:pPr marL="0" indent="0">
-              <a:buNone/>
-            </a:pPr>
-            <a:r>
-              <a:rPr lang="en-US" sz="1400" b="1" dirty="0">
-                <a:solidFill>
-                  <a:srgbClr val="2B5A8C"/>
-                </a:solidFill>
-                <a:latin typeface="Georgia" pitchFamily="34" charset="0"/>
-                <a:ea typeface="Georgia" pitchFamily="34" charset="-122"/>
-                <a:cs typeface="Georgia" pitchFamily="34" charset="-120"/>
-              </a:rPr>
-              <a:t>Input</a:t>
-            </a:r>
-            <a:endParaRPr lang="en-US" sz="1400" dirty="0"/>
-          </a:p>
-        </p:txBody>
-      </p:sp>
-      <p:sp>
-        <p:nvSpPr>
-          <p:cNvPr id="7" name="Text 5"/>
-          <p:cNvSpPr/>
-          <p:nvPr/>
-        </p:nvSpPr>
-        <p:spPr>
-          <a:xfrm>
-            <a:off x="1920240" y="1353312"/>
-            <a:ext cx="6492240" cy="731520"/>
-          </a:xfrm>
-          <a:prstGeom prst="rect">
-            <a:avLst/>
-          </a:prstGeom>
-          <a:noFill/>
-          <a:ln/>
-        </p:spPr>
-        <p:txBody>
-          <a:bodyPr wrap="square" lIns="0" tIns="0" rIns="0" bIns="0" rtlCol="0" anchor="ctr"/>
-          <a:lstStyle/>
-          <a:p>
-            <a:pPr marL="0" indent="0">
-              <a:buNone/>
-            </a:pPr>
-            <a:r>
-              <a:rPr lang="en-US" sz="1150" dirty="0">
-                <a:solidFill>
-                  <a:srgbClr val="475569"/>
-                </a:solidFill>
-                <a:latin typeface="Calibri" pitchFamily="34" charset="0"/>
-                <a:ea typeface="Calibri" pitchFamily="34" charset="-122"/>
-                <a:cs typeface="Calibri" pitchFamily="34" charset="-120"/>
-              </a:rPr>
-              <a:t>Building description, floor plans, photos, post-occupancy survey data</a:t>
-            </a:r>
-            <a:endParaRPr lang="en-US" sz="1150" dirty="0"/>
-          </a:p>
-        </p:txBody>
-      </p:sp>
-      <p:sp>
-        <p:nvSpPr>
-          <p:cNvPr id="8" name="Shape 6"/>
-          <p:cNvSpPr/>
-          <p:nvPr/>
-        </p:nvSpPr>
-        <p:spPr>
-          <a:xfrm>
-            <a:off x="548640" y="2331720"/>
-            <a:ext cx="8046720" cy="914400"/>
-          </a:xfrm>
-          <a:prstGeom prst="rect">
-            <a:avLst/>
-          </a:prstGeom>
-          <a:solidFill>
-            <a:srgbClr val="F8FAFC"/>
-          </a:solidFill>
-          <a:ln w="6350">
-            <a:solidFill>
-              <a:srgbClr val="E2E8F0"/>
-            </a:solidFill>
-            <a:prstDash val="solid"/>
-          </a:ln>
-          <a:effectLst>
-            <a:outerShdw blurRad="50800" dist="12700" dir="8100000" algn="bl" rotWithShape="0">
-              <a:srgbClr val="000000">
-                <a:alpha val="6000"/>
-              </a:srgbClr>
-            </a:outerShdw>
-          </a:effectLst>
-        </p:spPr>
-        <p:txBody>
-          <a:bodyPr/>
-          <a:lstStyle/>
-          <a:p>
-            <a:endParaRPr lang="en-US"/>
-          </a:p>
-        </p:txBody>
-      </p:sp>
-      <p:sp>
-        <p:nvSpPr>
-          <p:cNvPr id="9" name="Shape 7"/>
-          <p:cNvSpPr/>
-          <p:nvPr/>
-        </p:nvSpPr>
-        <p:spPr>
-          <a:xfrm>
-            <a:off x="548640" y="2331720"/>
-            <a:ext cx="54864" cy="914400"/>
-          </a:xfrm>
-          <a:prstGeom prst="rect">
-            <a:avLst/>
-          </a:prstGeom>
-          <a:solidFill>
-            <a:srgbClr val="6B3B8C"/>
-          </a:solidFill>
-          <a:ln/>
-        </p:spPr>
-        <p:txBody>
-          <a:bodyPr/>
-          <a:lstStyle/>
-          <a:p>
-            <a:endParaRPr lang="en-US"/>
-          </a:p>
-        </p:txBody>
-      </p:sp>
-      <p:sp>
-        <p:nvSpPr>
-          <p:cNvPr id="10" name="Text 8"/>
-          <p:cNvSpPr/>
-          <p:nvPr/>
-        </p:nvSpPr>
-        <p:spPr>
-          <a:xfrm>
-            <a:off x="777240" y="2404872"/>
-            <a:ext cx="1097280" cy="274320"/>
-          </a:xfrm>
-          <a:prstGeom prst="rect">
-            <a:avLst/>
-          </a:prstGeom>
-          <a:noFill/>
-          <a:ln/>
-        </p:spPr>
-        <p:txBody>
-          <a:bodyPr wrap="square" lIns="0" tIns="0" rIns="0" bIns="0" rtlCol="0" anchor="ctr"/>
-          <a:lstStyle/>
-          <a:p>
-            <a:pPr marL="0" indent="0">
-              <a:buNone/>
-            </a:pPr>
-            <a:r>
-              <a:rPr lang="en-US" sz="1400" b="1" dirty="0">
-                <a:solidFill>
-                  <a:srgbClr val="6B3B8C"/>
-                </a:solidFill>
-                <a:latin typeface="Georgia" pitchFamily="34" charset="0"/>
-                <a:ea typeface="Georgia" pitchFamily="34" charset="-122"/>
-                <a:cs typeface="Georgia" pitchFamily="34" charset="-120"/>
-              </a:rPr>
-              <a:t>Process</a:t>
-            </a:r>
-            <a:endParaRPr lang="en-US" sz="1400" dirty="0"/>
-          </a:p>
-        </p:txBody>
-      </p:sp>
-      <p:sp>
-        <p:nvSpPr>
-          <p:cNvPr id="11" name="Text 9"/>
-          <p:cNvSpPr/>
-          <p:nvPr/>
-        </p:nvSpPr>
-        <p:spPr>
-          <a:xfrm>
-            <a:off x="1920240" y="2404872"/>
-            <a:ext cx="6492240" cy="731520"/>
-          </a:xfrm>
-          <a:prstGeom prst="rect">
-            <a:avLst/>
-          </a:prstGeom>
-          <a:noFill/>
-          <a:ln/>
-        </p:spPr>
-        <p:txBody>
-          <a:bodyPr wrap="square" lIns="0" tIns="0" rIns="0" bIns="0" rtlCol="0" anchor="ctr"/>
-          <a:lstStyle/>
-          <a:p>
-            <a:pPr marL="0" indent="0">
-              <a:buNone/>
-            </a:pPr>
-            <a:r>
-              <a:rPr lang="en-US" sz="1150" dirty="0">
-                <a:solidFill>
-                  <a:srgbClr val="475569"/>
-                </a:solidFill>
-                <a:latin typeface="Calibri" pitchFamily="34" charset="0"/>
-                <a:ea typeface="Calibri" pitchFamily="34" charset="-122"/>
-                <a:cs typeface="Calibri" pitchFamily="34" charset="-120"/>
-              </a:rPr>
-              <a:t>Each template evaluated against the building's features. Does this hospital provide prospect-refuge in patient rooms? Is the acoustic environment below the speech intelligibility threshold?</a:t>
-            </a:r>
-            <a:endParaRPr lang="en-US" sz="1150" dirty="0"/>
-          </a:p>
-        </p:txBody>
-      </p:sp>
-      <p:sp>
-        <p:nvSpPr>
-          <p:cNvPr id="12" name="Shape 10"/>
-          <p:cNvSpPr/>
-          <p:nvPr/>
-        </p:nvSpPr>
-        <p:spPr>
-          <a:xfrm>
-            <a:off x="548640" y="3383280"/>
-            <a:ext cx="8046720" cy="914400"/>
-          </a:xfrm>
-          <a:prstGeom prst="rect">
-            <a:avLst/>
-          </a:prstGeom>
-          <a:solidFill>
-            <a:srgbClr val="F8FAFC"/>
-          </a:solidFill>
-          <a:ln w="6350">
-            <a:solidFill>
-              <a:srgbClr val="E2E8F0"/>
-            </a:solidFill>
-            <a:prstDash val="solid"/>
-          </a:ln>
-          <a:effectLst>
-            <a:outerShdw blurRad="50800" dist="12700" dir="8100000" algn="bl" rotWithShape="0">
-              <a:srgbClr val="000000">
-                <a:alpha val="6000"/>
-              </a:srgbClr>
-            </a:outerShdw>
-          </a:effectLst>
-        </p:spPr>
-        <p:txBody>
-          <a:bodyPr/>
-          <a:lstStyle/>
-          <a:p>
-            <a:endParaRPr lang="en-US"/>
-          </a:p>
-        </p:txBody>
-      </p:sp>
-      <p:sp>
-        <p:nvSpPr>
-          <p:cNvPr id="13" name="Shape 11"/>
-          <p:cNvSpPr/>
-          <p:nvPr/>
-        </p:nvSpPr>
-        <p:spPr>
-          <a:xfrm>
-            <a:off x="548640" y="3383280"/>
-            <a:ext cx="54864" cy="914400"/>
-          </a:xfrm>
-          <a:prstGeom prst="rect">
-            <a:avLst/>
-          </a:prstGeom>
-          <a:solidFill>
-            <a:srgbClr val="3B7A4C"/>
-          </a:solidFill>
-          <a:ln/>
-        </p:spPr>
-        <p:txBody>
-          <a:bodyPr/>
-          <a:lstStyle/>
-          <a:p>
-            <a:endParaRPr lang="en-US"/>
-          </a:p>
-        </p:txBody>
-      </p:sp>
-      <p:sp>
-        <p:nvSpPr>
-          <p:cNvPr id="14" name="Text 12"/>
-          <p:cNvSpPr/>
-          <p:nvPr/>
-        </p:nvSpPr>
-        <p:spPr>
-          <a:xfrm>
-            <a:off x="777240" y="3456432"/>
-            <a:ext cx="1097280" cy="274320"/>
-          </a:xfrm>
-          <a:prstGeom prst="rect">
-            <a:avLst/>
-          </a:prstGeom>
-          <a:noFill/>
-          <a:ln/>
-        </p:spPr>
-        <p:txBody>
-          <a:bodyPr wrap="square" lIns="0" tIns="0" rIns="0" bIns="0" rtlCol="0" anchor="ctr"/>
-          <a:lstStyle/>
-          <a:p>
-            <a:pPr marL="0" indent="0">
-              <a:buNone/>
-            </a:pPr>
-            <a:r>
-              <a:rPr lang="en-US" sz="1400" b="1" dirty="0">
-                <a:solidFill>
-                  <a:srgbClr val="3B7A4C"/>
-                </a:solidFill>
-                <a:latin typeface="Georgia" pitchFamily="34" charset="0"/>
-                <a:ea typeface="Georgia" pitchFamily="34" charset="-122"/>
-                <a:cs typeface="Georgia" pitchFamily="34" charset="-120"/>
-              </a:rPr>
-              <a:t>Output</a:t>
-            </a:r>
-            <a:endParaRPr lang="en-US" sz="1400" dirty="0"/>
-          </a:p>
-        </p:txBody>
-      </p:sp>
-      <p:sp>
-        <p:nvSpPr>
-          <p:cNvPr id="15" name="Text 13"/>
-          <p:cNvSpPr/>
-          <p:nvPr/>
-        </p:nvSpPr>
-        <p:spPr>
-          <a:xfrm>
-            <a:off x="1920240" y="3456432"/>
-            <a:ext cx="6492240" cy="731520"/>
-          </a:xfrm>
-          <a:prstGeom prst="rect">
-            <a:avLst/>
-          </a:prstGeom>
-          <a:noFill/>
-          <a:ln/>
-        </p:spPr>
-        <p:txBody>
-          <a:bodyPr wrap="square" lIns="0" tIns="0" rIns="0" bIns="0" rtlCol="0" anchor="ctr"/>
-          <a:lstStyle/>
-          <a:p>
-            <a:pPr marL="0" indent="0">
-              <a:buNone/>
-            </a:pPr>
-            <a:r>
-              <a:rPr lang="en-US" sz="1150" dirty="0">
-                <a:solidFill>
-                  <a:srgbClr val="475569"/>
-                </a:solidFill>
-                <a:latin typeface="Calibri" pitchFamily="34" charset="0"/>
-                <a:ea typeface="Calibri" pitchFamily="34" charset="-122"/>
-                <a:cs typeface="Calibri" pitchFamily="34" charset="-120"/>
-              </a:rPr>
-              <a:t>Domain-by-domain assessment with specific recommendations and mechanistic justifications. Not 'improve acoustics' but 'reduce speech intelligibility index below 0.20 in focus zones to prevent obligatory semantic processing.'</a:t>
-            </a:r>
-            <a:endParaRPr lang="en-US" sz="1150" dirty="0"/>
-          </a:p>
-        </p:txBody>
-      </p:sp>
-      <p:sp>
-        <p:nvSpPr>
-          <p:cNvPr id="16" name="Text 14"/>
-          <p:cNvSpPr/>
-          <p:nvPr/>
-        </p:nvSpPr>
-        <p:spPr>
-          <a:xfrm>
-            <a:off x="548640" y="4526280"/>
-            <a:ext cx="8046720" cy="365760"/>
-          </a:xfrm>
-          <a:prstGeom prst="rect">
-            <a:avLst/>
-          </a:prstGeom>
-          <a:noFill/>
-          <a:ln/>
-        </p:spPr>
-        <p:txBody>
-          <a:bodyPr wrap="square" lIns="0" tIns="0" rIns="0" bIns="0" rtlCol="0" anchor="ctr"/>
-          <a:lstStyle/>
-          <a:p>
-            <a:pPr marL="0" indent="0">
-              <a:buNone/>
-            </a:pPr>
-            <a:r>
-              <a:rPr lang="en-US" sz="1300" i="1" dirty="0">
-                <a:solidFill>
-                  <a:srgbClr val="2B5A8C"/>
-                </a:solidFill>
-                <a:latin typeface="Georgia" pitchFamily="34" charset="0"/>
-                <a:ea typeface="Georgia" pitchFamily="34" charset="-122"/>
-                <a:cs typeface="Georgia" pitchFamily="34" charset="-120"/>
-              </a:rPr>
-              <a:t>The recommendation comes with a citation trail back through the web to its theoretical foundations.</a:t>
-            </a:r>
-            <a:endParaRPr lang="en-US" sz="1300" dirty="0"/>
-          </a:p>
-        </p:txBody>
-      </p:sp>
-    </p:spTree>
-  </p:cSld>
-  <p:clrMapOvr>
-    <a:masterClrMapping/>
-  </p:clrMapOvr>
-</p:sld>
-</file>
-
-<file path=ppt/slides/slide22.xml><?xml version="1.0" encoding="utf-8"?>
-<p:sld xmlns:a="http://schemas.openxmlformats.org/drawingml/2006/main" xmlns:r="http://schemas.openxmlformats.org/officeDocument/2006/relationships" xmlns:p="http://schemas.openxmlformats.org/presentationml/2006/main">
-  <p:cSld name="Slide 22">
-    <p:bg>
-      <p:bgPr>
-        <a:solidFill>
-          <a:srgbClr val="FFFFFF"/>
-        </a:solidFill>
-        <a:effectLst/>
-      </p:bgPr>
-    </p:bg>
-    <p:spTree>
-      <p:nvGrpSpPr>
-        <p:cNvPr id="1" name=""/>
-        <p:cNvGrpSpPr/>
-        <p:nvPr/>
-      </p:nvGrpSpPr>
-      <p:grpSpPr>
-        <a:xfrm>
-          <a:off x="0" y="0"/>
-          <a:ext cx="0" cy="0"/>
-          <a:chOff x="0" y="0"/>
-          <a:chExt cx="0" cy="0"/>
-        </a:xfrm>
-      </p:grpSpPr>
-      <p:sp>
-        <p:nvSpPr>
-          <p:cNvPr id="2" name="Text 0"/>
-          <p:cNvSpPr/>
-          <p:nvPr/>
-        </p:nvSpPr>
-        <p:spPr>
-          <a:xfrm>
-            <a:off x="548640" y="228600"/>
-            <a:ext cx="3657600" cy="182880"/>
-          </a:xfrm>
-          <a:prstGeom prst="rect">
-            <a:avLst/>
-          </a:prstGeom>
-          <a:noFill/>
-          <a:ln/>
-        </p:spPr>
-        <p:txBody>
-          <a:bodyPr wrap="square" lIns="0" tIns="0" rIns="0" bIns="0" rtlCol="0" anchor="ctr"/>
-          <a:lstStyle/>
-          <a:p>
-            <a:pPr marL="0" indent="0">
-              <a:buNone/>
-            </a:pPr>
-            <a:r>
-              <a:rPr lang="en-US" sz="900" b="1" kern="0" spc="300" dirty="0">
-                <a:solidFill>
-                  <a:srgbClr val="2B5A8C"/>
-                </a:solidFill>
-                <a:latin typeface="Calibri" pitchFamily="34" charset="0"/>
-                <a:ea typeface="Calibri" pitchFamily="34" charset="-122"/>
-                <a:cs typeface="Calibri" pitchFamily="34" charset="-120"/>
-              </a:rPr>
-              <a:t>FUTURE DIRECTIONS</a:t>
-            </a:r>
-            <a:endParaRPr lang="en-US" sz="900" dirty="0"/>
-          </a:p>
-        </p:txBody>
-      </p:sp>
-      <p:sp>
-        <p:nvSpPr>
-          <p:cNvPr id="3" name="Text 1"/>
-          <p:cNvSpPr/>
-          <p:nvPr/>
-        </p:nvSpPr>
-        <p:spPr>
-          <a:xfrm>
-            <a:off x="548640" y="438912"/>
-            <a:ext cx="8046720" cy="640080"/>
-          </a:xfrm>
-          <a:prstGeom prst="rect">
-            <a:avLst/>
-          </a:prstGeom>
-          <a:noFill/>
-          <a:ln/>
-        </p:spPr>
-        <p:txBody>
-          <a:bodyPr wrap="square" lIns="0" tIns="0" rIns="0" bIns="0" rtlCol="0" anchor="ctr"/>
-          <a:lstStyle/>
-          <a:p>
-            <a:pPr marL="0" indent="0">
-              <a:buNone/>
-            </a:pPr>
-            <a:r>
-              <a:rPr lang="en-US" sz="2800" b="1" dirty="0">
-                <a:solidFill>
-                  <a:srgbClr val="1E293B"/>
-                </a:solidFill>
-                <a:latin typeface="Georgia" pitchFamily="34" charset="0"/>
-                <a:ea typeface="Georgia" pitchFamily="34" charset="-122"/>
-                <a:cs typeface="Georgia" pitchFamily="34" charset="-120"/>
-              </a:rPr>
-              <a:t>What's Next for Article Eater</a:t>
-            </a:r>
-            <a:endParaRPr lang="en-US" sz="2800" dirty="0"/>
-          </a:p>
-        </p:txBody>
-      </p:sp>
-      <p:sp>
-        <p:nvSpPr>
-          <p:cNvPr id="4" name="Shape 2"/>
-          <p:cNvSpPr/>
-          <p:nvPr/>
-        </p:nvSpPr>
-        <p:spPr>
-          <a:xfrm>
-            <a:off x="548640" y="1234440"/>
-            <a:ext cx="8046720" cy="621792"/>
-          </a:xfrm>
-          <a:prstGeom prst="rect">
-            <a:avLst/>
-          </a:prstGeom>
-          <a:solidFill>
-            <a:srgbClr val="F8FAFC"/>
-          </a:solidFill>
-          <a:ln w="6350">
-            <a:solidFill>
-              <a:srgbClr val="E2E8F0"/>
-            </a:solidFill>
-            <a:prstDash val="solid"/>
-          </a:ln>
-          <a:effectLst>
-            <a:outerShdw blurRad="50800" dist="12700" dir="8100000" algn="bl" rotWithShape="0">
-              <a:srgbClr val="000000">
-                <a:alpha val="6000"/>
-              </a:srgbClr>
-            </a:outerShdw>
-          </a:effectLst>
-        </p:spPr>
-        <p:txBody>
-          <a:bodyPr/>
-          <a:lstStyle/>
-          <a:p>
-            <a:endParaRPr lang="en-US"/>
-          </a:p>
-        </p:txBody>
-      </p:sp>
-      <p:sp>
-        <p:nvSpPr>
-          <p:cNvPr id="5" name="Shape 3"/>
-          <p:cNvSpPr/>
-          <p:nvPr/>
-        </p:nvSpPr>
-        <p:spPr>
-          <a:xfrm>
-            <a:off x="548640" y="1234440"/>
-            <a:ext cx="54864" cy="621792"/>
-          </a:xfrm>
-          <a:prstGeom prst="rect">
-            <a:avLst/>
-          </a:prstGeom>
-          <a:solidFill>
-            <a:srgbClr val="2B5A8C"/>
-          </a:solidFill>
-          <a:ln/>
-        </p:spPr>
-        <p:txBody>
-          <a:bodyPr/>
-          <a:lstStyle/>
-          <a:p>
-            <a:endParaRPr lang="en-US"/>
-          </a:p>
-        </p:txBody>
-      </p:sp>
-      <p:sp>
-        <p:nvSpPr>
-          <p:cNvPr id="6" name="Text 4"/>
-          <p:cNvSpPr/>
-          <p:nvPr/>
-        </p:nvSpPr>
-        <p:spPr>
-          <a:xfrm>
-            <a:off x="777240" y="1289304"/>
-            <a:ext cx="1828800" cy="228600"/>
-          </a:xfrm>
-          <a:prstGeom prst="rect">
-            <a:avLst/>
-          </a:prstGeom>
-          <a:noFill/>
-          <a:ln/>
-        </p:spPr>
-        <p:txBody>
-          <a:bodyPr wrap="square" lIns="0" tIns="0" rIns="0" bIns="0" rtlCol="0" anchor="ctr"/>
-          <a:lstStyle/>
-          <a:p>
-            <a:pPr marL="0" indent="0">
-              <a:buNone/>
-            </a:pPr>
-            <a:r>
-              <a:rPr lang="en-US" sz="1200" b="1" dirty="0">
-                <a:solidFill>
-                  <a:srgbClr val="2B5A8C"/>
-                </a:solidFill>
-                <a:latin typeface="Calibri" pitchFamily="34" charset="0"/>
-                <a:ea typeface="Calibri" pitchFamily="34" charset="-122"/>
-                <a:cs typeface="Calibri" pitchFamily="34" charset="-120"/>
-              </a:rPr>
-              <a:t>VR Validation</a:t>
-            </a:r>
-            <a:endParaRPr lang="en-US" sz="1200" dirty="0"/>
-          </a:p>
-        </p:txBody>
-      </p:sp>
-      <p:sp>
-        <p:nvSpPr>
-          <p:cNvPr id="7" name="Text 5"/>
-          <p:cNvSpPr/>
-          <p:nvPr/>
-        </p:nvSpPr>
-        <p:spPr>
-          <a:xfrm>
-            <a:off x="2651760" y="1289304"/>
-            <a:ext cx="5760720" cy="475488"/>
-          </a:xfrm>
-          <a:prstGeom prst="rect">
-            <a:avLst/>
-          </a:prstGeom>
-          <a:noFill/>
-          <a:ln/>
-        </p:spPr>
-        <p:txBody>
-          <a:bodyPr wrap="square" lIns="0" tIns="0" rIns="0" bIns="0" rtlCol="0" anchor="ctr"/>
-          <a:lstStyle/>
-          <a:p>
-            <a:pPr marL="0" indent="0">
-              <a:buNone/>
-            </a:pPr>
-            <a:r>
-              <a:rPr lang="en-US" sz="1050" dirty="0">
-                <a:solidFill>
-                  <a:srgbClr val="475569"/>
-                </a:solidFill>
-                <a:latin typeface="Calibri" pitchFamily="34" charset="0"/>
-                <a:ea typeface="Calibri" pitchFamily="34" charset="-122"/>
-                <a:cs typeface="Calibri" pitchFamily="34" charset="-120"/>
-              </a:rPr>
-              <a:t>Partner with VR labs to test template predictions. Isolate single mechanisms — impossible in real buildings, trivial in VR.</a:t>
-            </a:r>
-            <a:endParaRPr lang="en-US" sz="1050" dirty="0"/>
-          </a:p>
-        </p:txBody>
-      </p:sp>
-      <p:sp>
-        <p:nvSpPr>
-          <p:cNvPr id="8" name="Shape 6"/>
-          <p:cNvSpPr/>
-          <p:nvPr/>
-        </p:nvSpPr>
-        <p:spPr>
-          <a:xfrm>
-            <a:off x="548640" y="1947672"/>
-            <a:ext cx="8046720" cy="621792"/>
-          </a:xfrm>
-          <a:prstGeom prst="rect">
-            <a:avLst/>
-          </a:prstGeom>
-          <a:solidFill>
-            <a:srgbClr val="F8FAFC"/>
-          </a:solidFill>
-          <a:ln w="6350">
-            <a:solidFill>
-              <a:srgbClr val="E2E8F0"/>
-            </a:solidFill>
-            <a:prstDash val="solid"/>
-          </a:ln>
-          <a:effectLst>
-            <a:outerShdw blurRad="50800" dist="12700" dir="8100000" algn="bl" rotWithShape="0">
-              <a:srgbClr val="000000">
-                <a:alpha val="6000"/>
-              </a:srgbClr>
-            </a:outerShdw>
-          </a:effectLst>
-        </p:spPr>
-        <p:txBody>
-          <a:bodyPr/>
-          <a:lstStyle/>
-          <a:p>
-            <a:endParaRPr lang="en-US"/>
-          </a:p>
-        </p:txBody>
-      </p:sp>
-      <p:sp>
-        <p:nvSpPr>
-          <p:cNvPr id="9" name="Shape 7"/>
-          <p:cNvSpPr/>
-          <p:nvPr/>
-        </p:nvSpPr>
-        <p:spPr>
-          <a:xfrm>
-            <a:off x="548640" y="1947672"/>
-            <a:ext cx="54864" cy="621792"/>
-          </a:xfrm>
-          <a:prstGeom prst="rect">
-            <a:avLst/>
-          </a:prstGeom>
-          <a:solidFill>
-            <a:srgbClr val="3B7A4C"/>
-          </a:solidFill>
-          <a:ln/>
-        </p:spPr>
-        <p:txBody>
-          <a:bodyPr/>
-          <a:lstStyle/>
-          <a:p>
-            <a:endParaRPr lang="en-US"/>
-          </a:p>
-        </p:txBody>
-      </p:sp>
-      <p:sp>
-        <p:nvSpPr>
-          <p:cNvPr id="10" name="Text 8"/>
-          <p:cNvSpPr/>
-          <p:nvPr/>
-        </p:nvSpPr>
-        <p:spPr>
-          <a:xfrm>
-            <a:off x="777240" y="2002536"/>
-            <a:ext cx="1828800" cy="228600"/>
-          </a:xfrm>
-          <a:prstGeom prst="rect">
-            <a:avLst/>
-          </a:prstGeom>
-          <a:noFill/>
-          <a:ln/>
-        </p:spPr>
-        <p:txBody>
-          <a:bodyPr wrap="square" lIns="0" tIns="0" rIns="0" bIns="0" rtlCol="0" anchor="ctr"/>
-          <a:lstStyle/>
-          <a:p>
-            <a:pPr marL="0" indent="0">
-              <a:buNone/>
-            </a:pPr>
-            <a:r>
-              <a:rPr lang="en-US" sz="1200" b="1" dirty="0">
-                <a:solidFill>
-                  <a:srgbClr val="3B7A4C"/>
-                </a:solidFill>
-                <a:latin typeface="Calibri" pitchFamily="34" charset="0"/>
-                <a:ea typeface="Calibri" pitchFamily="34" charset="-122"/>
-                <a:cs typeface="Calibri" pitchFamily="34" charset="-120"/>
-              </a:rPr>
-              <a:t>Goldilocks Integration</a:t>
-            </a:r>
-            <a:endParaRPr lang="en-US" sz="1200" dirty="0"/>
-          </a:p>
-        </p:txBody>
-      </p:sp>
-      <p:sp>
-        <p:nvSpPr>
-          <p:cNvPr id="11" name="Text 9"/>
-          <p:cNvSpPr/>
-          <p:nvPr/>
-        </p:nvSpPr>
-        <p:spPr>
-          <a:xfrm>
-            <a:off x="2651760" y="2002536"/>
-            <a:ext cx="5760720" cy="475488"/>
-          </a:xfrm>
-          <a:prstGeom prst="rect">
-            <a:avLst/>
-          </a:prstGeom>
-          <a:noFill/>
-          <a:ln/>
-        </p:spPr>
-        <p:txBody>
-          <a:bodyPr wrap="square" lIns="0" tIns="0" rIns="0" bIns="0" rtlCol="0" anchor="ctr"/>
-          <a:lstStyle/>
-          <a:p>
-            <a:pPr marL="0" indent="0">
-              <a:buNone/>
-            </a:pPr>
-            <a:r>
-              <a:rPr lang="en-US" sz="1050" dirty="0">
-                <a:solidFill>
-                  <a:srgbClr val="475569"/>
-                </a:solidFill>
-                <a:latin typeface="Calibri" pitchFamily="34" charset="0"/>
-                <a:ea typeface="Calibri" pitchFamily="34" charset="-122"/>
-                <a:cs typeface="Calibri" pitchFamily="34" charset="-120"/>
-              </a:rPr>
-              <a:t>The Goldilocks Principle (next talk) as a meta-template domain. Cross-modal compensation and cultural parameterization.</a:t>
-            </a:r>
-            <a:endParaRPr lang="en-US" sz="1050" dirty="0"/>
-          </a:p>
-        </p:txBody>
-      </p:sp>
-      <p:sp>
-        <p:nvSpPr>
-          <p:cNvPr id="12" name="Shape 10"/>
-          <p:cNvSpPr/>
-          <p:nvPr/>
-        </p:nvSpPr>
-        <p:spPr>
-          <a:xfrm>
-            <a:off x="548640" y="2660904"/>
-            <a:ext cx="8046720" cy="621792"/>
-          </a:xfrm>
-          <a:prstGeom prst="rect">
-            <a:avLst/>
-          </a:prstGeom>
-          <a:solidFill>
-            <a:srgbClr val="F8FAFC"/>
-          </a:solidFill>
-          <a:ln w="6350">
-            <a:solidFill>
-              <a:srgbClr val="E2E8F0"/>
-            </a:solidFill>
-            <a:prstDash val="solid"/>
-          </a:ln>
-          <a:effectLst>
-            <a:outerShdw blurRad="50800" dist="12700" dir="8100000" algn="bl" rotWithShape="0">
-              <a:srgbClr val="000000">
-                <a:alpha val="6000"/>
-              </a:srgbClr>
-            </a:outerShdw>
-          </a:effectLst>
-        </p:spPr>
-        <p:txBody>
-          <a:bodyPr/>
-          <a:lstStyle/>
-          <a:p>
-            <a:endParaRPr lang="en-US"/>
-          </a:p>
-        </p:txBody>
-      </p:sp>
-      <p:sp>
-        <p:nvSpPr>
-          <p:cNvPr id="13" name="Shape 11"/>
-          <p:cNvSpPr/>
-          <p:nvPr/>
-        </p:nvSpPr>
-        <p:spPr>
-          <a:xfrm>
-            <a:off x="548640" y="2660904"/>
-            <a:ext cx="54864" cy="621792"/>
-          </a:xfrm>
-          <a:prstGeom prst="rect">
-            <a:avLst/>
-          </a:prstGeom>
-          <a:solidFill>
-            <a:srgbClr val="6B3B8C"/>
-          </a:solidFill>
-          <a:ln/>
-        </p:spPr>
-        <p:txBody>
-          <a:bodyPr/>
-          <a:lstStyle/>
-          <a:p>
-            <a:endParaRPr lang="en-US"/>
-          </a:p>
-        </p:txBody>
-      </p:sp>
-      <p:sp>
-        <p:nvSpPr>
-          <p:cNvPr id="14" name="Text 12"/>
-          <p:cNvSpPr/>
-          <p:nvPr/>
-        </p:nvSpPr>
-        <p:spPr>
-          <a:xfrm>
-            <a:off x="777240" y="2715768"/>
-            <a:ext cx="1828800" cy="228600"/>
-          </a:xfrm>
-          <a:prstGeom prst="rect">
-            <a:avLst/>
-          </a:prstGeom>
-          <a:noFill/>
-          <a:ln/>
-        </p:spPr>
-        <p:txBody>
-          <a:bodyPr wrap="square" lIns="0" tIns="0" rIns="0" bIns="0" rtlCol="0" anchor="ctr"/>
-          <a:lstStyle/>
-          <a:p>
-            <a:pPr marL="0" indent="0">
-              <a:buNone/>
-            </a:pPr>
-            <a:r>
-              <a:rPr lang="en-US" sz="1200" b="1" dirty="0">
-                <a:solidFill>
-                  <a:srgbClr val="6B3B8C"/>
-                </a:solidFill>
-                <a:latin typeface="Calibri" pitchFamily="34" charset="0"/>
-                <a:ea typeface="Calibri" pitchFamily="34" charset="-122"/>
-                <a:cs typeface="Calibri" pitchFamily="34" charset="-120"/>
-              </a:rPr>
-              <a:t>Explicit Cognition</a:t>
-            </a:r>
-            <a:endParaRPr lang="en-US" sz="1200" dirty="0"/>
-          </a:p>
-        </p:txBody>
-      </p:sp>
-      <p:sp>
-        <p:nvSpPr>
-          <p:cNvPr id="15" name="Text 13"/>
-          <p:cNvSpPr/>
-          <p:nvPr/>
-        </p:nvSpPr>
-        <p:spPr>
-          <a:xfrm>
-            <a:off x="2651760" y="2715768"/>
-            <a:ext cx="5760720" cy="475488"/>
-          </a:xfrm>
-          <a:prstGeom prst="rect">
-            <a:avLst/>
-          </a:prstGeom>
-          <a:noFill/>
-          <a:ln/>
-        </p:spPr>
-        <p:txBody>
-          <a:bodyPr wrap="square" lIns="0" tIns="0" rIns="0" bIns="0" rtlCol="0" anchor="ctr"/>
-          <a:lstStyle/>
-          <a:p>
-            <a:pPr marL="0" indent="0">
-              <a:buNone/>
-            </a:pPr>
-            <a:r>
-              <a:rPr lang="en-US" sz="1050" dirty="0">
-                <a:solidFill>
-                  <a:srgbClr val="475569"/>
-                </a:solidFill>
-                <a:latin typeface="Calibri" pitchFamily="34" charset="0"/>
-                <a:ea typeface="Calibri" pitchFamily="34" charset="-122"/>
-                <a:cs typeface="Calibri" pitchFamily="34" charset="-120"/>
-              </a:rPr>
-              <a:t>New template domain for implicit/explicit processing distinction (third talk). Architecture as precision management.</a:t>
-            </a:r>
-            <a:endParaRPr lang="en-US" sz="1050" dirty="0"/>
-          </a:p>
-        </p:txBody>
-      </p:sp>
-      <p:sp>
-        <p:nvSpPr>
-          <p:cNvPr id="16" name="Shape 14"/>
-          <p:cNvSpPr/>
-          <p:nvPr/>
-        </p:nvSpPr>
-        <p:spPr>
-          <a:xfrm>
-            <a:off x="548640" y="3374136"/>
-            <a:ext cx="8046720" cy="621792"/>
-          </a:xfrm>
-          <a:prstGeom prst="rect">
-            <a:avLst/>
-          </a:prstGeom>
-          <a:solidFill>
-            <a:srgbClr val="F8FAFC"/>
-          </a:solidFill>
-          <a:ln w="6350">
-            <a:solidFill>
-              <a:srgbClr val="E2E8F0"/>
-            </a:solidFill>
-            <a:prstDash val="solid"/>
-          </a:ln>
-          <a:effectLst>
-            <a:outerShdw blurRad="50800" dist="12700" dir="8100000" algn="bl" rotWithShape="0">
-              <a:srgbClr val="000000">
-                <a:alpha val="6000"/>
-              </a:srgbClr>
-            </a:outerShdw>
-          </a:effectLst>
-        </p:spPr>
-        <p:txBody>
-          <a:bodyPr/>
-          <a:lstStyle/>
-          <a:p>
-            <a:endParaRPr lang="en-US"/>
-          </a:p>
-        </p:txBody>
-      </p:sp>
-      <p:sp>
-        <p:nvSpPr>
-          <p:cNvPr id="17" name="Shape 15"/>
-          <p:cNvSpPr/>
-          <p:nvPr/>
-        </p:nvSpPr>
-        <p:spPr>
-          <a:xfrm>
-            <a:off x="548640" y="3374136"/>
-            <a:ext cx="54864" cy="621792"/>
-          </a:xfrm>
-          <a:prstGeom prst="rect">
-            <a:avLst/>
-          </a:prstGeom>
-          <a:solidFill>
-            <a:srgbClr val="8C4B2B"/>
-          </a:solidFill>
-          <a:ln/>
-        </p:spPr>
-        <p:txBody>
-          <a:bodyPr/>
-          <a:lstStyle/>
-          <a:p>
-            <a:endParaRPr lang="en-US"/>
-          </a:p>
-        </p:txBody>
-      </p:sp>
-      <p:sp>
-        <p:nvSpPr>
-          <p:cNvPr id="18" name="Text 16"/>
-          <p:cNvSpPr/>
-          <p:nvPr/>
-        </p:nvSpPr>
-        <p:spPr>
-          <a:xfrm>
-            <a:off x="777240" y="3429000"/>
-            <a:ext cx="1828800" cy="228600"/>
-          </a:xfrm>
-          <a:prstGeom prst="rect">
-            <a:avLst/>
-          </a:prstGeom>
-          <a:noFill/>
-          <a:ln/>
-        </p:spPr>
-        <p:txBody>
-          <a:bodyPr wrap="square" lIns="0" tIns="0" rIns="0" bIns="0" rtlCol="0" anchor="ctr"/>
-          <a:lstStyle/>
-          <a:p>
-            <a:pPr marL="0" indent="0">
-              <a:buNone/>
-            </a:pPr>
-            <a:r>
-              <a:rPr lang="en-US" sz="1200" b="1" dirty="0">
-                <a:solidFill>
-                  <a:srgbClr val="8C4B2B"/>
-                </a:solidFill>
-                <a:latin typeface="Calibri" pitchFamily="34" charset="0"/>
-                <a:ea typeface="Calibri" pitchFamily="34" charset="-122"/>
-                <a:cs typeface="Calibri" pitchFamily="34" charset="-120"/>
-              </a:rPr>
-              <a:t>India Fieldwork</a:t>
-            </a:r>
-            <a:endParaRPr lang="en-US" sz="1200" dirty="0"/>
-          </a:p>
-        </p:txBody>
-      </p:sp>
-      <p:sp>
-        <p:nvSpPr>
-          <p:cNvPr id="19" name="Text 17"/>
-          <p:cNvSpPr/>
-          <p:nvPr/>
-        </p:nvSpPr>
-        <p:spPr>
-          <a:xfrm>
-            <a:off x="2651760" y="3429000"/>
-            <a:ext cx="5760720" cy="475488"/>
-          </a:xfrm>
-          <a:prstGeom prst="rect">
-            <a:avLst/>
-          </a:prstGeom>
-          <a:noFill/>
-          <a:ln/>
-        </p:spPr>
-        <p:txBody>
-          <a:bodyPr wrap="square" lIns="0" tIns="0" rIns="0" bIns="0" rtlCol="0" anchor="ctr"/>
-          <a:lstStyle/>
-          <a:p>
-            <a:pPr marL="0" indent="0">
-              <a:buNone/>
-            </a:pPr>
-            <a:r>
-              <a:rPr lang="en-US" sz="1050" dirty="0">
-                <a:solidFill>
-                  <a:srgbClr val="475569"/>
-                </a:solidFill>
-                <a:latin typeface="Calibri" pitchFamily="34" charset="0"/>
-                <a:ea typeface="Calibri" pitchFamily="34" charset="-122"/>
-                <a:cs typeface="Calibri" pitchFamily="34" charset="-120"/>
-              </a:rPr>
-              <a:t>Varanasi and Ahmedabad data: cultural set-point variation across all sensory modalities. Tests the single-parameter hypothesis.</a:t>
-            </a:r>
-            <a:endParaRPr lang="en-US" sz="1050" dirty="0"/>
-          </a:p>
-        </p:txBody>
-      </p:sp>
-      <p:sp>
-        <p:nvSpPr>
-          <p:cNvPr id="20" name="Shape 18"/>
-          <p:cNvSpPr/>
-          <p:nvPr/>
-        </p:nvSpPr>
-        <p:spPr>
-          <a:xfrm>
-            <a:off x="548640" y="4087368"/>
-            <a:ext cx="8046720" cy="621792"/>
-          </a:xfrm>
-          <a:prstGeom prst="rect">
-            <a:avLst/>
-          </a:prstGeom>
-          <a:solidFill>
-            <a:srgbClr val="F8FAFC"/>
-          </a:solidFill>
-          <a:ln w="6350">
-            <a:solidFill>
-              <a:srgbClr val="E2E8F0"/>
-            </a:solidFill>
-            <a:prstDash val="solid"/>
-          </a:ln>
-          <a:effectLst>
-            <a:outerShdw blurRad="50800" dist="12700" dir="8100000" algn="bl" rotWithShape="0">
-              <a:srgbClr val="000000">
-                <a:alpha val="6000"/>
-              </a:srgbClr>
-            </a:outerShdw>
-          </a:effectLst>
-        </p:spPr>
-        <p:txBody>
-          <a:bodyPr/>
-          <a:lstStyle/>
-          <a:p>
-            <a:endParaRPr lang="en-US"/>
-          </a:p>
-        </p:txBody>
-      </p:sp>
-      <p:sp>
-        <p:nvSpPr>
-          <p:cNvPr id="21" name="Shape 19"/>
-          <p:cNvSpPr/>
-          <p:nvPr/>
-        </p:nvSpPr>
-        <p:spPr>
-          <a:xfrm>
-            <a:off x="548640" y="4087368"/>
-            <a:ext cx="54864" cy="621792"/>
-          </a:xfrm>
-          <a:prstGeom prst="rect">
-            <a:avLst/>
-          </a:prstGeom>
-          <a:solidFill>
-            <a:srgbClr val="8C2B5A"/>
-          </a:solidFill>
-          <a:ln/>
-        </p:spPr>
-        <p:txBody>
-          <a:bodyPr/>
-          <a:lstStyle/>
-          <a:p>
-            <a:endParaRPr lang="en-US"/>
-          </a:p>
-        </p:txBody>
-      </p:sp>
-      <p:sp>
-        <p:nvSpPr>
-          <p:cNvPr id="22" name="Text 20"/>
-          <p:cNvSpPr/>
-          <p:nvPr/>
-        </p:nvSpPr>
-        <p:spPr>
-          <a:xfrm>
-            <a:off x="777240" y="4142232"/>
-            <a:ext cx="1828800" cy="228600"/>
-          </a:xfrm>
-          <a:prstGeom prst="rect">
-            <a:avLst/>
-          </a:prstGeom>
-          <a:noFill/>
-          <a:ln/>
-        </p:spPr>
-        <p:txBody>
-          <a:bodyPr wrap="square" lIns="0" tIns="0" rIns="0" bIns="0" rtlCol="0" anchor="ctr"/>
-          <a:lstStyle/>
-          <a:p>
-            <a:pPr marL="0" indent="0">
-              <a:buNone/>
-            </a:pPr>
-            <a:r>
-              <a:rPr lang="en-US" sz="1200" b="1" dirty="0">
-                <a:solidFill>
-                  <a:srgbClr val="8C2B5A"/>
-                </a:solidFill>
-                <a:latin typeface="Calibri" pitchFamily="34" charset="0"/>
-                <a:ea typeface="Calibri" pitchFamily="34" charset="-122"/>
-                <a:cs typeface="Calibri" pitchFamily="34" charset="-120"/>
-              </a:rPr>
-              <a:t>Open Science</a:t>
-            </a:r>
-            <a:endParaRPr lang="en-US" sz="1200" dirty="0"/>
-          </a:p>
-        </p:txBody>
-      </p:sp>
-      <p:sp>
-        <p:nvSpPr>
-          <p:cNvPr id="23" name="Text 21"/>
-          <p:cNvSpPr/>
-          <p:nvPr/>
-        </p:nvSpPr>
-        <p:spPr>
-          <a:xfrm>
-            <a:off x="2651760" y="4142232"/>
-            <a:ext cx="5760720" cy="475488"/>
-          </a:xfrm>
-          <a:prstGeom prst="rect">
-            <a:avLst/>
-          </a:prstGeom>
-          <a:noFill/>
-          <a:ln/>
-        </p:spPr>
-        <p:txBody>
-          <a:bodyPr wrap="square" lIns="0" tIns="0" rIns="0" bIns="0" rtlCol="0" anchor="ctr"/>
-          <a:lstStyle/>
-          <a:p>
-            <a:pPr marL="0" indent="0">
-              <a:buNone/>
-            </a:pPr>
-            <a:r>
-              <a:rPr lang="en-US" sz="1050" dirty="0">
-                <a:solidFill>
-                  <a:srgbClr val="475569"/>
-                </a:solidFill>
-                <a:latin typeface="Calibri" pitchFamily="34" charset="0"/>
-                <a:ea typeface="Calibri" pitchFamily="34" charset="-122"/>
-                <a:cs typeface="Calibri" pitchFamily="34" charset="-120"/>
-              </a:rPr>
-              <a:t>Release the web as a queryable resource for architects, designers, and researchers. A living document that updates with new findings.</a:t>
-            </a:r>
-            <a:endParaRPr lang="en-US" sz="1050" dirty="0"/>
-          </a:p>
-        </p:txBody>
-      </p:sp>
-    </p:spTree>
-  </p:cSld>
-  <p:clrMapOvr>
-    <a:masterClrMapping/>
-  </p:clrMapOvr>
-</p:sld>
-</file>
-
-<file path=ppt/slides/slide23.xml><?xml version="1.0" encoding="utf-8"?>
-<p:sld xmlns:a="http://schemas.openxmlformats.org/drawingml/2006/main" xmlns:r="http://schemas.openxmlformats.org/officeDocument/2006/relationships" xmlns:p="http://schemas.openxmlformats.org/presentationml/2006/main">
-  <p:cSld name="Slide 23">
-    <p:bg>
-      <p:bgPr>
-        <a:solidFill>
-          <a:srgbClr val="FFFFFF"/>
-        </a:solidFill>
-        <a:effectLst/>
-      </p:bgPr>
-    </p:bg>
-    <p:spTree>
-      <p:nvGrpSpPr>
-        <p:cNvPr id="1" name=""/>
-        <p:cNvGrpSpPr/>
-        <p:nvPr/>
-      </p:nvGrpSpPr>
-      <p:grpSpPr>
-        <a:xfrm>
-          <a:off x="0" y="0"/>
-          <a:ext cx="0" cy="0"/>
-          <a:chOff x="0" y="0"/>
-          <a:chExt cx="0" cy="0"/>
-        </a:xfrm>
-      </p:grpSpPr>
-      <p:sp>
-        <p:nvSpPr>
-          <p:cNvPr id="2" name="Text 0"/>
-          <p:cNvSpPr/>
-          <p:nvPr/>
-        </p:nvSpPr>
-        <p:spPr>
-          <a:xfrm>
-            <a:off x="548640" y="228600"/>
-            <a:ext cx="3657600" cy="182880"/>
-          </a:xfrm>
-          <a:prstGeom prst="rect">
-            <a:avLst/>
-          </a:prstGeom>
-          <a:noFill/>
-          <a:ln/>
-        </p:spPr>
-        <p:txBody>
-          <a:bodyPr wrap="square" lIns="0" tIns="0" rIns="0" bIns="0" rtlCol="0" anchor="ctr"/>
-          <a:lstStyle/>
-          <a:p>
-            <a:pPr marL="0" indent="0">
-              <a:buNone/>
-            </a:pPr>
-            <a:r>
-              <a:rPr lang="en-US" sz="900" b="1" kern="0" spc="300" dirty="0">
-                <a:solidFill>
-                  <a:srgbClr val="2B5A8C"/>
-                </a:solidFill>
-                <a:latin typeface="Calibri" pitchFamily="34" charset="0"/>
-                <a:ea typeface="Calibri" pitchFamily="34" charset="-122"/>
-                <a:cs typeface="Calibri" pitchFamily="34" charset="-120"/>
-              </a:rPr>
-              <a:t>FOR THIS LAB</a:t>
-            </a:r>
-            <a:endParaRPr lang="en-US" sz="900" dirty="0"/>
-          </a:p>
-        </p:txBody>
-      </p:sp>
-      <p:sp>
-        <p:nvSpPr>
-          <p:cNvPr id="3" name="Text 1"/>
-          <p:cNvSpPr/>
-          <p:nvPr/>
-        </p:nvSpPr>
-        <p:spPr>
-          <a:xfrm>
-            <a:off x="548640" y="438912"/>
-            <a:ext cx="8046720" cy="640080"/>
-          </a:xfrm>
-          <a:prstGeom prst="rect">
-            <a:avLst/>
-          </a:prstGeom>
-          <a:noFill/>
-          <a:ln/>
-        </p:spPr>
-        <p:txBody>
-          <a:bodyPr wrap="square" lIns="0" tIns="0" rIns="0" bIns="0" rtlCol="0" anchor="ctr"/>
-          <a:lstStyle/>
-          <a:p>
-            <a:pPr marL="0" indent="0">
-              <a:buNone/>
-            </a:pPr>
-            <a:r>
-              <a:rPr lang="en-US" sz="2600" b="1" dirty="0">
-                <a:solidFill>
-                  <a:srgbClr val="1E293B"/>
-                </a:solidFill>
-                <a:latin typeface="Georgia" pitchFamily="34" charset="0"/>
-                <a:ea typeface="Georgia" pitchFamily="34" charset="-122"/>
-                <a:cs typeface="Georgia" pitchFamily="34" charset="-120"/>
-              </a:rPr>
-              <a:t>Connections to Work in</a:t>
-            </a:r>
-            <a:endParaRPr lang="en-US" sz="2600" dirty="0"/>
-          </a:p>
-          <a:p>
-            <a:pPr marL="0" indent="0">
-              <a:buNone/>
-            </a:pPr>
-            <a:r>
-              <a:rPr lang="en-US" sz="2600" b="1" dirty="0">
-                <a:solidFill>
-                  <a:srgbClr val="1E293B"/>
-                </a:solidFill>
-                <a:latin typeface="Georgia" pitchFamily="34" charset="0"/>
-                <a:ea typeface="Georgia" pitchFamily="34" charset="-122"/>
-                <a:cs typeface="Georgia" pitchFamily="34" charset="-120"/>
-              </a:rPr>
-              <a:t>Andy's Lab</a:t>
-            </a:r>
-            <a:endParaRPr lang="en-US" sz="2600" dirty="0"/>
-          </a:p>
-        </p:txBody>
-      </p:sp>
-      <p:sp>
-        <p:nvSpPr>
-          <p:cNvPr id="4" name="Shape 2"/>
-          <p:cNvSpPr/>
-          <p:nvPr/>
-        </p:nvSpPr>
-        <p:spPr>
-          <a:xfrm>
-            <a:off x="548640" y="1234440"/>
-            <a:ext cx="8046720" cy="777240"/>
-          </a:xfrm>
-          <a:prstGeom prst="rect">
-            <a:avLst/>
-          </a:prstGeom>
-          <a:solidFill>
-            <a:srgbClr val="F8FAFC"/>
-          </a:solidFill>
-          <a:ln w="6350">
-            <a:solidFill>
-              <a:srgbClr val="E2E8F0"/>
-            </a:solidFill>
-            <a:prstDash val="solid"/>
-          </a:ln>
-          <a:effectLst>
-            <a:outerShdw blurRad="50800" dist="12700" dir="8100000" algn="bl" rotWithShape="0">
-              <a:srgbClr val="000000">
-                <a:alpha val="6000"/>
-              </a:srgbClr>
-            </a:outerShdw>
-          </a:effectLst>
-        </p:spPr>
-        <p:txBody>
-          <a:bodyPr/>
-          <a:lstStyle/>
-          <a:p>
-            <a:endParaRPr lang="en-US"/>
-          </a:p>
-        </p:txBody>
-      </p:sp>
-      <p:sp>
-        <p:nvSpPr>
-          <p:cNvPr id="5" name="Shape 3"/>
-          <p:cNvSpPr/>
-          <p:nvPr/>
-        </p:nvSpPr>
-        <p:spPr>
-          <a:xfrm>
-            <a:off x="548640" y="1234440"/>
-            <a:ext cx="54864" cy="777240"/>
-          </a:xfrm>
-          <a:prstGeom prst="rect">
-            <a:avLst/>
-          </a:prstGeom>
-          <a:solidFill>
-            <a:srgbClr val="2B5A8C"/>
-          </a:solidFill>
-          <a:ln/>
-        </p:spPr>
-        <p:txBody>
-          <a:bodyPr/>
-          <a:lstStyle/>
-          <a:p>
-            <a:endParaRPr lang="en-US"/>
-          </a:p>
-        </p:txBody>
-      </p:sp>
-      <p:sp>
-        <p:nvSpPr>
-          <p:cNvPr id="6" name="Text 4"/>
-          <p:cNvSpPr/>
-          <p:nvPr/>
-        </p:nvSpPr>
-        <p:spPr>
-          <a:xfrm>
-            <a:off x="777240" y="1289304"/>
-            <a:ext cx="7589520" cy="201168"/>
-          </a:xfrm>
-          <a:prstGeom prst="rect">
-            <a:avLst/>
-          </a:prstGeom>
-          <a:noFill/>
-          <a:ln/>
-        </p:spPr>
-        <p:txBody>
-          <a:bodyPr wrap="square" lIns="0" tIns="0" rIns="0" bIns="0" rtlCol="0" anchor="ctr"/>
-          <a:lstStyle/>
-          <a:p>
-            <a:pPr marL="0" indent="0">
-              <a:buNone/>
-            </a:pPr>
-            <a:r>
-              <a:rPr lang="en-US" sz="1150" b="1" dirty="0">
-                <a:solidFill>
-                  <a:srgbClr val="2B5A8C"/>
-                </a:solidFill>
-                <a:latin typeface="Calibri" pitchFamily="34" charset="0"/>
-                <a:ea typeface="Calibri" pitchFamily="34" charset="-122"/>
-                <a:cs typeface="Calibri" pitchFamily="34" charset="-120"/>
-              </a:rPr>
-              <a:t>Extended mind thesis (Clark &amp; Chalmers, 1998)</a:t>
-            </a:r>
-            <a:endParaRPr lang="en-US" sz="1150" dirty="0"/>
-          </a:p>
-        </p:txBody>
-      </p:sp>
-      <p:sp>
-        <p:nvSpPr>
-          <p:cNvPr id="7" name="Text 5"/>
-          <p:cNvSpPr/>
-          <p:nvPr/>
-        </p:nvSpPr>
-        <p:spPr>
-          <a:xfrm>
-            <a:off x="777240" y="1527048"/>
-            <a:ext cx="7589520" cy="411480"/>
-          </a:xfrm>
-          <a:prstGeom prst="rect">
-            <a:avLst/>
-          </a:prstGeom>
-          <a:noFill/>
-          <a:ln/>
-        </p:spPr>
-        <p:txBody>
-          <a:bodyPr wrap="square" lIns="0" tIns="0" rIns="0" bIns="0" rtlCol="0" anchor="ctr"/>
-          <a:lstStyle/>
-          <a:p>
-            <a:pPr marL="0" indent="0">
-              <a:buNone/>
-            </a:pPr>
-            <a:r>
-              <a:rPr lang="en-US" sz="1050" dirty="0">
-                <a:solidFill>
-                  <a:srgbClr val="475569"/>
-                </a:solidFill>
-                <a:latin typeface="Calibri" pitchFamily="34" charset="0"/>
-                <a:ea typeface="Calibri" pitchFamily="34" charset="-122"/>
-                <a:cs typeface="Calibri" pitchFamily="34" charset="-120"/>
-              </a:rPr>
-              <a:t>If the environment is part of the cognitive system, then architecture is cognitive infrastructure. Article Eater operationalizes this claim — here are the specific mechanisms.</a:t>
-            </a:r>
-            <a:endParaRPr lang="en-US" sz="1050" dirty="0"/>
-          </a:p>
-        </p:txBody>
-      </p:sp>
-      <p:sp>
-        <p:nvSpPr>
-          <p:cNvPr id="8" name="Shape 6"/>
-          <p:cNvSpPr/>
-          <p:nvPr/>
-        </p:nvSpPr>
-        <p:spPr>
-          <a:xfrm>
-            <a:off x="548640" y="2103120"/>
-            <a:ext cx="8046720" cy="777240"/>
-          </a:xfrm>
-          <a:prstGeom prst="rect">
-            <a:avLst/>
-          </a:prstGeom>
-          <a:solidFill>
-            <a:srgbClr val="F8FAFC"/>
-          </a:solidFill>
-          <a:ln w="6350">
-            <a:solidFill>
-              <a:srgbClr val="E2E8F0"/>
-            </a:solidFill>
-            <a:prstDash val="solid"/>
-          </a:ln>
-          <a:effectLst>
-            <a:outerShdw blurRad="50800" dist="12700" dir="8100000" algn="bl" rotWithShape="0">
-              <a:srgbClr val="000000">
-                <a:alpha val="6000"/>
-              </a:srgbClr>
-            </a:outerShdw>
-          </a:effectLst>
-        </p:spPr>
-        <p:txBody>
-          <a:bodyPr/>
-          <a:lstStyle/>
-          <a:p>
-            <a:endParaRPr lang="en-US"/>
-          </a:p>
-        </p:txBody>
-      </p:sp>
-      <p:sp>
-        <p:nvSpPr>
-          <p:cNvPr id="9" name="Shape 7"/>
-          <p:cNvSpPr/>
-          <p:nvPr/>
-        </p:nvSpPr>
-        <p:spPr>
-          <a:xfrm>
-            <a:off x="548640" y="2103120"/>
-            <a:ext cx="54864" cy="777240"/>
-          </a:xfrm>
-          <a:prstGeom prst="rect">
-            <a:avLst/>
-          </a:prstGeom>
-          <a:solidFill>
-            <a:srgbClr val="6B3B8C"/>
-          </a:solidFill>
-          <a:ln/>
-        </p:spPr>
-        <p:txBody>
-          <a:bodyPr/>
-          <a:lstStyle/>
-          <a:p>
-            <a:endParaRPr lang="en-US"/>
-          </a:p>
-        </p:txBody>
-      </p:sp>
-      <p:sp>
-        <p:nvSpPr>
-          <p:cNvPr id="10" name="Text 8"/>
-          <p:cNvSpPr/>
-          <p:nvPr/>
-        </p:nvSpPr>
-        <p:spPr>
-          <a:xfrm>
-            <a:off x="777240" y="2157984"/>
-            <a:ext cx="7589520" cy="201168"/>
-          </a:xfrm>
-          <a:prstGeom prst="rect">
-            <a:avLst/>
-          </a:prstGeom>
-          <a:noFill/>
-          <a:ln/>
-        </p:spPr>
-        <p:txBody>
-          <a:bodyPr wrap="square" lIns="0" tIns="0" rIns="0" bIns="0" rtlCol="0" anchor="ctr"/>
-          <a:lstStyle/>
-          <a:p>
-            <a:pPr marL="0" indent="0">
-              <a:buNone/>
-            </a:pPr>
-            <a:r>
-              <a:rPr lang="en-US" sz="1150" b="1" dirty="0">
-                <a:solidFill>
-                  <a:srgbClr val="6B3B8C"/>
-                </a:solidFill>
-                <a:latin typeface="Calibri" pitchFamily="34" charset="0"/>
-                <a:ea typeface="Calibri" pitchFamily="34" charset="-122"/>
-                <a:cs typeface="Calibri" pitchFamily="34" charset="-120"/>
-              </a:rPr>
-              <a:t>Radical Predictive Processing (Clark, 2013; 2016)</a:t>
-            </a:r>
-            <a:endParaRPr lang="en-US" sz="1150" dirty="0"/>
-          </a:p>
-        </p:txBody>
-      </p:sp>
-      <p:sp>
-        <p:nvSpPr>
-          <p:cNvPr id="11" name="Text 9"/>
-          <p:cNvSpPr/>
-          <p:nvPr/>
-        </p:nvSpPr>
-        <p:spPr>
-          <a:xfrm>
-            <a:off x="777240" y="2395728"/>
-            <a:ext cx="7589520" cy="411480"/>
-          </a:xfrm>
-          <a:prstGeom prst="rect">
-            <a:avLst/>
-          </a:prstGeom>
-          <a:noFill/>
-          <a:ln/>
-        </p:spPr>
-        <p:txBody>
-          <a:bodyPr wrap="square" lIns="0" tIns="0" rIns="0" bIns="0" rtlCol="0" anchor="ctr"/>
-          <a:lstStyle/>
-          <a:p>
-            <a:pPr marL="0" indent="0">
-              <a:buNone/>
-            </a:pPr>
-            <a:r>
-              <a:rPr lang="en-US" sz="1050" dirty="0">
-                <a:solidFill>
-                  <a:srgbClr val="475569"/>
-                </a:solidFill>
-                <a:latin typeface="Calibri" pitchFamily="34" charset="0"/>
-                <a:ea typeface="Calibri" pitchFamily="34" charset="-122"/>
-                <a:cs typeface="Calibri" pitchFamily="34" charset="-120"/>
-              </a:rPr>
-              <a:t>PP provides the unifying framework. But we push it: PP explains the implicit regime well. What about explicit cognition? (See third talk.)</a:t>
-            </a:r>
-            <a:endParaRPr lang="en-US" sz="1050" dirty="0"/>
-          </a:p>
-        </p:txBody>
-      </p:sp>
-      <p:sp>
-        <p:nvSpPr>
-          <p:cNvPr id="12" name="Shape 10"/>
-          <p:cNvSpPr/>
-          <p:nvPr/>
-        </p:nvSpPr>
-        <p:spPr>
-          <a:xfrm>
-            <a:off x="548640" y="2971800"/>
-            <a:ext cx="8046720" cy="777240"/>
-          </a:xfrm>
-          <a:prstGeom prst="rect">
-            <a:avLst/>
-          </a:prstGeom>
-          <a:solidFill>
-            <a:srgbClr val="F8FAFC"/>
-          </a:solidFill>
-          <a:ln w="6350">
-            <a:solidFill>
-              <a:srgbClr val="E2E8F0"/>
-            </a:solidFill>
-            <a:prstDash val="solid"/>
-          </a:ln>
-          <a:effectLst>
-            <a:outerShdw blurRad="50800" dist="12700" dir="8100000" algn="bl" rotWithShape="0">
-              <a:srgbClr val="000000">
-                <a:alpha val="6000"/>
-              </a:srgbClr>
-            </a:outerShdw>
-          </a:effectLst>
-        </p:spPr>
-        <p:txBody>
-          <a:bodyPr/>
-          <a:lstStyle/>
-          <a:p>
-            <a:endParaRPr lang="en-US"/>
-          </a:p>
-        </p:txBody>
-      </p:sp>
-      <p:sp>
-        <p:nvSpPr>
-          <p:cNvPr id="13" name="Shape 11"/>
-          <p:cNvSpPr/>
-          <p:nvPr/>
-        </p:nvSpPr>
-        <p:spPr>
-          <a:xfrm>
-            <a:off x="548640" y="2971800"/>
-            <a:ext cx="54864" cy="777240"/>
-          </a:xfrm>
-          <a:prstGeom prst="rect">
-            <a:avLst/>
-          </a:prstGeom>
-          <a:solidFill>
-            <a:srgbClr val="3B7A4C"/>
-          </a:solidFill>
-          <a:ln/>
-        </p:spPr>
-        <p:txBody>
-          <a:bodyPr/>
-          <a:lstStyle/>
-          <a:p>
-            <a:endParaRPr lang="en-US"/>
-          </a:p>
-        </p:txBody>
-      </p:sp>
-      <p:sp>
-        <p:nvSpPr>
-          <p:cNvPr id="14" name="Text 12"/>
-          <p:cNvSpPr/>
-          <p:nvPr/>
-        </p:nvSpPr>
-        <p:spPr>
-          <a:xfrm>
-            <a:off x="777240" y="3026664"/>
-            <a:ext cx="7589520" cy="201168"/>
-          </a:xfrm>
-          <a:prstGeom prst="rect">
-            <a:avLst/>
-          </a:prstGeom>
-          <a:noFill/>
-          <a:ln/>
-        </p:spPr>
-        <p:txBody>
-          <a:bodyPr wrap="square" lIns="0" tIns="0" rIns="0" bIns="0" rtlCol="0" anchor="ctr"/>
-          <a:lstStyle/>
-          <a:p>
-            <a:pPr marL="0" indent="0">
-              <a:buNone/>
-            </a:pPr>
-            <a:r>
-              <a:rPr lang="en-US" sz="1150" b="1" dirty="0">
-                <a:solidFill>
-                  <a:srgbClr val="3B7A4C"/>
-                </a:solidFill>
-                <a:latin typeface="Calibri" pitchFamily="34" charset="0"/>
-                <a:ea typeface="Calibri" pitchFamily="34" charset="-122"/>
-                <a:cs typeface="Calibri" pitchFamily="34" charset="-120"/>
-              </a:rPr>
-              <a:t>Happily Entangled (Miller &amp; Clark, 2018)</a:t>
-            </a:r>
-            <a:endParaRPr lang="en-US" sz="1150" dirty="0"/>
-          </a:p>
-        </p:txBody>
-      </p:sp>
-      <p:sp>
-        <p:nvSpPr>
-          <p:cNvPr id="15" name="Text 13"/>
-          <p:cNvSpPr/>
-          <p:nvPr/>
-        </p:nvSpPr>
-        <p:spPr>
-          <a:xfrm>
-            <a:off x="777240" y="3264408"/>
-            <a:ext cx="7589520" cy="411480"/>
-          </a:xfrm>
-          <a:prstGeom prst="rect">
-            <a:avLst/>
-          </a:prstGeom>
-          <a:noFill/>
-          <a:ln/>
-        </p:spPr>
-        <p:txBody>
-          <a:bodyPr wrap="square" lIns="0" tIns="0" rIns="0" bIns="0" rtlCol="0" anchor="ctr"/>
-          <a:lstStyle/>
-          <a:p>
-            <a:pPr marL="0" indent="0">
-              <a:buNone/>
-            </a:pPr>
-            <a:r>
-              <a:rPr lang="en-US" sz="1050" dirty="0">
-                <a:solidFill>
-                  <a:srgbClr val="475569"/>
-                </a:solidFill>
-                <a:latin typeface="Calibri" pitchFamily="34" charset="0"/>
-                <a:ea typeface="Calibri" pitchFamily="34" charset="-122"/>
-                <a:cs typeface="Calibri" pitchFamily="34" charset="-120"/>
-              </a:rPr>
-              <a:t>Emotion as constitutively entangled with prediction — not a separate module. Our hedonic tagging templates formalize this for environmental design.</a:t>
-            </a:r>
-            <a:endParaRPr lang="en-US" sz="1050" dirty="0"/>
-          </a:p>
-        </p:txBody>
-      </p:sp>
-      <p:sp>
-        <p:nvSpPr>
-          <p:cNvPr id="16" name="Shape 14"/>
-          <p:cNvSpPr/>
-          <p:nvPr/>
-        </p:nvSpPr>
-        <p:spPr>
-          <a:xfrm>
-            <a:off x="548640" y="3840480"/>
-            <a:ext cx="8046720" cy="777240"/>
-          </a:xfrm>
-          <a:prstGeom prst="rect">
-            <a:avLst/>
-          </a:prstGeom>
-          <a:solidFill>
-            <a:srgbClr val="F8FAFC"/>
-          </a:solidFill>
-          <a:ln w="6350">
-            <a:solidFill>
-              <a:srgbClr val="E2E8F0"/>
-            </a:solidFill>
-            <a:prstDash val="solid"/>
-          </a:ln>
-          <a:effectLst>
-            <a:outerShdw blurRad="50800" dist="12700" dir="8100000" algn="bl" rotWithShape="0">
-              <a:srgbClr val="000000">
-                <a:alpha val="6000"/>
-              </a:srgbClr>
-            </a:outerShdw>
-          </a:effectLst>
-        </p:spPr>
-        <p:txBody>
-          <a:bodyPr/>
-          <a:lstStyle/>
-          <a:p>
-            <a:endParaRPr lang="en-US"/>
-          </a:p>
-        </p:txBody>
-      </p:sp>
-      <p:sp>
-        <p:nvSpPr>
-          <p:cNvPr id="17" name="Shape 15"/>
-          <p:cNvSpPr/>
-          <p:nvPr/>
-        </p:nvSpPr>
-        <p:spPr>
-          <a:xfrm>
-            <a:off x="548640" y="3840480"/>
-            <a:ext cx="54864" cy="777240"/>
-          </a:xfrm>
-          <a:prstGeom prst="rect">
-            <a:avLst/>
-          </a:prstGeom>
-          <a:solidFill>
-            <a:srgbClr val="8C4B2B"/>
-          </a:solidFill>
-          <a:ln/>
-        </p:spPr>
-        <p:txBody>
-          <a:bodyPr/>
-          <a:lstStyle/>
-          <a:p>
-            <a:endParaRPr lang="en-US"/>
-          </a:p>
-        </p:txBody>
-      </p:sp>
-      <p:sp>
-        <p:nvSpPr>
-          <p:cNvPr id="18" name="Text 16"/>
-          <p:cNvSpPr/>
-          <p:nvPr/>
-        </p:nvSpPr>
-        <p:spPr>
-          <a:xfrm>
-            <a:off x="777240" y="3895344"/>
-            <a:ext cx="7589520" cy="201168"/>
-          </a:xfrm>
-          <a:prstGeom prst="rect">
-            <a:avLst/>
-          </a:prstGeom>
-          <a:noFill/>
-          <a:ln/>
-        </p:spPr>
-        <p:txBody>
-          <a:bodyPr wrap="square" lIns="0" tIns="0" rIns="0" bIns="0" rtlCol="0" anchor="ctr"/>
-          <a:lstStyle/>
-          <a:p>
-            <a:pPr marL="0" indent="0">
-              <a:buNone/>
-            </a:pPr>
-            <a:r>
-              <a:rPr lang="en-US" sz="1150" b="1" dirty="0">
-                <a:solidFill>
-                  <a:srgbClr val="8C4B2B"/>
-                </a:solidFill>
-                <a:latin typeface="Calibri" pitchFamily="34" charset="0"/>
-                <a:ea typeface="Calibri" pitchFamily="34" charset="-122"/>
-                <a:cs typeface="Calibri" pitchFamily="34" charset="-120"/>
-              </a:rPr>
-              <a:t>Cultural niche construction</a:t>
-            </a:r>
-            <a:endParaRPr lang="en-US" sz="1150" dirty="0"/>
-          </a:p>
-        </p:txBody>
-      </p:sp>
-      <p:sp>
-        <p:nvSpPr>
-          <p:cNvPr id="19" name="Text 17"/>
-          <p:cNvSpPr/>
-          <p:nvPr/>
-        </p:nvSpPr>
-        <p:spPr>
-          <a:xfrm>
-            <a:off x="777240" y="4133088"/>
-            <a:ext cx="7589520" cy="411480"/>
-          </a:xfrm>
-          <a:prstGeom prst="rect">
-            <a:avLst/>
-          </a:prstGeom>
-          <a:noFill/>
-          <a:ln/>
-        </p:spPr>
-        <p:txBody>
-          <a:bodyPr wrap="square" lIns="0" tIns="0" rIns="0" bIns="0" rtlCol="0" anchor="ctr"/>
-          <a:lstStyle/>
-          <a:p>
-            <a:pPr marL="0" indent="0">
-              <a:buNone/>
-            </a:pPr>
-            <a:r>
-              <a:rPr lang="en-US" sz="1050" dirty="0">
-                <a:solidFill>
-                  <a:srgbClr val="475569"/>
-                </a:solidFill>
-                <a:latin typeface="Calibri" pitchFamily="34" charset="0"/>
-                <a:ea typeface="Calibri" pitchFamily="34" charset="-122"/>
-                <a:cs typeface="Calibri" pitchFamily="34" charset="-120"/>
-              </a:rPr>
-              <a:t>The India fieldwork directly tests how cultural niches shape the precision landscape. Varanasi vs. Stockholm: same mechanisms, different parameters.</a:t>
-            </a:r>
-            <a:endParaRPr lang="en-US" sz="1050" dirty="0"/>
-          </a:p>
-        </p:txBody>
-      </p:sp>
-    </p:spTree>
-  </p:cSld>
-  <p:clrMapOvr>
-    <a:masterClrMapping/>
-  </p:clrMapOvr>
-</p:sld>
-</file>
-
-<file path=ppt/slides/slide24.xml><?xml version="1.0" encoding="utf-8"?>
-<p:sld xmlns:a="http://schemas.openxmlformats.org/drawingml/2006/main" xmlns:r="http://schemas.openxmlformats.org/officeDocument/2006/relationships" xmlns:p="http://schemas.openxmlformats.org/presentationml/2006/main">
-  <p:cSld name="Slide 24">
-    <p:bg>
-      <p:bgPr>
-        <a:solidFill>
-          <a:srgbClr val="1A1F36"/>
-        </a:solidFill>
-        <a:effectLst/>
-      </p:bgPr>
-    </p:bg>
-    <p:spTree>
-      <p:nvGrpSpPr>
-        <p:cNvPr id="1" name=""/>
-        <p:cNvGrpSpPr/>
-        <p:nvPr/>
-      </p:nvGrpSpPr>
-      <p:grpSpPr>
-        <a:xfrm>
-          <a:off x="0" y="0"/>
-          <a:ext cx="0" cy="0"/>
-          <a:chOff x="0" y="0"/>
-          <a:chExt cx="0" cy="0"/>
-        </a:xfrm>
-      </p:grpSpPr>
-      <p:sp>
-        <p:nvSpPr>
-          <p:cNvPr id="2" name="Text 0"/>
-          <p:cNvSpPr/>
-          <p:nvPr/>
-        </p:nvSpPr>
-        <p:spPr>
-          <a:xfrm>
-            <a:off x="731520" y="914400"/>
-            <a:ext cx="7680960" cy="731520"/>
-          </a:xfrm>
-          <a:prstGeom prst="rect">
-            <a:avLst/>
-          </a:prstGeom>
-          <a:noFill/>
-          <a:ln/>
-        </p:spPr>
-        <p:txBody>
-          <a:bodyPr wrap="square" lIns="0" tIns="0" rIns="0" bIns="0" rtlCol="0" anchor="ctr"/>
-          <a:lstStyle/>
-          <a:p>
-            <a:pPr marL="0" indent="0">
-              <a:buNone/>
-            </a:pPr>
-            <a:r>
-              <a:rPr lang="en-US" sz="4000" b="1" dirty="0">
-                <a:solidFill>
-                  <a:srgbClr val="FFFFFF"/>
-                </a:solidFill>
-                <a:latin typeface="Georgia" pitchFamily="34" charset="0"/>
-                <a:ea typeface="Georgia" pitchFamily="34" charset="-122"/>
-                <a:cs typeface="Georgia" pitchFamily="34" charset="-120"/>
-              </a:rPr>
-              <a:t>Article Eater</a:t>
-            </a:r>
-            <a:endParaRPr lang="en-US" sz="4000" dirty="0"/>
-          </a:p>
-        </p:txBody>
-      </p:sp>
-      <p:sp>
-        <p:nvSpPr>
-          <p:cNvPr id="3" name="Text 1"/>
-          <p:cNvSpPr/>
-          <p:nvPr/>
-        </p:nvSpPr>
-        <p:spPr>
-          <a:xfrm>
-            <a:off x="731520" y="1828800"/>
-            <a:ext cx="7680960" cy="365760"/>
-          </a:xfrm>
-          <a:prstGeom prst="rect">
-            <a:avLst/>
-          </a:prstGeom>
-          <a:noFill/>
-          <a:ln/>
-        </p:spPr>
-        <p:txBody>
-          <a:bodyPr wrap="square" lIns="0" tIns="0" rIns="0" bIns="0" rtlCol="0" anchor="ctr"/>
-          <a:lstStyle/>
-          <a:p>
-            <a:pPr marL="0" indent="0">
-              <a:buNone/>
-            </a:pPr>
-            <a:r>
-              <a:rPr lang="en-US" sz="1500" dirty="0">
-                <a:solidFill>
-                  <a:srgbClr val="CADCFC"/>
-                </a:solidFill>
-                <a:latin typeface="Calibri" pitchFamily="34" charset="0"/>
-                <a:ea typeface="Calibri" pitchFamily="34" charset="-122"/>
-                <a:cs typeface="Calibri" pitchFamily="34" charset="-120"/>
-              </a:rPr>
-              <a:t>Surface findings → mechanistic templates → testable predictions</a:t>
-            </a:r>
-            <a:endParaRPr lang="en-US" sz="1500" dirty="0"/>
-          </a:p>
-        </p:txBody>
-      </p:sp>
-      <p:sp>
-        <p:nvSpPr>
-          <p:cNvPr id="4" name="Text 2"/>
-          <p:cNvSpPr/>
-          <p:nvPr/>
-        </p:nvSpPr>
-        <p:spPr>
-          <a:xfrm>
-            <a:off x="731520" y="2240280"/>
-            <a:ext cx="7680960" cy="365760"/>
-          </a:xfrm>
-          <a:prstGeom prst="rect">
-            <a:avLst/>
-          </a:prstGeom>
-          <a:noFill/>
-          <a:ln/>
-        </p:spPr>
-        <p:txBody>
-          <a:bodyPr wrap="square" lIns="0" tIns="0" rIns="0" bIns="0" rtlCol="0" anchor="ctr"/>
-          <a:lstStyle/>
-          <a:p>
-            <a:pPr marL="0" indent="0">
-              <a:buNone/>
-            </a:pPr>
-            <a:r>
-              <a:rPr lang="en-US" sz="1500" dirty="0">
-                <a:solidFill>
-                  <a:srgbClr val="CADCFC"/>
-                </a:solidFill>
-                <a:latin typeface="Calibri" pitchFamily="34" charset="0"/>
-                <a:ea typeface="Calibri" pitchFamily="34" charset="-122"/>
-                <a:cs typeface="Calibri" pitchFamily="34" charset="-120"/>
-              </a:rPr>
-              <a:t>Argumentation structure captures what experts know and dispute</a:t>
-            </a:r>
-            <a:endParaRPr lang="en-US" sz="1500" dirty="0"/>
-          </a:p>
-        </p:txBody>
-      </p:sp>
-      <p:sp>
-        <p:nvSpPr>
-          <p:cNvPr id="5" name="Text 3"/>
-          <p:cNvSpPr/>
-          <p:nvPr/>
-        </p:nvSpPr>
-        <p:spPr>
-          <a:xfrm>
-            <a:off x="731520" y="2651760"/>
-            <a:ext cx="7680960" cy="365760"/>
-          </a:xfrm>
-          <a:prstGeom prst="rect">
-            <a:avLst/>
-          </a:prstGeom>
-          <a:noFill/>
-          <a:ln/>
-        </p:spPr>
-        <p:txBody>
-          <a:bodyPr wrap="square" lIns="0" tIns="0" rIns="0" bIns="0" rtlCol="0" anchor="ctr"/>
-          <a:lstStyle/>
-          <a:p>
-            <a:pPr marL="0" indent="0">
-              <a:buNone/>
-            </a:pPr>
-            <a:r>
-              <a:rPr lang="en-US" sz="1500" dirty="0">
-                <a:solidFill>
-                  <a:srgbClr val="CADCFC"/>
-                </a:solidFill>
-                <a:latin typeface="Calibri" pitchFamily="34" charset="0"/>
-                <a:ea typeface="Calibri" pitchFamily="34" charset="-122"/>
-                <a:cs typeface="Calibri" pitchFamily="34" charset="-120"/>
-              </a:rPr>
-              <a:t>Neuroscience + environmental psychology = new architectural science</a:t>
-            </a:r>
-            <a:endParaRPr lang="en-US" sz="1500" dirty="0"/>
-          </a:p>
-        </p:txBody>
-      </p:sp>
-      <p:sp>
-        <p:nvSpPr>
-          <p:cNvPr id="6" name="Shape 4"/>
-          <p:cNvSpPr/>
-          <p:nvPr/>
-        </p:nvSpPr>
-        <p:spPr>
-          <a:xfrm>
-            <a:off x="731520" y="3383280"/>
-            <a:ext cx="2286000" cy="27432"/>
-          </a:xfrm>
-          <a:prstGeom prst="rect">
-            <a:avLst/>
-          </a:prstGeom>
-          <a:solidFill>
-            <a:srgbClr val="CADCFC"/>
-          </a:solidFill>
-          <a:ln/>
-        </p:spPr>
-        <p:txBody>
-          <a:bodyPr/>
-          <a:lstStyle/>
-          <a:p>
-            <a:endParaRPr lang="en-US"/>
-          </a:p>
-        </p:txBody>
-      </p:sp>
-      <p:sp>
-        <p:nvSpPr>
-          <p:cNvPr id="7" name="Text 5"/>
-          <p:cNvSpPr/>
-          <p:nvPr/>
-        </p:nvSpPr>
-        <p:spPr>
-          <a:xfrm>
-            <a:off x="731520" y="3611880"/>
-            <a:ext cx="4572000" cy="365760"/>
-          </a:xfrm>
-          <a:prstGeom prst="rect">
-            <a:avLst/>
-          </a:prstGeom>
-          <a:noFill/>
-          <a:ln/>
-        </p:spPr>
-        <p:txBody>
-          <a:bodyPr wrap="square" lIns="0" tIns="0" rIns="0" bIns="0" rtlCol="0" anchor="ctr"/>
-          <a:lstStyle/>
-          <a:p>
-            <a:pPr marL="0" indent="0">
-              <a:buNone/>
-            </a:pPr>
-            <a:r>
-              <a:rPr lang="en-US" sz="1600" i="1" dirty="0">
-                <a:solidFill>
-                  <a:srgbClr val="8899BB"/>
-                </a:solidFill>
-                <a:latin typeface="Georgia" pitchFamily="34" charset="0"/>
-                <a:ea typeface="Georgia" pitchFamily="34" charset="-122"/>
-                <a:cs typeface="Georgia" pitchFamily="34" charset="-120"/>
-              </a:rPr>
-              <a:t>Next: The Goldilocks Principle →</a:t>
-            </a:r>
-            <a:endParaRPr lang="en-US" sz="1600" dirty="0"/>
-          </a:p>
-        </p:txBody>
-      </p:sp>
-      <p:sp>
-        <p:nvSpPr>
-          <p:cNvPr id="8" name="Text 6"/>
-          <p:cNvSpPr/>
-          <p:nvPr/>
-        </p:nvSpPr>
-        <p:spPr>
-          <a:xfrm>
-            <a:off x="731520" y="4114800"/>
-            <a:ext cx="4572000" cy="320040"/>
-          </a:xfrm>
-          <a:prstGeom prst="rect">
-            <a:avLst/>
-          </a:prstGeom>
-          <a:noFill/>
-          <a:ln/>
-        </p:spPr>
-        <p:txBody>
-          <a:bodyPr wrap="square" lIns="0" tIns="0" rIns="0" bIns="0" rtlCol="0" anchor="ctr"/>
-          <a:lstStyle/>
-          <a:p>
-            <a:pPr marL="0" indent="0">
-              <a:buNone/>
-            </a:pPr>
-            <a:r>
-              <a:rPr lang="en-US" sz="1300" dirty="0">
-                <a:solidFill>
-                  <a:srgbClr val="667799"/>
-                </a:solidFill>
-                <a:latin typeface="Calibri" pitchFamily="34" charset="0"/>
-                <a:ea typeface="Calibri" pitchFamily="34" charset="-122"/>
-                <a:cs typeface="Calibri" pitchFamily="34" charset="-120"/>
-              </a:rPr>
-              <a:t>david@cogsci.ucsd.edu</a:t>
-            </a:r>
-            <a:endParaRPr lang="en-US" sz="1300" dirty="0"/>
-          </a:p>
-        </p:txBody>
-      </p:sp>
-    </p:spTree>
-  </p:cSld>
-  <p:clrMapOvr>
-    <a:masterClrMapping/>
-  </p:clrMapOvr>
-</p:sld>
-</file>
-
-<file path=ppt/slides/slide3.xml><?xml version="1.0" encoding="utf-8"?>
+<file path=ppt/slides/slide4.xml><?xml version="1.0" encoding="utf-8"?>
 <p:sld xmlns:a="http://schemas.openxmlformats.org/drawingml/2006/main" xmlns:r="http://schemas.openxmlformats.org/officeDocument/2006/relationships" xmlns:p="http://schemas.openxmlformats.org/presentationml/2006/main">
   <p:cSld name="Slide 3">
     <p:bg>
@@ -19661,7 +20496,7 @@
 </p:sld>
 </file>
 
-<file path=ppt/slides/slide4.xml><?xml version="1.0" encoding="utf-8"?>
+<file path=ppt/slides/slide5.xml><?xml version="1.0" encoding="utf-8"?>
 <p:sld xmlns:a="http://schemas.openxmlformats.org/drawingml/2006/main" xmlns:r="http://schemas.openxmlformats.org/officeDocument/2006/relationships" xmlns:p="http://schemas.openxmlformats.org/presentationml/2006/main">
   <p:cSld name="Slide 4">
     <p:bg>
@@ -21105,7 +21940,7 @@
 </p:sld>
 </file>
 
-<file path=ppt/slides/slide5.xml><?xml version="1.0" encoding="utf-8"?>
+<file path=ppt/slides/slide6.xml><?xml version="1.0" encoding="utf-8"?>
 <p:sld xmlns:a="http://schemas.openxmlformats.org/drawingml/2006/main" xmlns:r="http://schemas.openxmlformats.org/officeDocument/2006/relationships" xmlns:p="http://schemas.openxmlformats.org/presentationml/2006/main">
   <p:cSld name="Slide 5">
     <p:bg>
@@ -21959,7 +22794,7 @@
 </p:sld>
 </file>
 
-<file path=ppt/slides/slide6.xml><?xml version="1.0" encoding="utf-8"?>
+<file path=ppt/slides/slide7.xml><?xml version="1.0" encoding="utf-8"?>
 <p:sld xmlns:a="http://schemas.openxmlformats.org/drawingml/2006/main" xmlns:r="http://schemas.openxmlformats.org/officeDocument/2006/relationships" xmlns:p="http://schemas.openxmlformats.org/presentationml/2006/main">
   <p:cSld name="Slide 6">
     <p:bg>
@@ -22696,7 +23531,7 @@
 </p:sld>
 </file>
 
-<file path=ppt/slides/slide7.xml><?xml version="1.0" encoding="utf-8"?>
+<file path=ppt/slides/slide8.xml><?xml version="1.0" encoding="utf-8"?>
 <p:sld xmlns:a="http://schemas.openxmlformats.org/drawingml/2006/main" xmlns:r="http://schemas.openxmlformats.org/officeDocument/2006/relationships" xmlns:p="http://schemas.openxmlformats.org/presentationml/2006/main">
   <p:cSld name="Slide 7">
     <p:bg>
@@ -23439,7 +24274,7 @@
 </p:sld>
 </file>
 
-<file path=ppt/slides/slide8.xml><?xml version="1.0" encoding="utf-8"?>
+<file path=ppt/slides/slide9.xml><?xml version="1.0" encoding="utf-8"?>
 <p:sld xmlns:a="http://schemas.openxmlformats.org/drawingml/2006/main" xmlns:r="http://schemas.openxmlformats.org/officeDocument/2006/relationships" xmlns:p="http://schemas.openxmlformats.org/presentationml/2006/main">
   <p:cSld name="Slide 8">
     <p:bg>
@@ -23700,18 +24535,7 @@
                 <a:ea typeface="Calibri" pitchFamily="34" charset="-122"/>
                 <a:cs typeface="Calibri" pitchFamily="34" charset="-120"/>
               </a:rPr>
-              <a:t>Beliefs justified by COHERENCE, not conditional probability (Quine &amp; Ullian, 1978).</a:t>
-            </a:r>
-            <a:r>
-              <a:rPr lang="en-US" sz="850">
-                <a:solidFill>
-                  <a:srgbClr val="1E293B"/>
-                </a:solidFill>
-                <a:latin typeface="Calibri" pitchFamily="34" charset="0"/>
-                <a:ea typeface="Calibri" pitchFamily="34" charset="-122"/>
-                <a:cs typeface="Calibri" pitchFamily="34" charset="-120"/>
-              </a:rPr>
-              <a:t>
+              <a:t>Beliefs justified by COHERENCE, not conditional probability (Quine &amp; Ullian, 1978).
 </a:t>
             </a:r>
             <a:endParaRPr lang="en-US" sz="850" dirty="0"/>
@@ -24665,780 +25489,6 @@
               <a:t>When ART and SRT conflict on a prediction, both positions are maintained with their coherence scores. The web captures the state of the field, not a forced consensus.</a:t>
             </a:r>
             <a:endParaRPr lang="en-US" sz="800" dirty="0"/>
-          </a:p>
-        </p:txBody>
-      </p:sp>
-    </p:spTree>
-  </p:cSld>
-  <p:clrMapOvr>
-    <a:masterClrMapping/>
-  </p:clrMapOvr>
-</p:sld>
-</file>
-
-<file path=ppt/slides/slide9.xml><?xml version="1.0" encoding="utf-8"?>
-<p:sld xmlns:a="http://schemas.openxmlformats.org/drawingml/2006/main" xmlns:r="http://schemas.openxmlformats.org/officeDocument/2006/relationships" xmlns:p="http://schemas.openxmlformats.org/presentationml/2006/main">
-  <p:cSld name="Slide 9">
-    <p:bg>
-      <p:bgPr>
-        <a:solidFill>
-          <a:srgbClr val="FFFFFF"/>
-        </a:solidFill>
-        <a:effectLst/>
-      </p:bgPr>
-    </p:bg>
-    <p:spTree>
-      <p:nvGrpSpPr>
-        <p:cNvPr id="1" name=""/>
-        <p:cNvGrpSpPr/>
-        <p:nvPr/>
-      </p:nvGrpSpPr>
-      <p:grpSpPr>
-        <a:xfrm>
-          <a:off x="0" y="0"/>
-          <a:ext cx="0" cy="0"/>
-          <a:chOff x="0" y="0"/>
-          <a:chExt cx="0" cy="0"/>
-        </a:xfrm>
-      </p:grpSpPr>
-      <p:sp>
-        <p:nvSpPr>
-          <p:cNvPr id="2" name="Text 0"/>
-          <p:cNvSpPr/>
-          <p:nvPr/>
-        </p:nvSpPr>
-        <p:spPr>
-          <a:xfrm>
-            <a:off x="548640" y="228600"/>
-            <a:ext cx="3657600" cy="182880"/>
-          </a:xfrm>
-          <a:prstGeom prst="rect">
-            <a:avLst/>
-          </a:prstGeom>
-          <a:noFill/>
-          <a:ln/>
-        </p:spPr>
-        <p:txBody>
-          <a:bodyPr wrap="square" lIns="0" tIns="0" rIns="0" bIns="0" rtlCol="0" anchor="ctr"/>
-          <a:lstStyle/>
-          <a:p>
-            <a:pPr marL="0" indent="0">
-              <a:buNone/>
-            </a:pPr>
-            <a:r>
-              <a:rPr lang="en-US" sz="900" b="1" kern="0" spc="300" dirty="0">
-                <a:solidFill>
-                  <a:srgbClr val="2B5A8C"/>
-                </a:solidFill>
-                <a:latin typeface="Calibri" pitchFamily="34" charset="0"/>
-                <a:ea typeface="Calibri" pitchFamily="34" charset="-122"/>
-                <a:cs typeface="Calibri" pitchFamily="34" charset="-120"/>
-              </a:rPr>
-              <a:t>NEURO MEETS ENV PSYCH — EXAMPLE 1</a:t>
-            </a:r>
-            <a:endParaRPr lang="en-US" sz="900" dirty="0"/>
-          </a:p>
-        </p:txBody>
-      </p:sp>
-      <p:sp>
-        <p:nvSpPr>
-          <p:cNvPr id="3" name="Text 1"/>
-          <p:cNvSpPr/>
-          <p:nvPr/>
-        </p:nvSpPr>
-        <p:spPr>
-          <a:xfrm>
-            <a:off x="548640" y="438912"/>
-            <a:ext cx="8046720" cy="640080"/>
-          </a:xfrm>
-          <a:prstGeom prst="rect">
-            <a:avLst/>
-          </a:prstGeom>
-          <a:noFill/>
-          <a:ln/>
-        </p:spPr>
-        <p:txBody>
-          <a:bodyPr wrap="square" lIns="0" tIns="0" rIns="0" bIns="0" rtlCol="0" anchor="ctr"/>
-          <a:lstStyle/>
-          <a:p>
-            <a:pPr marL="0" indent="0">
-              <a:buNone/>
-            </a:pPr>
-            <a:r>
-              <a:rPr lang="en-US" sz="2600" b="1" dirty="0">
-                <a:solidFill>
-                  <a:srgbClr val="1E293B"/>
-                </a:solidFill>
-                <a:latin typeface="Georgia" pitchFamily="34" charset="0"/>
-                <a:ea typeface="Georgia" pitchFamily="34" charset="-122"/>
-                <a:cs typeface="Georgia" pitchFamily="34" charset="-120"/>
-              </a:rPr>
-              <a:t>Daylight: Two Pathways,</a:t>
-            </a:r>
-            <a:endParaRPr lang="en-US" sz="2600" dirty="0"/>
-          </a:p>
-          <a:p>
-            <a:pPr marL="0" indent="0">
-              <a:buNone/>
-            </a:pPr>
-            <a:r>
-              <a:rPr lang="en-US" sz="2600" b="1" dirty="0">
-                <a:solidFill>
-                  <a:srgbClr val="1E293B"/>
-                </a:solidFill>
-                <a:latin typeface="Georgia" pitchFamily="34" charset="0"/>
-                <a:ea typeface="Georgia" pitchFamily="34" charset="-122"/>
-                <a:cs typeface="Georgia" pitchFamily="34" charset="-120"/>
-              </a:rPr>
-              <a:t>Two Design Strategies</a:t>
-            </a:r>
-            <a:endParaRPr lang="en-US" sz="2600" dirty="0"/>
-          </a:p>
-        </p:txBody>
-      </p:sp>
-      <p:sp>
-        <p:nvSpPr>
-          <p:cNvPr id="4" name="Shape 2"/>
-          <p:cNvSpPr/>
-          <p:nvPr/>
-        </p:nvSpPr>
-        <p:spPr>
-          <a:xfrm>
-            <a:off x="548640" y="1280160"/>
-            <a:ext cx="3794760" cy="2011680"/>
-          </a:xfrm>
-          <a:prstGeom prst="rect">
-            <a:avLst/>
-          </a:prstGeom>
-          <a:solidFill>
-            <a:srgbClr val="F8FAFC"/>
-          </a:solidFill>
-          <a:ln w="6350">
-            <a:solidFill>
-              <a:srgbClr val="E2E8F0"/>
-            </a:solidFill>
-            <a:prstDash val="solid"/>
-          </a:ln>
-          <a:effectLst>
-            <a:outerShdw blurRad="50800" dist="12700" dir="8100000" algn="bl" rotWithShape="0">
-              <a:srgbClr val="000000">
-                <a:alpha val="6000"/>
-              </a:srgbClr>
-            </a:outerShdw>
-          </a:effectLst>
-        </p:spPr>
-        <p:txBody>
-          <a:bodyPr/>
-          <a:lstStyle/>
-          <a:p>
-            <a:endParaRPr lang="en-US"/>
-          </a:p>
-        </p:txBody>
-      </p:sp>
-      <p:sp>
-        <p:nvSpPr>
-          <p:cNvPr id="5" name="Shape 3"/>
-          <p:cNvSpPr/>
-          <p:nvPr/>
-        </p:nvSpPr>
-        <p:spPr>
-          <a:xfrm>
-            <a:off x="548640" y="1280160"/>
-            <a:ext cx="54864" cy="2011680"/>
-          </a:xfrm>
-          <a:prstGeom prst="rect">
-            <a:avLst/>
-          </a:prstGeom>
-          <a:solidFill>
-            <a:srgbClr val="2B5A8C"/>
-          </a:solidFill>
-          <a:ln/>
-        </p:spPr>
-        <p:txBody>
-          <a:bodyPr/>
-          <a:lstStyle/>
-          <a:p>
-            <a:endParaRPr lang="en-US"/>
-          </a:p>
-        </p:txBody>
-      </p:sp>
-      <p:sp>
-        <p:nvSpPr>
-          <p:cNvPr id="6" name="Text 4"/>
-          <p:cNvSpPr/>
-          <p:nvPr/>
-        </p:nvSpPr>
-        <p:spPr>
-          <a:xfrm>
-            <a:off x="777240" y="1353312"/>
-            <a:ext cx="3383280" cy="201168"/>
-          </a:xfrm>
-          <a:prstGeom prst="rect">
-            <a:avLst/>
-          </a:prstGeom>
-          <a:noFill/>
-          <a:ln/>
-        </p:spPr>
-        <p:txBody>
-          <a:bodyPr wrap="square" lIns="0" tIns="0" rIns="0" bIns="0" rtlCol="0" anchor="ctr"/>
-          <a:lstStyle/>
-          <a:p>
-            <a:pPr marL="0" indent="0">
-              <a:buNone/>
-            </a:pPr>
-            <a:r>
-              <a:rPr lang="en-US" sz="850" b="1" kern="0" spc="200" dirty="0">
-                <a:solidFill>
-                  <a:srgbClr val="2B5A8C"/>
-                </a:solidFill>
-                <a:latin typeface="Calibri" pitchFamily="34" charset="0"/>
-                <a:ea typeface="Calibri" pitchFamily="34" charset="-122"/>
-                <a:cs typeface="Calibri" pitchFamily="34" charset="-120"/>
-              </a:rPr>
-              <a:t>IMAGE-FORMING PATHWAY</a:t>
-            </a:r>
-            <a:endParaRPr lang="en-US" sz="850" dirty="0"/>
-          </a:p>
-        </p:txBody>
-      </p:sp>
-      <p:sp>
-        <p:nvSpPr>
-          <p:cNvPr id="7" name="Text 5"/>
-          <p:cNvSpPr/>
-          <p:nvPr/>
-        </p:nvSpPr>
-        <p:spPr>
-          <a:xfrm>
-            <a:off x="777240" y="1600200"/>
-            <a:ext cx="3383280" cy="1554480"/>
-          </a:xfrm>
-          <a:prstGeom prst="rect">
-            <a:avLst/>
-          </a:prstGeom>
-          <a:noFill/>
-          <a:ln/>
-        </p:spPr>
-        <p:txBody>
-          <a:bodyPr wrap="square" lIns="0" tIns="0" rIns="0" bIns="0" rtlCol="0" anchor="ctr"/>
-          <a:lstStyle/>
-          <a:p>
-            <a:pPr marL="0" indent="0">
-              <a:lnSpc>
-                <a:spcPct val="110000"/>
-              </a:lnSpc>
-              <a:buNone/>
-            </a:pPr>
-            <a:r>
-              <a:rPr lang="en-US" sz="1050" dirty="0">
-                <a:solidFill>
-                  <a:srgbClr val="1E293B"/>
-                </a:solidFill>
-                <a:latin typeface="Calibri" pitchFamily="34" charset="0"/>
-                <a:ea typeface="Calibri" pitchFamily="34" charset="-122"/>
-                <a:cs typeface="Calibri" pitchFamily="34" charset="-120"/>
-              </a:rPr>
-              <a:t>Rods/cones → V1 → ventral stream → scene perception
-</a:t>
-            </a:r>
-            <a:endParaRPr lang="en-US" sz="1050" dirty="0"/>
-          </a:p>
-          <a:p>
-            <a:pPr marL="0" indent="0">
-              <a:lnSpc>
-                <a:spcPct val="110000"/>
-              </a:lnSpc>
-              <a:buNone/>
-            </a:pPr>
-            <a:r>
-              <a:rPr lang="en-US" sz="1050" b="1" dirty="0">
-                <a:solidFill>
-                  <a:srgbClr val="1E293B"/>
-                </a:solidFill>
-                <a:latin typeface="Calibri" pitchFamily="34" charset="0"/>
-                <a:ea typeface="Calibri" pitchFamily="34" charset="-122"/>
-                <a:cs typeface="Calibri" pitchFamily="34" charset="-120"/>
-              </a:rPr>
-              <a:t>Provides: </a:t>
-            </a:r>
-            <a:r>
-              <a:rPr lang="en-US" sz="1050" dirty="0">
-                <a:solidFill>
-                  <a:srgbClr val="1E293B"/>
-                </a:solidFill>
-                <a:latin typeface="Calibri" pitchFamily="34" charset="0"/>
-                <a:ea typeface="Calibri" pitchFamily="34" charset="-122"/>
-                <a:cs typeface="Calibri" pitchFamily="34" charset="-120"/>
-              </a:rPr>
-              <a:t>visual complexity, fractal content, biophilic stimulation
-</a:t>
-            </a:r>
-            <a:endParaRPr lang="en-US" sz="1050" dirty="0"/>
-          </a:p>
-          <a:p>
-            <a:pPr marL="0" indent="0">
-              <a:lnSpc>
-                <a:spcPct val="110000"/>
-              </a:lnSpc>
-              <a:buNone/>
-            </a:pPr>
-            <a:r>
-              <a:rPr lang="en-US" sz="1050" b="1" dirty="0">
-                <a:solidFill>
-                  <a:srgbClr val="1E293B"/>
-                </a:solidFill>
-                <a:latin typeface="Calibri" pitchFamily="34" charset="0"/>
-                <a:ea typeface="Calibri" pitchFamily="34" charset="-122"/>
-                <a:cs typeface="Calibri" pitchFamily="34" charset="-120"/>
-              </a:rPr>
-              <a:t>Design: </a:t>
-            </a:r>
-            <a:r>
-              <a:rPr lang="en-US" sz="1050" dirty="0">
-                <a:solidFill>
-                  <a:srgbClr val="1E293B"/>
-                </a:solidFill>
-                <a:latin typeface="Calibri" pitchFamily="34" charset="0"/>
-                <a:ea typeface="Calibri" pitchFamily="34" charset="-122"/>
-                <a:cs typeface="Calibri" pitchFamily="34" charset="-120"/>
-              </a:rPr>
-              <a:t>Window SIZE, VIEW CONTENT (nature vs. parking lot)
-</a:t>
-            </a:r>
-            <a:endParaRPr lang="en-US" sz="1050" dirty="0"/>
-          </a:p>
-          <a:p>
-            <a:pPr marL="0" indent="0">
-              <a:lnSpc>
-                <a:spcPct val="110000"/>
-              </a:lnSpc>
-              <a:buNone/>
-            </a:pPr>
-            <a:r>
-              <a:rPr lang="en-US" sz="1050" i="1" dirty="0">
-                <a:solidFill>
-                  <a:srgbClr val="1E293B"/>
-                </a:solidFill>
-                <a:latin typeface="Calibri" pitchFamily="34" charset="0"/>
-                <a:ea typeface="Calibri" pitchFamily="34" charset="-122"/>
-                <a:cs typeface="Calibri" pitchFamily="34" charset="-120"/>
-              </a:rPr>
-              <a:t>The Ulrich effect operates here — it's the image that heals</a:t>
-            </a:r>
-            <a:endParaRPr lang="en-US" sz="1050" dirty="0"/>
-          </a:p>
-        </p:txBody>
-      </p:sp>
-      <p:sp>
-        <p:nvSpPr>
-          <p:cNvPr id="8" name="Shape 6"/>
-          <p:cNvSpPr/>
-          <p:nvPr/>
-        </p:nvSpPr>
-        <p:spPr>
-          <a:xfrm>
-            <a:off x="4800600" y="1280160"/>
-            <a:ext cx="3977640" cy="2011680"/>
-          </a:xfrm>
-          <a:prstGeom prst="rect">
-            <a:avLst/>
-          </a:prstGeom>
-          <a:solidFill>
-            <a:srgbClr val="F8FAFC"/>
-          </a:solidFill>
-          <a:ln w="6350">
-            <a:solidFill>
-              <a:srgbClr val="E2E8F0"/>
-            </a:solidFill>
-            <a:prstDash val="solid"/>
-          </a:ln>
-          <a:effectLst>
-            <a:outerShdw blurRad="50800" dist="12700" dir="8100000" algn="bl" rotWithShape="0">
-              <a:srgbClr val="000000">
-                <a:alpha val="6000"/>
-              </a:srgbClr>
-            </a:outerShdw>
-          </a:effectLst>
-        </p:spPr>
-        <p:txBody>
-          <a:bodyPr/>
-          <a:lstStyle/>
-          <a:p>
-            <a:endParaRPr lang="en-US"/>
-          </a:p>
-        </p:txBody>
-      </p:sp>
-      <p:sp>
-        <p:nvSpPr>
-          <p:cNvPr id="9" name="Shape 7"/>
-          <p:cNvSpPr/>
-          <p:nvPr/>
-        </p:nvSpPr>
-        <p:spPr>
-          <a:xfrm>
-            <a:off x="4800600" y="1280160"/>
-            <a:ext cx="54864" cy="2011680"/>
-          </a:xfrm>
-          <a:prstGeom prst="rect">
-            <a:avLst/>
-          </a:prstGeom>
-          <a:solidFill>
-            <a:srgbClr val="6B3B8C"/>
-          </a:solidFill>
-          <a:ln/>
-        </p:spPr>
-        <p:txBody>
-          <a:bodyPr/>
-          <a:lstStyle/>
-          <a:p>
-            <a:endParaRPr lang="en-US"/>
-          </a:p>
-        </p:txBody>
-      </p:sp>
-      <p:sp>
-        <p:nvSpPr>
-          <p:cNvPr id="10" name="Text 8"/>
-          <p:cNvSpPr/>
-          <p:nvPr/>
-        </p:nvSpPr>
-        <p:spPr>
-          <a:xfrm>
-            <a:off x="5029200" y="1353312"/>
-            <a:ext cx="3566160" cy="201168"/>
-          </a:xfrm>
-          <a:prstGeom prst="rect">
-            <a:avLst/>
-          </a:prstGeom>
-          <a:noFill/>
-          <a:ln/>
-        </p:spPr>
-        <p:txBody>
-          <a:bodyPr wrap="square" lIns="0" tIns="0" rIns="0" bIns="0" rtlCol="0" anchor="ctr"/>
-          <a:lstStyle/>
-          <a:p>
-            <a:pPr marL="0" indent="0">
-              <a:buNone/>
-            </a:pPr>
-            <a:r>
-              <a:rPr lang="en-US" sz="850" b="1" kern="0" spc="200" dirty="0">
-                <a:solidFill>
-                  <a:srgbClr val="6B3B8C"/>
-                </a:solidFill>
-                <a:latin typeface="Calibri" pitchFamily="34" charset="0"/>
-                <a:ea typeface="Calibri" pitchFamily="34" charset="-122"/>
-                <a:cs typeface="Calibri" pitchFamily="34" charset="-120"/>
-              </a:rPr>
-              <a:t>NON-IMAGE-FORMING PATHWAY</a:t>
-            </a:r>
-            <a:endParaRPr lang="en-US" sz="850" dirty="0"/>
-          </a:p>
-        </p:txBody>
-      </p:sp>
-      <p:sp>
-        <p:nvSpPr>
-          <p:cNvPr id="11" name="Text 9"/>
-          <p:cNvSpPr/>
-          <p:nvPr/>
-        </p:nvSpPr>
-        <p:spPr>
-          <a:xfrm>
-            <a:off x="5029200" y="1600200"/>
-            <a:ext cx="3566160" cy="1554480"/>
-          </a:xfrm>
-          <a:prstGeom prst="rect">
-            <a:avLst/>
-          </a:prstGeom>
-          <a:noFill/>
-          <a:ln/>
-        </p:spPr>
-        <p:txBody>
-          <a:bodyPr wrap="square" lIns="0" tIns="0" rIns="0" bIns="0" rtlCol="0" anchor="ctr"/>
-          <a:lstStyle/>
-          <a:p>
-            <a:pPr marL="0" indent="0">
-              <a:lnSpc>
-                <a:spcPct val="110000"/>
-              </a:lnSpc>
-              <a:buNone/>
-            </a:pPr>
-            <a:r>
-              <a:rPr lang="en-US" sz="1050" dirty="0">
-                <a:solidFill>
-                  <a:srgbClr val="1E293B"/>
-                </a:solidFill>
-                <a:latin typeface="Calibri" pitchFamily="34" charset="0"/>
-                <a:ea typeface="Calibri" pitchFamily="34" charset="-122"/>
-                <a:cs typeface="Calibri" pitchFamily="34" charset="-120"/>
-              </a:rPr>
-              <a:t>ipRGCs (melanopsin) → SCN → circadian regulation
-</a:t>
-            </a:r>
-            <a:endParaRPr lang="en-US" sz="1050" dirty="0"/>
-          </a:p>
-          <a:p>
-            <a:pPr marL="0" indent="0">
-              <a:lnSpc>
-                <a:spcPct val="110000"/>
-              </a:lnSpc>
-              <a:buNone/>
-            </a:pPr>
-            <a:r>
-              <a:rPr lang="en-US" sz="1050" b="1" dirty="0">
-                <a:solidFill>
-                  <a:srgbClr val="1E293B"/>
-                </a:solidFill>
-                <a:latin typeface="Calibri" pitchFamily="34" charset="0"/>
-                <a:ea typeface="Calibri" pitchFamily="34" charset="-122"/>
-                <a:cs typeface="Calibri" pitchFamily="34" charset="-120"/>
-              </a:rPr>
-              <a:t>Provides: </a:t>
-            </a:r>
-            <a:r>
-              <a:rPr lang="en-US" sz="1050" dirty="0">
-                <a:solidFill>
-                  <a:srgbClr val="1E293B"/>
-                </a:solidFill>
-                <a:latin typeface="Calibri" pitchFamily="34" charset="0"/>
-                <a:ea typeface="Calibri" pitchFamily="34" charset="-122"/>
-                <a:cs typeface="Calibri" pitchFamily="34" charset="-120"/>
-              </a:rPr>
-              <a:t>circadian entrainment, alertness, melatonin timing
-</a:t>
-            </a:r>
-            <a:endParaRPr lang="en-US" sz="1050" dirty="0"/>
-          </a:p>
-          <a:p>
-            <a:pPr marL="0" indent="0">
-              <a:lnSpc>
-                <a:spcPct val="110000"/>
-              </a:lnSpc>
-              <a:buNone/>
-            </a:pPr>
-            <a:r>
-              <a:rPr lang="en-US" sz="1050" b="1" dirty="0">
-                <a:solidFill>
-                  <a:srgbClr val="1E293B"/>
-                </a:solidFill>
-                <a:latin typeface="Calibri" pitchFamily="34" charset="0"/>
-                <a:ea typeface="Calibri" pitchFamily="34" charset="-122"/>
-                <a:cs typeface="Calibri" pitchFamily="34" charset="-120"/>
-              </a:rPr>
-              <a:t>Design: </a:t>
-            </a:r>
-            <a:r>
-              <a:rPr lang="en-US" sz="1050" dirty="0">
-                <a:solidFill>
-                  <a:srgbClr val="1E293B"/>
-                </a:solidFill>
-                <a:latin typeface="Calibri" pitchFamily="34" charset="0"/>
-                <a:ea typeface="Calibri" pitchFamily="34" charset="-122"/>
-                <a:cs typeface="Calibri" pitchFamily="34" charset="-120"/>
-              </a:rPr>
-              <a:t>LIGHT SPECTRUM, TIMING, INTENSITY
-</a:t>
-            </a:r>
-            <a:endParaRPr lang="en-US" sz="1050" dirty="0"/>
-          </a:p>
-          <a:p>
-            <a:pPr marL="0" indent="0">
-              <a:lnSpc>
-                <a:spcPct val="110000"/>
-              </a:lnSpc>
-              <a:buNone/>
-            </a:pPr>
-            <a:r>
-              <a:rPr lang="en-US" sz="1050" i="1" dirty="0">
-                <a:solidFill>
-                  <a:srgbClr val="1E293B"/>
-                </a:solidFill>
-                <a:latin typeface="Calibri" pitchFamily="34" charset="0"/>
-                <a:ea typeface="Calibri" pitchFamily="34" charset="-122"/>
-                <a:cs typeface="Calibri" pitchFamily="34" charset="-120"/>
-              </a:rPr>
-              <a:t>Heschong's learning effect includes this — blue light at 10am</a:t>
-            </a:r>
-            <a:endParaRPr lang="en-US" sz="1050" dirty="0"/>
-          </a:p>
-        </p:txBody>
-      </p:sp>
-      <p:sp>
-        <p:nvSpPr>
-          <p:cNvPr id="12" name="Shape 10"/>
-          <p:cNvSpPr/>
-          <p:nvPr/>
-        </p:nvSpPr>
-        <p:spPr>
-          <a:xfrm>
-            <a:off x="548640" y="3520440"/>
-            <a:ext cx="8046720" cy="1234440"/>
-          </a:xfrm>
-          <a:prstGeom prst="rect">
-            <a:avLst/>
-          </a:prstGeom>
-          <a:solidFill>
-            <a:srgbClr val="F8FAFC"/>
-          </a:solidFill>
-          <a:ln w="6350">
-            <a:solidFill>
-              <a:srgbClr val="E2E8F0"/>
-            </a:solidFill>
-            <a:prstDash val="solid"/>
-          </a:ln>
-          <a:effectLst>
-            <a:outerShdw blurRad="50800" dist="12700" dir="8100000" algn="bl" rotWithShape="0">
-              <a:srgbClr val="000000">
-                <a:alpha val="6000"/>
-              </a:srgbClr>
-            </a:outerShdw>
-          </a:effectLst>
-        </p:spPr>
-        <p:txBody>
-          <a:bodyPr/>
-          <a:lstStyle/>
-          <a:p>
-            <a:endParaRPr lang="en-US"/>
-          </a:p>
-        </p:txBody>
-      </p:sp>
-      <p:sp>
-        <p:nvSpPr>
-          <p:cNvPr id="13" name="Shape 11"/>
-          <p:cNvSpPr/>
-          <p:nvPr/>
-        </p:nvSpPr>
-        <p:spPr>
-          <a:xfrm>
-            <a:off x="548640" y="3520440"/>
-            <a:ext cx="54864" cy="1234440"/>
-          </a:xfrm>
-          <a:prstGeom prst="rect">
-            <a:avLst/>
-          </a:prstGeom>
-          <a:solidFill>
-            <a:srgbClr val="B85042"/>
-          </a:solidFill>
-          <a:ln/>
-        </p:spPr>
-        <p:txBody>
-          <a:bodyPr/>
-          <a:lstStyle/>
-          <a:p>
-            <a:endParaRPr lang="en-US"/>
-          </a:p>
-        </p:txBody>
-      </p:sp>
-      <p:sp>
-        <p:nvSpPr>
-          <p:cNvPr id="14" name="Text 12"/>
-          <p:cNvSpPr/>
-          <p:nvPr/>
-        </p:nvSpPr>
-        <p:spPr>
-          <a:xfrm>
-            <a:off x="777240" y="3584448"/>
-            <a:ext cx="7589520" cy="1051560"/>
-          </a:xfrm>
-          <a:prstGeom prst="rect">
-            <a:avLst/>
-          </a:prstGeom>
-          <a:noFill/>
-          <a:ln/>
-        </p:spPr>
-        <p:txBody>
-          <a:bodyPr wrap="square" lIns="0" tIns="0" rIns="0" bIns="0" rtlCol="0" anchor="ctr"/>
-          <a:lstStyle/>
-          <a:p>
-            <a:pPr marL="0" indent="0">
-              <a:lnSpc>
-                <a:spcPct val="125000"/>
-              </a:lnSpc>
-              <a:buNone/>
-            </a:pPr>
-            <a:r>
-              <a:rPr lang="en-US" sz="1100" b="1" dirty="0">
-                <a:solidFill>
-                  <a:srgbClr val="B85042"/>
-                </a:solidFill>
-                <a:latin typeface="Calibri" pitchFamily="34" charset="0"/>
-                <a:ea typeface="Calibri" pitchFamily="34" charset="-122"/>
-                <a:cs typeface="Calibri" pitchFamily="34" charset="-120"/>
-              </a:rPr>
-              <a:t>The insight: </a:t>
-            </a:r>
-            <a:r>
-              <a:rPr lang="en-US" sz="1100" dirty="0">
-                <a:solidFill>
-                  <a:srgbClr val="1E293B"/>
-                </a:solidFill>
-                <a:latin typeface="Calibri" pitchFamily="34" charset="0"/>
-                <a:ea typeface="Calibri" pitchFamily="34" charset="-122"/>
-                <a:cs typeface="Calibri" pitchFamily="34" charset="-120"/>
-              </a:rPr>
-              <a:t>Heschong's "daylight improves learning" conflates two independent mechanisms.
-</a:t>
-            </a:r>
-            <a:endParaRPr lang="en-US" sz="1100" dirty="0"/>
-          </a:p>
-          <a:p>
-            <a:pPr marL="0" indent="0">
-              <a:lnSpc>
-                <a:spcPct val="125000"/>
-              </a:lnSpc>
-              <a:buNone/>
-            </a:pPr>
-            <a:r>
-              <a:rPr lang="en-US" sz="1100" dirty="0">
-                <a:solidFill>
-                  <a:srgbClr val="1E293B"/>
-                </a:solidFill>
-                <a:latin typeface="Calibri" pitchFamily="34" charset="0"/>
-                <a:ea typeface="Calibri" pitchFamily="34" charset="-122"/>
-                <a:cs typeface="Calibri" pitchFamily="34" charset="-120"/>
-              </a:rPr>
-              <a:t>A windowless room with tunable LEDs can provide pathway 2 (circadian) without pathway 1 (view).
-</a:t>
-            </a:r>
-            <a:endParaRPr lang="en-US" sz="1100" dirty="0"/>
-          </a:p>
-          <a:p>
-            <a:pPr marL="0" indent="0">
-              <a:lnSpc>
-                <a:spcPct val="125000"/>
-              </a:lnSpc>
-              <a:buNone/>
-            </a:pPr>
-            <a:r>
-              <a:rPr lang="en-US" sz="1100" dirty="0">
-                <a:solidFill>
-                  <a:srgbClr val="1E293B"/>
-                </a:solidFill>
-                <a:latin typeface="Calibri" pitchFamily="34" charset="0"/>
-                <a:ea typeface="Calibri" pitchFamily="34" charset="-122"/>
-                <a:cs typeface="Calibri" pitchFamily="34" charset="-120"/>
-              </a:rPr>
-              <a:t>A small window provides a view but insufficient circadian signal.
-</a:t>
-            </a:r>
-            <a:endParaRPr lang="en-US" sz="1100" dirty="0"/>
-          </a:p>
-          <a:p>
-            <a:pPr marL="0" indent="0">
-              <a:lnSpc>
-                <a:spcPct val="125000"/>
-              </a:lnSpc>
-              <a:buNone/>
-            </a:pPr>
-            <a:r>
-              <a:rPr lang="en-US" sz="1100" b="1" dirty="0">
-                <a:solidFill>
-                  <a:srgbClr val="1E293B"/>
-                </a:solidFill>
-                <a:latin typeface="Calibri" pitchFamily="34" charset="0"/>
-                <a:ea typeface="Calibri" pitchFamily="34" charset="-122"/>
-                <a:cs typeface="Calibri" pitchFamily="34" charset="-120"/>
-              </a:rPr>
-              <a:t>The template decomposition generates different architectural specifications for each.</a:t>
-            </a:r>
-            <a:endParaRPr lang="en-US" sz="1100" dirty="0"/>
           </a:p>
         </p:txBody>
       </p:sp>
